--- a/materials/file-folder.pptx
+++ b/materials/file-folder.pptx
@@ -5,7 +5,7 @@
     <p:sldMasterId id="2147483660" r:id="rId1"/>
   </p:sldMasterIdLst>
   <p:notesMasterIdLst>
-    <p:notesMasterId r:id="rId9"/>
+    <p:notesMasterId r:id="rId11"/>
   </p:notesMasterIdLst>
   <p:sldIdLst>
     <p:sldId id="355" r:id="rId2"/>
@@ -13,8 +13,10 @@
     <p:sldId id="357" r:id="rId4"/>
     <p:sldId id="358" r:id="rId5"/>
     <p:sldId id="359" r:id="rId6"/>
-    <p:sldId id="360" r:id="rId7"/>
-    <p:sldId id="361" r:id="rId8"/>
+    <p:sldId id="364" r:id="rId7"/>
+    <p:sldId id="360" r:id="rId8"/>
+    <p:sldId id="361" r:id="rId9"/>
+    <p:sldId id="363" r:id="rId10"/>
   </p:sldIdLst>
   <p:sldSz cx="9144000" cy="6858000" type="screen4x3"/>
   <p:notesSz cx="6858000" cy="9144000"/>
@@ -203,7 +205,7 @@
           <a:p>
             <a:fld id="{143D0302-6A01-B948-9EFD-7D48D6E1EA17}" type="datetimeFigureOut">
               <a:rPr kumimoji="1" lang="ja-JP" altLang="en-US" smtClean="0"/>
-              <a:t>2025/5/13</a:t>
+              <a:t>2025/6/3</a:t>
             </a:fld>
             <a:endParaRPr kumimoji="1" lang="ja-JP" altLang="en-US"/>
           </a:p>
@@ -633,7 +635,7 @@
           <a:p>
             <a:fld id="{E7E571D0-F083-AA46-BA1D-B30058881D54}" type="datetime1">
               <a:rPr kumimoji="1" lang="ja-JP" altLang="en-US" smtClean="0"/>
-              <a:t>2025/5/13</a:t>
+              <a:t>2025/6/3</a:t>
             </a:fld>
             <a:endParaRPr kumimoji="1" lang="ja-JP" altLang="en-US"/>
           </a:p>
@@ -835,7 +837,7 @@
           <a:p>
             <a:fld id="{95872798-86BF-D645-832E-B6E4AAE05135}" type="datetime1">
               <a:rPr kumimoji="1" lang="ja-JP" altLang="en-US" smtClean="0"/>
-              <a:t>2025/5/13</a:t>
+              <a:t>2025/6/3</a:t>
             </a:fld>
             <a:endParaRPr kumimoji="1" lang="ja-JP" altLang="en-US"/>
           </a:p>
@@ -1047,7 +1049,7 @@
           <a:p>
             <a:fld id="{F31AD8DB-1ADE-354C-8BE1-5D258B458081}" type="datetime1">
               <a:rPr kumimoji="1" lang="ja-JP" altLang="en-US" smtClean="0"/>
-              <a:t>2025/5/13</a:t>
+              <a:t>2025/6/3</a:t>
             </a:fld>
             <a:endParaRPr kumimoji="1" lang="ja-JP" altLang="en-US"/>
           </a:p>
@@ -1249,7 +1251,7 @@
           <a:p>
             <a:fld id="{ED56A724-01AF-534A-8324-F59D8188BB4B}" type="datetime1">
               <a:rPr kumimoji="1" lang="ja-JP" altLang="en-US" smtClean="0"/>
-              <a:t>2025/5/13</a:t>
+              <a:t>2025/6/3</a:t>
             </a:fld>
             <a:endParaRPr kumimoji="1" lang="ja-JP" altLang="en-US"/>
           </a:p>
@@ -1493,7 +1495,7 @@
           <a:p>
             <a:fld id="{5E7BEBD0-A6D7-3C40-90A7-46FE9A29449D}" type="datetime1">
               <a:rPr kumimoji="1" lang="ja-JP" altLang="en-US" smtClean="0"/>
-              <a:t>2025/5/13</a:t>
+              <a:t>2025/6/3</a:t>
             </a:fld>
             <a:endParaRPr kumimoji="1" lang="ja-JP" altLang="en-US"/>
           </a:p>
@@ -1789,7 +1791,7 @@
           <a:p>
             <a:fld id="{8C68EAA0-0290-A049-AB0E-77368EA7DC5E}" type="datetime1">
               <a:rPr kumimoji="1" lang="ja-JP" altLang="en-US" smtClean="0"/>
-              <a:t>2025/5/13</a:t>
+              <a:t>2025/6/3</a:t>
             </a:fld>
             <a:endParaRPr kumimoji="1" lang="ja-JP" altLang="en-US"/>
           </a:p>
@@ -2220,7 +2222,7 @@
           <a:p>
             <a:fld id="{AC8DA66C-4753-9D4A-A4D0-A2D05FD4BDE9}" type="datetime1">
               <a:rPr kumimoji="1" lang="ja-JP" altLang="en-US" smtClean="0"/>
-              <a:t>2025/5/13</a:t>
+              <a:t>2025/6/3</a:t>
             </a:fld>
             <a:endParaRPr kumimoji="1" lang="ja-JP" altLang="en-US"/>
           </a:p>
@@ -2338,7 +2340,7 @@
           <a:p>
             <a:fld id="{149CCED1-5CC5-134F-9F83-99A3A9CC9AE6}" type="datetime1">
               <a:rPr kumimoji="1" lang="ja-JP" altLang="en-US" smtClean="0"/>
-              <a:t>2025/5/13</a:t>
+              <a:t>2025/6/3</a:t>
             </a:fld>
             <a:endParaRPr kumimoji="1" lang="ja-JP" altLang="en-US"/>
           </a:p>
@@ -2433,7 +2435,7 @@
           <a:p>
             <a:fld id="{7F4B22A9-7A7F-5647-953B-2EC2F1A5BD2B}" type="datetime1">
               <a:rPr kumimoji="1" lang="ja-JP" altLang="en-US" smtClean="0"/>
-              <a:t>2025/5/13</a:t>
+              <a:t>2025/6/3</a:t>
             </a:fld>
             <a:endParaRPr kumimoji="1" lang="ja-JP" altLang="en-US"/>
           </a:p>
@@ -2742,7 +2744,7 @@
           <a:p>
             <a:fld id="{CAEBA774-2567-1442-9B0E-3143FE8D8F09}" type="datetime1">
               <a:rPr kumimoji="1" lang="ja-JP" altLang="en-US" smtClean="0"/>
-              <a:t>2025/5/13</a:t>
+              <a:t>2025/6/3</a:t>
             </a:fld>
             <a:endParaRPr kumimoji="1" lang="ja-JP" altLang="en-US"/>
           </a:p>
@@ -2999,7 +3001,7 @@
           <a:p>
             <a:fld id="{68FDA5AB-F34F-CA44-9B14-2CA68E357C6F}" type="datetime1">
               <a:rPr kumimoji="1" lang="ja-JP" altLang="en-US" smtClean="0"/>
-              <a:t>2025/5/13</a:t>
+              <a:t>2025/6/3</a:t>
             </a:fld>
             <a:endParaRPr kumimoji="1" lang="ja-JP" altLang="en-US"/>
           </a:p>
@@ -3243,7 +3245,7 @@
             <a:fld id="{5C78B245-F1D2-CD46-ADA5-3D00524C4F4C}" type="datetime1">
               <a:rPr kumimoji="1" lang="ja-JP" altLang="en-US" smtClean="0"/>
               <a:pPr/>
-              <a:t>2025/5/13</a:t>
+              <a:t>2025/6/3</a:t>
             </a:fld>
             <a:endParaRPr kumimoji="1" lang="ja-JP" altLang="en-US"/>
           </a:p>
@@ -6012,6 +6014,42 @@
           </a:p>
         </p:txBody>
       </p:sp>
+      <p:sp>
+        <p:nvSpPr>
+          <p:cNvPr id="3" name="テキスト ボックス 2">
+            <a:extLst>
+              <a:ext uri="{FF2B5EF4-FFF2-40B4-BE49-F238E27FC236}">
+                <a16:creationId xmlns:a16="http://schemas.microsoft.com/office/drawing/2014/main" id="{9E14063F-74AD-0DBE-9B18-9D4EF183A2E7}"/>
+              </a:ext>
+            </a:extLst>
+          </p:cNvPr>
+          <p:cNvSpPr txBox="1"/>
+          <p:nvPr/>
+        </p:nvSpPr>
+        <p:spPr>
+          <a:xfrm>
+            <a:off x="279400" y="215900"/>
+            <a:ext cx="1197764" cy="369332"/>
+          </a:xfrm>
+          <a:prstGeom prst="rect">
+            <a:avLst/>
+          </a:prstGeom>
+          <a:noFill/>
+        </p:spPr>
+        <p:txBody>
+          <a:bodyPr wrap="none" rtlCol="0">
+            <a:spAutoFit/>
+          </a:bodyPr>
+          <a:lstStyle/>
+          <a:p>
+            <a:r>
+              <a:rPr kumimoji="1" lang="en-US" altLang="ja-JP" dirty="0" err="1"/>
+              <a:t>unixtree</a:t>
+            </a:r>
+            <a:endParaRPr kumimoji="1" lang="ja-JP" altLang="en-US"/>
+          </a:p>
+        </p:txBody>
+      </p:sp>
     </p:spTree>
     <p:extLst>
       <p:ext uri="{BB962C8B-B14F-4D97-AF65-F5344CB8AC3E}">
@@ -6177,17 +6215,19 @@
             <p:nvPr/>
           </p:nvCxnSpPr>
           <p:spPr>
-            <a:xfrm>
-              <a:off x="2021294" y="2852959"/>
-              <a:ext cx="3600" cy="251999"/>
+            <a:xfrm flipV="1">
+              <a:off x="2013197" y="2833778"/>
+              <a:ext cx="5399" cy="234612"/>
             </a:xfrm>
             <a:prstGeom prst="line">
               <a:avLst/>
             </a:prstGeom>
             <a:ln w="25400">
               <a:solidFill>
-                <a:schemeClr val="tx1"/>
+                <a:schemeClr val="bg2"/>
               </a:solidFill>
+              <a:headEnd type="triangle" w="lg" len="lg"/>
+              <a:tailEnd w="lg" len="lg"/>
             </a:ln>
           </p:spPr>
           <p:style>
@@ -6229,7 +6269,7 @@
             </a:prstGeom>
             <a:ln w="25400">
               <a:solidFill>
-                <a:schemeClr val="tx1"/>
+                <a:schemeClr val="bg2"/>
               </a:solidFill>
             </a:ln>
           </p:spPr>
@@ -6360,7 +6400,7 @@
           </p:blipFill>
           <p:spPr>
             <a:xfrm>
-              <a:off x="1806918" y="2978959"/>
+              <a:off x="1784597" y="2964422"/>
               <a:ext cx="457200" cy="457200"/>
             </a:xfrm>
             <a:prstGeom prst="rect">
@@ -6452,8 +6492,9 @@
             </a:prstGeom>
             <a:ln w="25400">
               <a:solidFill>
-                <a:schemeClr val="tx1"/>
+                <a:schemeClr val="bg2"/>
               </a:solidFill>
+              <a:tailEnd type="triangle" w="lg" len="lg"/>
             </a:ln>
           </p:spPr>
           <p:style>
@@ -6495,8 +6536,9 @@
             </a:prstGeom>
             <a:ln w="25400">
               <a:solidFill>
-                <a:schemeClr val="tx1"/>
+                <a:schemeClr val="bg2"/>
               </a:solidFill>
+              <a:tailEnd type="triangle" w="lg" len="lg"/>
             </a:ln>
           </p:spPr>
           <p:style>
@@ -6538,8 +6580,9 @@
             </a:prstGeom>
             <a:ln w="25400">
               <a:solidFill>
-                <a:schemeClr val="tx1"/>
+                <a:schemeClr val="bg2"/>
               </a:solidFill>
+              <a:tailEnd type="triangle" w="lg" len="lg"/>
             </a:ln>
           </p:spPr>
           <p:style>
@@ -6581,8 +6624,9 @@
             </a:prstGeom>
             <a:ln w="25400">
               <a:solidFill>
-                <a:schemeClr val="tx1"/>
+                <a:schemeClr val="bg2"/>
               </a:solidFill>
+              <a:tailEnd type="triangle" w="lg" len="lg"/>
             </a:ln>
           </p:spPr>
           <p:style>
@@ -6690,6 +6734,10 @@
             </a:r>
           </a:p>
           <a:p>
+            <a:r>
+              <a:rPr kumimoji="1" lang="ja-JP" altLang="en-US"/>
+              <a:t>または</a:t>
+            </a:r>
             <a:r>
               <a:rPr kumimoji="1" lang="en-US" altLang="ja-JP" dirty="0"/>
               <a:t>/User/taro</a:t>
@@ -7153,7 +7201,7 @@
         <p:spPr>
           <a:xfrm>
             <a:off x="297712" y="412387"/>
-            <a:ext cx="6555000" cy="584775"/>
+            <a:ext cx="6224781" cy="861774"/>
           </a:xfrm>
           <a:prstGeom prst="rect">
             <a:avLst/>
@@ -7184,8 +7232,60 @@
             </a:r>
             <a:r>
               <a:rPr kumimoji="1" lang="ja-JP" altLang="en-US"/>
-              <a:t>」。どこにいても変わらない</a:t>
-            </a:r>
+              <a:t>」。「</a:t>
+            </a:r>
+            <a:r>
+              <a:rPr kumimoji="1" lang="en-US" altLang="ja-JP" dirty="0"/>
+              <a:t>/</a:t>
+            </a:r>
+            <a:r>
+              <a:rPr kumimoji="1" lang="ja-JP" altLang="en-US"/>
+              <a:t>」から順番に辿る。</a:t>
+            </a:r>
+            <a:endParaRPr kumimoji="1" lang="en-US" altLang="ja-JP" dirty="0"/>
+          </a:p>
+          <a:p>
+            <a:r>
+              <a:rPr kumimoji="1" lang="ja-JP" altLang="en-US"/>
+              <a:t>　　　　　　　　　どこにいても変わらない</a:t>
+            </a:r>
+            <a:endParaRPr kumimoji="1" lang="en-US" altLang="ja-JP" dirty="0"/>
+          </a:p>
+        </p:txBody>
+      </p:sp>
+      <p:sp>
+        <p:nvSpPr>
+          <p:cNvPr id="4" name="テキスト ボックス 3">
+            <a:extLst>
+              <a:ext uri="{FF2B5EF4-FFF2-40B4-BE49-F238E27FC236}">
+                <a16:creationId xmlns:a16="http://schemas.microsoft.com/office/drawing/2014/main" id="{18111BE3-B3A2-BE14-95B7-0073FFBD1F60}"/>
+              </a:ext>
+            </a:extLst>
+          </p:cNvPr>
+          <p:cNvSpPr txBox="1"/>
+          <p:nvPr/>
+        </p:nvSpPr>
+        <p:spPr>
+          <a:xfrm>
+            <a:off x="290132" y="6445613"/>
+            <a:ext cx="1704313" cy="369332"/>
+          </a:xfrm>
+          <a:prstGeom prst="rect">
+            <a:avLst/>
+          </a:prstGeom>
+          <a:noFill/>
+        </p:spPr>
+        <p:txBody>
+          <a:bodyPr wrap="none" rtlCol="0">
+            <a:spAutoFit/>
+          </a:bodyPr>
+          <a:lstStyle/>
+          <a:p>
+            <a:r>
+              <a:rPr kumimoji="1" lang="en-US" altLang="ja-JP" dirty="0" err="1"/>
+              <a:t>absolutepath</a:t>
+            </a:r>
+            <a:endParaRPr kumimoji="1" lang="ja-JP" altLang="en-US"/>
           </a:p>
         </p:txBody>
       </p:sp>
@@ -7355,7 +7455,7 @@
           </p:nvCxnSpPr>
           <p:spPr>
             <a:xfrm>
-              <a:off x="2021294" y="2852959"/>
+              <a:off x="2021294" y="2842327"/>
               <a:ext cx="3600" cy="251999"/>
             </a:xfrm>
             <a:prstGeom prst="line">
@@ -7363,8 +7463,9 @@
             </a:prstGeom>
             <a:ln w="25400">
               <a:solidFill>
-                <a:schemeClr val="tx1"/>
+                <a:schemeClr val="bg2"/>
               </a:solidFill>
+              <a:tailEnd type="triangle" w="lg" len="lg"/>
             </a:ln>
           </p:spPr>
           <p:style>
@@ -7406,7 +7507,7 @@
             </a:prstGeom>
             <a:ln w="25400">
               <a:solidFill>
-                <a:schemeClr val="tx1"/>
+                <a:schemeClr val="bg2"/>
               </a:solidFill>
             </a:ln>
           </p:spPr>
@@ -7629,8 +7730,9 @@
             </a:prstGeom>
             <a:ln w="25400">
               <a:solidFill>
-                <a:schemeClr val="tx1"/>
+                <a:schemeClr val="bg2"/>
               </a:solidFill>
+              <a:headEnd type="triangle" w="lg" len="lg"/>
             </a:ln>
           </p:spPr>
           <p:style>
@@ -7672,8 +7774,9 @@
             </a:prstGeom>
             <a:ln w="25400">
               <a:solidFill>
-                <a:schemeClr val="tx1"/>
+                <a:schemeClr val="bg2"/>
               </a:solidFill>
+              <a:tailEnd type="triangle" w="lg" len="lg"/>
             </a:ln>
           </p:spPr>
           <p:style>
@@ -7715,8 +7818,10 @@
             </a:prstGeom>
             <a:ln w="25400">
               <a:solidFill>
-                <a:schemeClr val="tx1"/>
+                <a:schemeClr val="bg2"/>
               </a:solidFill>
+              <a:headEnd type="triangle" w="lg" len="lg"/>
+              <a:tailEnd type="none"/>
             </a:ln>
           </p:spPr>
           <p:style>
@@ -7758,8 +7863,9 @@
             </a:prstGeom>
             <a:ln w="25400">
               <a:solidFill>
-                <a:schemeClr val="tx1"/>
+                <a:schemeClr val="bg2"/>
               </a:solidFill>
+              <a:tailEnd type="triangle" w="lg" len="lg"/>
             </a:ln>
           </p:spPr>
           <p:style>
@@ -8348,8 +8454,8 @@
         </p:nvSpPr>
         <p:spPr>
           <a:xfrm>
-            <a:off x="1331625" y="657234"/>
-            <a:ext cx="7252306" cy="584775"/>
+            <a:off x="1331625" y="377496"/>
+            <a:ext cx="7467109" cy="861774"/>
           </a:xfrm>
           <a:prstGeom prst="rect">
             <a:avLst/>
@@ -8368,11 +8474,18 @@
             </a:r>
             <a:r>
               <a:rPr kumimoji="1" lang="en-US" altLang="ja-JP" sz="3200" b="1" dirty="0"/>
-              <a:t>: </a:t>
+              <a:t>:</a:t>
             </a:r>
             <a:r>
               <a:rPr kumimoji="1" lang="ja-JP" altLang="en-US"/>
-              <a:t>最初が「</a:t>
+              <a:t>現在いる場所から辿る。</a:t>
+            </a:r>
+            <a:endParaRPr kumimoji="1" lang="en-US" altLang="ja-JP" dirty="0"/>
+          </a:p>
+          <a:p>
+            <a:r>
+              <a:rPr kumimoji="1" lang="ja-JP" altLang="en-US"/>
+              <a:t>　　　　　　　　最初が「</a:t>
             </a:r>
             <a:r>
               <a:rPr kumimoji="1" lang="en-US" altLang="ja-JP" dirty="0"/>
@@ -8380,7 +8493,7 @@
             </a:r>
             <a:r>
               <a:rPr kumimoji="1" lang="ja-JP" altLang="en-US"/>
-              <a:t>」ではない。いる場所によって変わる</a:t>
+              <a:t>」ではない。現在いる場所によって変わる</a:t>
             </a:r>
           </a:p>
         </p:txBody>
@@ -8399,6 +8512,936 @@
 </file>
 
 <file path=ppt/slides/slide6.xml><?xml version="1.0" encoding="utf-8"?>
+<p:sld xmlns:a="http://schemas.openxmlformats.org/drawingml/2006/main" xmlns:r="http://schemas.openxmlformats.org/officeDocument/2006/relationships" xmlns:p="http://schemas.openxmlformats.org/presentationml/2006/main">
+  <p:cSld>
+    <p:spTree>
+      <p:nvGrpSpPr>
+        <p:cNvPr id="1" name="">
+          <a:extLst>
+            <a:ext uri="{FF2B5EF4-FFF2-40B4-BE49-F238E27FC236}">
+              <a16:creationId xmlns:a16="http://schemas.microsoft.com/office/drawing/2014/main" id="{E0E93174-5272-E079-5985-4351D2993417}"/>
+            </a:ext>
+          </a:extLst>
+        </p:cNvPr>
+        <p:cNvGrpSpPr/>
+        <p:nvPr/>
+      </p:nvGrpSpPr>
+      <p:grpSpPr>
+        <a:xfrm>
+          <a:off x="0" y="0"/>
+          <a:ext cx="0" cy="0"/>
+          <a:chOff x="0" y="0"/>
+          <a:chExt cx="0" cy="0"/>
+        </a:xfrm>
+      </p:grpSpPr>
+      <p:grpSp>
+        <p:nvGrpSpPr>
+          <p:cNvPr id="20" name="グループ化 19">
+            <a:extLst>
+              <a:ext uri="{FF2B5EF4-FFF2-40B4-BE49-F238E27FC236}">
+                <a16:creationId xmlns:a16="http://schemas.microsoft.com/office/drawing/2014/main" id="{E9962C5D-3F5B-EDC7-7E7A-571B5C450449}"/>
+              </a:ext>
+            </a:extLst>
+          </p:cNvPr>
+          <p:cNvGrpSpPr/>
+          <p:nvPr/>
+        </p:nvGrpSpPr>
+        <p:grpSpPr>
+          <a:xfrm>
+            <a:off x="2740672" y="1286047"/>
+            <a:ext cx="2000056" cy="2941275"/>
+            <a:chOff x="316448" y="512014"/>
+            <a:chExt cx="2000056" cy="2941275"/>
+          </a:xfrm>
+        </p:grpSpPr>
+        <p:sp>
+          <p:nvSpPr>
+            <p:cNvPr id="7" name="テキスト ボックス 6">
+              <a:extLst>
+                <a:ext uri="{FF2B5EF4-FFF2-40B4-BE49-F238E27FC236}">
+                  <a16:creationId xmlns:a16="http://schemas.microsoft.com/office/drawing/2014/main" id="{73C158B9-24BF-BD5E-C7BA-326E1EB03D0A}"/>
+                </a:ext>
+              </a:extLst>
+            </p:cNvPr>
+            <p:cNvSpPr txBox="1">
+              <a:spLocks/>
+            </p:cNvSpPr>
+            <p:nvPr/>
+          </p:nvSpPr>
+          <p:spPr>
+            <a:xfrm>
+              <a:off x="738828" y="557661"/>
+              <a:ext cx="1577676" cy="2862322"/>
+            </a:xfrm>
+            <a:prstGeom prst="rect">
+              <a:avLst/>
+            </a:prstGeom>
+            <a:noFill/>
+          </p:spPr>
+          <p:txBody>
+            <a:bodyPr wrap="none" rtlCol="0">
+              <a:spAutoFit/>
+            </a:bodyPr>
+            <a:lstStyle/>
+            <a:p>
+              <a:r>
+                <a:rPr kumimoji="1" lang="en-US" altLang="ja-JP" dirty="0"/>
+                <a:t>/</a:t>
+              </a:r>
+            </a:p>
+            <a:p>
+              <a:endParaRPr kumimoji="1" lang="en-US" altLang="ja-JP" dirty="0"/>
+            </a:p>
+            <a:p>
+              <a:endParaRPr kumimoji="1" lang="en-US" altLang="ja-JP" dirty="0"/>
+            </a:p>
+            <a:p>
+              <a:r>
+                <a:rPr kumimoji="1" lang="en-US" altLang="ja-JP" dirty="0"/>
+                <a:t>home, Users</a:t>
+              </a:r>
+            </a:p>
+            <a:p>
+              <a:endParaRPr kumimoji="1" lang="en-US" altLang="ja-JP" dirty="0"/>
+            </a:p>
+            <a:p>
+              <a:endParaRPr kumimoji="1" lang="en-US" altLang="ja-JP" dirty="0"/>
+            </a:p>
+            <a:p>
+              <a:r>
+                <a:rPr kumimoji="1" lang="en-US" altLang="ja-JP" dirty="0"/>
+                <a:t>taro</a:t>
+              </a:r>
+            </a:p>
+            <a:p>
+              <a:endParaRPr kumimoji="1" lang="en-US" altLang="ja-JP" dirty="0"/>
+            </a:p>
+            <a:p>
+              <a:endParaRPr kumimoji="1" lang="en-US" altLang="ja-JP" dirty="0"/>
+            </a:p>
+            <a:p>
+              <a:r>
+                <a:rPr kumimoji="1" lang="en-US" altLang="ja-JP" dirty="0"/>
+                <a:t>practice</a:t>
+              </a:r>
+            </a:p>
+          </p:txBody>
+        </p:sp>
+        <p:pic>
+          <p:nvPicPr>
+            <p:cNvPr id="3" name="図 2">
+              <a:extLst>
+                <a:ext uri="{FF2B5EF4-FFF2-40B4-BE49-F238E27FC236}">
+                  <a16:creationId xmlns:a16="http://schemas.microsoft.com/office/drawing/2014/main" id="{F2BDADF5-ACCA-782F-472D-29A8E9EB869E}"/>
+                </a:ext>
+              </a:extLst>
+            </p:cNvPr>
+            <p:cNvPicPr>
+              <a:picLocks noChangeAspect="1"/>
+            </p:cNvPicPr>
+            <p:nvPr/>
+          </p:nvPicPr>
+          <p:blipFill>
+            <a:blip r:embed="rId2"/>
+            <a:stretch>
+              <a:fillRect/>
+            </a:stretch>
+          </p:blipFill>
+          <p:spPr>
+            <a:xfrm>
+              <a:off x="319368" y="1359500"/>
+              <a:ext cx="457200" cy="457200"/>
+            </a:xfrm>
+            <a:prstGeom prst="rect">
+              <a:avLst/>
+            </a:prstGeom>
+          </p:spPr>
+        </p:pic>
+        <p:pic>
+          <p:nvPicPr>
+            <p:cNvPr id="5" name="図 4">
+              <a:extLst>
+                <a:ext uri="{FF2B5EF4-FFF2-40B4-BE49-F238E27FC236}">
+                  <a16:creationId xmlns:a16="http://schemas.microsoft.com/office/drawing/2014/main" id="{E254B506-8D1D-8F51-801C-17065C237F6D}"/>
+                </a:ext>
+              </a:extLst>
+            </p:cNvPr>
+            <p:cNvPicPr>
+              <a:picLocks noChangeAspect="1"/>
+            </p:cNvPicPr>
+            <p:nvPr/>
+          </p:nvPicPr>
+          <p:blipFill>
+            <a:blip r:embed="rId2"/>
+            <a:stretch>
+              <a:fillRect/>
+            </a:stretch>
+          </p:blipFill>
+          <p:spPr>
+            <a:xfrm>
+              <a:off x="319368" y="2183512"/>
+              <a:ext cx="457200" cy="457200"/>
+            </a:xfrm>
+            <a:prstGeom prst="rect">
+              <a:avLst/>
+            </a:prstGeom>
+          </p:spPr>
+        </p:pic>
+        <p:pic>
+          <p:nvPicPr>
+            <p:cNvPr id="8" name="図 7">
+              <a:extLst>
+                <a:ext uri="{FF2B5EF4-FFF2-40B4-BE49-F238E27FC236}">
+                  <a16:creationId xmlns:a16="http://schemas.microsoft.com/office/drawing/2014/main" id="{CD1EE199-383E-B41F-1050-704424C43752}"/>
+                </a:ext>
+              </a:extLst>
+            </p:cNvPr>
+            <p:cNvPicPr>
+              <a:picLocks noChangeAspect="1"/>
+            </p:cNvPicPr>
+            <p:nvPr/>
+          </p:nvPicPr>
+          <p:blipFill>
+            <a:blip r:embed="rId3"/>
+            <a:stretch>
+              <a:fillRect/>
+            </a:stretch>
+          </p:blipFill>
+          <p:spPr>
+            <a:xfrm>
+              <a:off x="319368" y="2996089"/>
+              <a:ext cx="457200" cy="457200"/>
+            </a:xfrm>
+            <a:prstGeom prst="rect">
+              <a:avLst/>
+            </a:prstGeom>
+          </p:spPr>
+        </p:pic>
+        <p:pic>
+          <p:nvPicPr>
+            <p:cNvPr id="12" name="図 11">
+              <a:extLst>
+                <a:ext uri="{FF2B5EF4-FFF2-40B4-BE49-F238E27FC236}">
+                  <a16:creationId xmlns:a16="http://schemas.microsoft.com/office/drawing/2014/main" id="{EAEAC019-BEC7-8155-597C-BC441A2A5F5B}"/>
+                </a:ext>
+              </a:extLst>
+            </p:cNvPr>
+            <p:cNvPicPr>
+              <a:picLocks noChangeAspect="1"/>
+            </p:cNvPicPr>
+            <p:nvPr/>
+          </p:nvPicPr>
+          <p:blipFill>
+            <a:blip r:embed="rId2"/>
+            <a:stretch>
+              <a:fillRect/>
+            </a:stretch>
+          </p:blipFill>
+          <p:spPr>
+            <a:xfrm>
+              <a:off x="316448" y="512014"/>
+              <a:ext cx="457200" cy="457200"/>
+            </a:xfrm>
+            <a:prstGeom prst="rect">
+              <a:avLst/>
+            </a:prstGeom>
+          </p:spPr>
+        </p:pic>
+        <p:cxnSp>
+          <p:nvCxnSpPr>
+            <p:cNvPr id="13" name="直線コネクタ 12">
+              <a:extLst>
+                <a:ext uri="{FF2B5EF4-FFF2-40B4-BE49-F238E27FC236}">
+                  <a16:creationId xmlns:a16="http://schemas.microsoft.com/office/drawing/2014/main" id="{E7013702-D31A-2070-4C91-F440B34C7C6B}"/>
+                </a:ext>
+              </a:extLst>
+            </p:cNvPr>
+            <p:cNvCxnSpPr>
+              <a:cxnSpLocks/>
+            </p:cNvCxnSpPr>
+            <p:nvPr/>
+          </p:nvCxnSpPr>
+          <p:spPr>
+            <a:xfrm>
+              <a:off x="553737" y="1718528"/>
+              <a:ext cx="3600" cy="576000"/>
+            </a:xfrm>
+            <a:prstGeom prst="line">
+              <a:avLst/>
+            </a:prstGeom>
+            <a:ln w="25400">
+              <a:solidFill>
+                <a:schemeClr val="tx1"/>
+              </a:solidFill>
+            </a:ln>
+          </p:spPr>
+          <p:style>
+            <a:lnRef idx="1">
+              <a:schemeClr val="accent1"/>
+            </a:lnRef>
+            <a:fillRef idx="0">
+              <a:schemeClr val="accent1"/>
+            </a:fillRef>
+            <a:effectRef idx="0">
+              <a:schemeClr val="accent1"/>
+            </a:effectRef>
+            <a:fontRef idx="minor">
+              <a:schemeClr val="tx1"/>
+            </a:fontRef>
+          </p:style>
+        </p:cxnSp>
+        <p:cxnSp>
+          <p:nvCxnSpPr>
+            <p:cNvPr id="14" name="直線コネクタ 13">
+              <a:extLst>
+                <a:ext uri="{FF2B5EF4-FFF2-40B4-BE49-F238E27FC236}">
+                  <a16:creationId xmlns:a16="http://schemas.microsoft.com/office/drawing/2014/main" id="{28EF6A45-C87B-9B73-3D03-8682CD3C459F}"/>
+                </a:ext>
+              </a:extLst>
+            </p:cNvPr>
+            <p:cNvCxnSpPr>
+              <a:cxnSpLocks/>
+            </p:cNvCxnSpPr>
+            <p:nvPr/>
+          </p:nvCxnSpPr>
+          <p:spPr>
+            <a:xfrm>
+              <a:off x="542481" y="2538415"/>
+              <a:ext cx="3600" cy="503999"/>
+            </a:xfrm>
+            <a:prstGeom prst="line">
+              <a:avLst/>
+            </a:prstGeom>
+            <a:ln w="25400">
+              <a:solidFill>
+                <a:schemeClr val="tx1"/>
+              </a:solidFill>
+            </a:ln>
+          </p:spPr>
+          <p:style>
+            <a:lnRef idx="1">
+              <a:schemeClr val="accent1"/>
+            </a:lnRef>
+            <a:fillRef idx="0">
+              <a:schemeClr val="accent1"/>
+            </a:fillRef>
+            <a:effectRef idx="0">
+              <a:schemeClr val="accent1"/>
+            </a:effectRef>
+            <a:fontRef idx="minor">
+              <a:schemeClr val="tx1"/>
+            </a:fontRef>
+          </p:style>
+        </p:cxnSp>
+        <p:cxnSp>
+          <p:nvCxnSpPr>
+            <p:cNvPr id="16" name="直線コネクタ 15">
+              <a:extLst>
+                <a:ext uri="{FF2B5EF4-FFF2-40B4-BE49-F238E27FC236}">
+                  <a16:creationId xmlns:a16="http://schemas.microsoft.com/office/drawing/2014/main" id="{61BE4223-585F-F235-F073-31DE0AB976B4}"/>
+                </a:ext>
+              </a:extLst>
+            </p:cNvPr>
+            <p:cNvCxnSpPr>
+              <a:cxnSpLocks/>
+            </p:cNvCxnSpPr>
+            <p:nvPr/>
+          </p:nvCxnSpPr>
+          <p:spPr>
+            <a:xfrm>
+              <a:off x="538188" y="892436"/>
+              <a:ext cx="3600" cy="576000"/>
+            </a:xfrm>
+            <a:prstGeom prst="line">
+              <a:avLst/>
+            </a:prstGeom>
+            <a:ln w="25400">
+              <a:solidFill>
+                <a:schemeClr val="tx1"/>
+              </a:solidFill>
+            </a:ln>
+          </p:spPr>
+          <p:style>
+            <a:lnRef idx="1">
+              <a:schemeClr val="accent1"/>
+            </a:lnRef>
+            <a:fillRef idx="0">
+              <a:schemeClr val="accent1"/>
+            </a:fillRef>
+            <a:effectRef idx="0">
+              <a:schemeClr val="accent1"/>
+            </a:effectRef>
+            <a:fontRef idx="minor">
+              <a:schemeClr val="tx1"/>
+            </a:fontRef>
+          </p:style>
+        </p:cxnSp>
+      </p:grpSp>
+      <p:sp>
+        <p:nvSpPr>
+          <p:cNvPr id="23" name="テキスト ボックス 22">
+            <a:extLst>
+              <a:ext uri="{FF2B5EF4-FFF2-40B4-BE49-F238E27FC236}">
+                <a16:creationId xmlns:a16="http://schemas.microsoft.com/office/drawing/2014/main" id="{B42996FB-3218-DDE0-B71F-16F008EC81D8}"/>
+              </a:ext>
+            </a:extLst>
+          </p:cNvPr>
+          <p:cNvSpPr txBox="1"/>
+          <p:nvPr/>
+        </p:nvSpPr>
+        <p:spPr>
+          <a:xfrm>
+            <a:off x="1953403" y="4410816"/>
+            <a:ext cx="5814412" cy="369332"/>
+          </a:xfrm>
+          <a:prstGeom prst="rect">
+            <a:avLst/>
+          </a:prstGeom>
+          <a:noFill/>
+        </p:spPr>
+        <p:txBody>
+          <a:bodyPr wrap="none" rtlCol="0">
+            <a:spAutoFit/>
+          </a:bodyPr>
+          <a:lstStyle/>
+          <a:p>
+            <a:r>
+              <a:rPr kumimoji="1" lang="en-US" altLang="ja-JP" dirty="0"/>
+              <a:t>practice</a:t>
+            </a:r>
+            <a:r>
+              <a:rPr kumimoji="1" lang="ja-JP" altLang="en-US"/>
+              <a:t>がファイルでもディレクトリでもパスは同じ</a:t>
+            </a:r>
+            <a:endParaRPr kumimoji="1" lang="en-US" altLang="ja-JP" dirty="0"/>
+          </a:p>
+        </p:txBody>
+      </p:sp>
+      <p:grpSp>
+        <p:nvGrpSpPr>
+          <p:cNvPr id="2" name="グループ化 1">
+            <a:extLst>
+              <a:ext uri="{FF2B5EF4-FFF2-40B4-BE49-F238E27FC236}">
+                <a16:creationId xmlns:a16="http://schemas.microsoft.com/office/drawing/2014/main" id="{687DAC28-5EE2-E5A5-3B05-6EC244338DF4}"/>
+              </a:ext>
+            </a:extLst>
+          </p:cNvPr>
+          <p:cNvGrpSpPr/>
+          <p:nvPr/>
+        </p:nvGrpSpPr>
+        <p:grpSpPr>
+          <a:xfrm>
+            <a:off x="4960921" y="1278303"/>
+            <a:ext cx="2000056" cy="2907969"/>
+            <a:chOff x="316448" y="512014"/>
+            <a:chExt cx="2000056" cy="2907969"/>
+          </a:xfrm>
+        </p:grpSpPr>
+        <p:sp>
+          <p:nvSpPr>
+            <p:cNvPr id="22" name="テキスト ボックス 21">
+              <a:extLst>
+                <a:ext uri="{FF2B5EF4-FFF2-40B4-BE49-F238E27FC236}">
+                  <a16:creationId xmlns:a16="http://schemas.microsoft.com/office/drawing/2014/main" id="{58B2F9A3-BC5D-1B4C-1FCF-94D5351594AE}"/>
+                </a:ext>
+              </a:extLst>
+            </p:cNvPr>
+            <p:cNvSpPr txBox="1">
+              <a:spLocks/>
+            </p:cNvSpPr>
+            <p:nvPr/>
+          </p:nvSpPr>
+          <p:spPr>
+            <a:xfrm>
+              <a:off x="738828" y="557661"/>
+              <a:ext cx="1577676" cy="2862322"/>
+            </a:xfrm>
+            <a:prstGeom prst="rect">
+              <a:avLst/>
+            </a:prstGeom>
+            <a:noFill/>
+          </p:spPr>
+          <p:txBody>
+            <a:bodyPr wrap="none" rtlCol="0">
+              <a:spAutoFit/>
+            </a:bodyPr>
+            <a:lstStyle/>
+            <a:p>
+              <a:r>
+                <a:rPr kumimoji="1" lang="en-US" altLang="ja-JP" dirty="0"/>
+                <a:t>/</a:t>
+              </a:r>
+            </a:p>
+            <a:p>
+              <a:endParaRPr kumimoji="1" lang="en-US" altLang="ja-JP" dirty="0"/>
+            </a:p>
+            <a:p>
+              <a:endParaRPr kumimoji="1" lang="en-US" altLang="ja-JP" dirty="0"/>
+            </a:p>
+            <a:p>
+              <a:r>
+                <a:rPr kumimoji="1" lang="en-US" altLang="ja-JP" dirty="0"/>
+                <a:t>home, Users</a:t>
+              </a:r>
+            </a:p>
+            <a:p>
+              <a:endParaRPr kumimoji="1" lang="en-US" altLang="ja-JP" dirty="0"/>
+            </a:p>
+            <a:p>
+              <a:endParaRPr kumimoji="1" lang="en-US" altLang="ja-JP" dirty="0"/>
+            </a:p>
+            <a:p>
+              <a:r>
+                <a:rPr kumimoji="1" lang="en-US" altLang="ja-JP" dirty="0"/>
+                <a:t>taro</a:t>
+              </a:r>
+            </a:p>
+            <a:p>
+              <a:endParaRPr kumimoji="1" lang="en-US" altLang="ja-JP" dirty="0"/>
+            </a:p>
+            <a:p>
+              <a:endParaRPr kumimoji="1" lang="en-US" altLang="ja-JP" dirty="0"/>
+            </a:p>
+            <a:p>
+              <a:r>
+                <a:rPr kumimoji="1" lang="en-US" altLang="ja-JP" dirty="0"/>
+                <a:t>practice</a:t>
+              </a:r>
+            </a:p>
+          </p:txBody>
+        </p:sp>
+        <p:pic>
+          <p:nvPicPr>
+            <p:cNvPr id="27" name="図 26">
+              <a:extLst>
+                <a:ext uri="{FF2B5EF4-FFF2-40B4-BE49-F238E27FC236}">
+                  <a16:creationId xmlns:a16="http://schemas.microsoft.com/office/drawing/2014/main" id="{3D413D23-AECD-6FCD-456B-EB39881EE34A}"/>
+                </a:ext>
+              </a:extLst>
+            </p:cNvPr>
+            <p:cNvPicPr>
+              <a:picLocks noChangeAspect="1"/>
+            </p:cNvPicPr>
+            <p:nvPr/>
+          </p:nvPicPr>
+          <p:blipFill>
+            <a:blip r:embed="rId2"/>
+            <a:stretch>
+              <a:fillRect/>
+            </a:stretch>
+          </p:blipFill>
+          <p:spPr>
+            <a:xfrm>
+              <a:off x="319368" y="1359500"/>
+              <a:ext cx="457200" cy="457200"/>
+            </a:xfrm>
+            <a:prstGeom prst="rect">
+              <a:avLst/>
+            </a:prstGeom>
+          </p:spPr>
+        </p:pic>
+        <p:pic>
+          <p:nvPicPr>
+            <p:cNvPr id="28" name="図 27">
+              <a:extLst>
+                <a:ext uri="{FF2B5EF4-FFF2-40B4-BE49-F238E27FC236}">
+                  <a16:creationId xmlns:a16="http://schemas.microsoft.com/office/drawing/2014/main" id="{566F3634-EE1A-0EA2-5A5A-C3CDEA53DFD8}"/>
+                </a:ext>
+              </a:extLst>
+            </p:cNvPr>
+            <p:cNvPicPr>
+              <a:picLocks noChangeAspect="1"/>
+            </p:cNvPicPr>
+            <p:nvPr/>
+          </p:nvPicPr>
+          <p:blipFill>
+            <a:blip r:embed="rId2"/>
+            <a:stretch>
+              <a:fillRect/>
+            </a:stretch>
+          </p:blipFill>
+          <p:spPr>
+            <a:xfrm>
+              <a:off x="319368" y="2183512"/>
+              <a:ext cx="457200" cy="457200"/>
+            </a:xfrm>
+            <a:prstGeom prst="rect">
+              <a:avLst/>
+            </a:prstGeom>
+          </p:spPr>
+        </p:pic>
+        <p:pic>
+          <p:nvPicPr>
+            <p:cNvPr id="30" name="図 29">
+              <a:extLst>
+                <a:ext uri="{FF2B5EF4-FFF2-40B4-BE49-F238E27FC236}">
+                  <a16:creationId xmlns:a16="http://schemas.microsoft.com/office/drawing/2014/main" id="{3255BAFA-3805-3CBF-08F3-A70C42B1177B}"/>
+                </a:ext>
+              </a:extLst>
+            </p:cNvPr>
+            <p:cNvPicPr>
+              <a:picLocks noChangeAspect="1"/>
+            </p:cNvPicPr>
+            <p:nvPr/>
+          </p:nvPicPr>
+          <p:blipFill>
+            <a:blip r:embed="rId2"/>
+            <a:stretch>
+              <a:fillRect/>
+            </a:stretch>
+          </p:blipFill>
+          <p:spPr>
+            <a:xfrm>
+              <a:off x="316448" y="512014"/>
+              <a:ext cx="457200" cy="457200"/>
+            </a:xfrm>
+            <a:prstGeom prst="rect">
+              <a:avLst/>
+            </a:prstGeom>
+          </p:spPr>
+        </p:pic>
+        <p:cxnSp>
+          <p:nvCxnSpPr>
+            <p:cNvPr id="31" name="直線コネクタ 30">
+              <a:extLst>
+                <a:ext uri="{FF2B5EF4-FFF2-40B4-BE49-F238E27FC236}">
+                  <a16:creationId xmlns:a16="http://schemas.microsoft.com/office/drawing/2014/main" id="{91F21B99-C8EE-37A0-CCD6-1DE5FCBC71C6}"/>
+                </a:ext>
+              </a:extLst>
+            </p:cNvPr>
+            <p:cNvCxnSpPr>
+              <a:cxnSpLocks/>
+            </p:cNvCxnSpPr>
+            <p:nvPr/>
+          </p:nvCxnSpPr>
+          <p:spPr>
+            <a:xfrm>
+              <a:off x="553737" y="1718528"/>
+              <a:ext cx="3600" cy="576000"/>
+            </a:xfrm>
+            <a:prstGeom prst="line">
+              <a:avLst/>
+            </a:prstGeom>
+            <a:ln w="25400">
+              <a:solidFill>
+                <a:schemeClr val="tx1"/>
+              </a:solidFill>
+            </a:ln>
+          </p:spPr>
+          <p:style>
+            <a:lnRef idx="1">
+              <a:schemeClr val="accent1"/>
+            </a:lnRef>
+            <a:fillRef idx="0">
+              <a:schemeClr val="accent1"/>
+            </a:fillRef>
+            <a:effectRef idx="0">
+              <a:schemeClr val="accent1"/>
+            </a:effectRef>
+            <a:fontRef idx="minor">
+              <a:schemeClr val="tx1"/>
+            </a:fontRef>
+          </p:style>
+        </p:cxnSp>
+        <p:cxnSp>
+          <p:nvCxnSpPr>
+            <p:cNvPr id="32" name="直線コネクタ 31">
+              <a:extLst>
+                <a:ext uri="{FF2B5EF4-FFF2-40B4-BE49-F238E27FC236}">
+                  <a16:creationId xmlns:a16="http://schemas.microsoft.com/office/drawing/2014/main" id="{679E4AE0-9BB1-26EF-3A2D-4F407C16403B}"/>
+                </a:ext>
+              </a:extLst>
+            </p:cNvPr>
+            <p:cNvCxnSpPr>
+              <a:cxnSpLocks/>
+            </p:cNvCxnSpPr>
+            <p:nvPr/>
+          </p:nvCxnSpPr>
+          <p:spPr>
+            <a:xfrm flipH="1">
+              <a:off x="525838" y="2538415"/>
+              <a:ext cx="0" cy="629075"/>
+            </a:xfrm>
+            <a:prstGeom prst="line">
+              <a:avLst/>
+            </a:prstGeom>
+            <a:ln w="25400">
+              <a:solidFill>
+                <a:schemeClr val="tx1"/>
+              </a:solidFill>
+            </a:ln>
+          </p:spPr>
+          <p:style>
+            <a:lnRef idx="1">
+              <a:schemeClr val="accent1"/>
+            </a:lnRef>
+            <a:fillRef idx="0">
+              <a:schemeClr val="accent1"/>
+            </a:fillRef>
+            <a:effectRef idx="0">
+              <a:schemeClr val="accent1"/>
+            </a:effectRef>
+            <a:fontRef idx="minor">
+              <a:schemeClr val="tx1"/>
+            </a:fontRef>
+          </p:style>
+        </p:cxnSp>
+        <p:cxnSp>
+          <p:nvCxnSpPr>
+            <p:cNvPr id="33" name="直線コネクタ 32">
+              <a:extLst>
+                <a:ext uri="{FF2B5EF4-FFF2-40B4-BE49-F238E27FC236}">
+                  <a16:creationId xmlns:a16="http://schemas.microsoft.com/office/drawing/2014/main" id="{CF2473DE-0CAC-9F7B-74AD-80F77705AB86}"/>
+                </a:ext>
+              </a:extLst>
+            </p:cNvPr>
+            <p:cNvCxnSpPr>
+              <a:cxnSpLocks/>
+            </p:cNvCxnSpPr>
+            <p:nvPr/>
+          </p:nvCxnSpPr>
+          <p:spPr>
+            <a:xfrm>
+              <a:off x="538188" y="892436"/>
+              <a:ext cx="3600" cy="576000"/>
+            </a:xfrm>
+            <a:prstGeom prst="line">
+              <a:avLst/>
+            </a:prstGeom>
+            <a:ln w="25400">
+              <a:solidFill>
+                <a:schemeClr val="tx1"/>
+              </a:solidFill>
+            </a:ln>
+          </p:spPr>
+          <p:style>
+            <a:lnRef idx="1">
+              <a:schemeClr val="accent1"/>
+            </a:lnRef>
+            <a:fillRef idx="0">
+              <a:schemeClr val="accent1"/>
+            </a:fillRef>
+            <a:effectRef idx="0">
+              <a:schemeClr val="accent1"/>
+            </a:effectRef>
+            <a:fontRef idx="minor">
+              <a:schemeClr val="tx1"/>
+            </a:fontRef>
+          </p:style>
+        </p:cxnSp>
+      </p:grpSp>
+      <p:pic>
+        <p:nvPicPr>
+          <p:cNvPr id="34" name="図 33">
+            <a:extLst>
+              <a:ext uri="{FF2B5EF4-FFF2-40B4-BE49-F238E27FC236}">
+                <a16:creationId xmlns:a16="http://schemas.microsoft.com/office/drawing/2014/main" id="{0789073B-6524-0925-321F-2BFD9FD34ECB}"/>
+              </a:ext>
+            </a:extLst>
+          </p:cNvPr>
+          <p:cNvPicPr>
+            <a:picLocks noChangeAspect="1"/>
+          </p:cNvPicPr>
+          <p:nvPr/>
+        </p:nvPicPr>
+        <p:blipFill>
+          <a:blip r:embed="rId2"/>
+          <a:stretch>
+            <a:fillRect/>
+          </a:stretch>
+        </p:blipFill>
+        <p:spPr>
+          <a:xfrm>
+            <a:off x="4960921" y="3777523"/>
+            <a:ext cx="457200" cy="457200"/>
+          </a:xfrm>
+          <a:prstGeom prst="rect">
+            <a:avLst/>
+          </a:prstGeom>
+        </p:spPr>
+      </p:pic>
+      <p:sp>
+        <p:nvSpPr>
+          <p:cNvPr id="36" name="テキスト ボックス 35">
+            <a:extLst>
+              <a:ext uri="{FF2B5EF4-FFF2-40B4-BE49-F238E27FC236}">
+                <a16:creationId xmlns:a16="http://schemas.microsoft.com/office/drawing/2014/main" id="{76CF3AAA-81DE-B3CC-271C-2730BF70469B}"/>
+              </a:ext>
+            </a:extLst>
+          </p:cNvPr>
+          <p:cNvSpPr txBox="1"/>
+          <p:nvPr/>
+        </p:nvSpPr>
+        <p:spPr>
+          <a:xfrm>
+            <a:off x="1951799" y="4717886"/>
+            <a:ext cx="5816016" cy="369332"/>
+          </a:xfrm>
+          <a:prstGeom prst="rect">
+            <a:avLst/>
+          </a:prstGeom>
+          <a:noFill/>
+        </p:spPr>
+        <p:txBody>
+          <a:bodyPr wrap="none" rtlCol="0">
+            <a:spAutoFit/>
+          </a:bodyPr>
+          <a:lstStyle/>
+          <a:p>
+            <a:r>
+              <a:rPr kumimoji="1" lang="en-US" altLang="ja-JP" dirty="0"/>
+              <a:t>/home/taro/</a:t>
+            </a:r>
+            <a:r>
+              <a:rPr kumimoji="1" lang="en-US" altLang="ja-JP" dirty="0" err="1"/>
+              <a:t>pratice</a:t>
+            </a:r>
+            <a:r>
+              <a:rPr kumimoji="1" lang="en-US" altLang="ja-JP" dirty="0"/>
+              <a:t> </a:t>
+            </a:r>
+            <a:r>
+              <a:rPr kumimoji="1" lang="ja-JP" altLang="en-US"/>
+              <a:t>または</a:t>
+            </a:r>
+            <a:r>
+              <a:rPr kumimoji="1" lang="en-US" altLang="ja-JP" dirty="0"/>
+              <a:t> /Users/taro/</a:t>
+            </a:r>
+            <a:r>
+              <a:rPr kumimoji="1" lang="en-US" altLang="ja-JP" dirty="0" err="1"/>
+              <a:t>pratice</a:t>
+            </a:r>
+            <a:endParaRPr kumimoji="1" lang="en-US" altLang="ja-JP" dirty="0"/>
+          </a:p>
+        </p:txBody>
+      </p:sp>
+      <p:sp>
+        <p:nvSpPr>
+          <p:cNvPr id="37" name="角丸四角形 36">
+            <a:extLst>
+              <a:ext uri="{FF2B5EF4-FFF2-40B4-BE49-F238E27FC236}">
+                <a16:creationId xmlns:a16="http://schemas.microsoft.com/office/drawing/2014/main" id="{F374EEF1-0DFC-0BC4-F865-8C573E3EE932}"/>
+              </a:ext>
+            </a:extLst>
+          </p:cNvPr>
+          <p:cNvSpPr/>
+          <p:nvPr/>
+        </p:nvSpPr>
+        <p:spPr>
+          <a:xfrm>
+            <a:off x="2718552" y="3769648"/>
+            <a:ext cx="495300" cy="482600"/>
+          </a:xfrm>
+          <a:prstGeom prst="roundRect">
+            <a:avLst/>
+          </a:prstGeom>
+          <a:noFill/>
+          <a:ln>
+            <a:solidFill>
+              <a:schemeClr val="bg2"/>
+            </a:solidFill>
+          </a:ln>
+        </p:spPr>
+        <p:style>
+          <a:lnRef idx="2">
+            <a:schemeClr val="accent1">
+              <a:shade val="15000"/>
+            </a:schemeClr>
+          </a:lnRef>
+          <a:fillRef idx="1">
+            <a:schemeClr val="accent1"/>
+          </a:fillRef>
+          <a:effectRef idx="0">
+            <a:schemeClr val="accent1"/>
+          </a:effectRef>
+          <a:fontRef idx="minor">
+            <a:schemeClr val="lt1"/>
+          </a:fontRef>
+        </p:style>
+        <p:txBody>
+          <a:bodyPr rtlCol="0" anchor="ctr"/>
+          <a:lstStyle/>
+          <a:p>
+            <a:pPr algn="ctr"/>
+            <a:endParaRPr kumimoji="1" lang="ja-JP" altLang="en-US">
+              <a:solidFill>
+                <a:schemeClr val="tx1"/>
+              </a:solidFill>
+            </a:endParaRPr>
+          </a:p>
+        </p:txBody>
+      </p:sp>
+      <p:sp>
+        <p:nvSpPr>
+          <p:cNvPr id="38" name="角丸四角形 37">
+            <a:extLst>
+              <a:ext uri="{FF2B5EF4-FFF2-40B4-BE49-F238E27FC236}">
+                <a16:creationId xmlns:a16="http://schemas.microsoft.com/office/drawing/2014/main" id="{BFAC5F45-B019-E4FC-B18C-5F0D160B1E46}"/>
+              </a:ext>
+            </a:extLst>
+          </p:cNvPr>
+          <p:cNvSpPr/>
+          <p:nvPr/>
+        </p:nvSpPr>
+        <p:spPr>
+          <a:xfrm>
+            <a:off x="4941052" y="3782348"/>
+            <a:ext cx="495300" cy="482600"/>
+          </a:xfrm>
+          <a:prstGeom prst="roundRect">
+            <a:avLst/>
+          </a:prstGeom>
+          <a:noFill/>
+          <a:ln>
+            <a:solidFill>
+              <a:schemeClr val="bg2"/>
+            </a:solidFill>
+          </a:ln>
+        </p:spPr>
+        <p:style>
+          <a:lnRef idx="2">
+            <a:schemeClr val="accent1">
+              <a:shade val="15000"/>
+            </a:schemeClr>
+          </a:lnRef>
+          <a:fillRef idx="1">
+            <a:schemeClr val="accent1"/>
+          </a:fillRef>
+          <a:effectRef idx="0">
+            <a:schemeClr val="accent1"/>
+          </a:effectRef>
+          <a:fontRef idx="minor">
+            <a:schemeClr val="lt1"/>
+          </a:fontRef>
+        </p:style>
+        <p:txBody>
+          <a:bodyPr rtlCol="0" anchor="ctr"/>
+          <a:lstStyle/>
+          <a:p>
+            <a:pPr algn="ctr"/>
+            <a:endParaRPr kumimoji="1" lang="ja-JP" altLang="en-US">
+              <a:solidFill>
+                <a:schemeClr val="tx1"/>
+              </a:solidFill>
+            </a:endParaRPr>
+          </a:p>
+        </p:txBody>
+      </p:sp>
+    </p:spTree>
+    <p:extLst>
+      <p:ext uri="{BB962C8B-B14F-4D97-AF65-F5344CB8AC3E}">
+        <p14:creationId xmlns:p14="http://schemas.microsoft.com/office/powerpoint/2010/main" val="177798928"/>
+      </p:ext>
+    </p:extLst>
+  </p:cSld>
+  <p:clrMapOvr>
+    <a:masterClrMapping/>
+  </p:clrMapOvr>
+</p:sld>
+</file>
+
+<file path=ppt/slides/slide7.xml><?xml version="1.0" encoding="utf-8"?>
 <p:sld xmlns:a="http://schemas.openxmlformats.org/drawingml/2006/main" xmlns:r="http://schemas.openxmlformats.org/officeDocument/2006/relationships" xmlns:p="http://schemas.openxmlformats.org/presentationml/2006/main">
   <p:cSld>
     <p:spTree>
@@ -9599,7 +10642,7 @@
 </p:sld>
 </file>
 
-<file path=ppt/slides/slide7.xml><?xml version="1.0" encoding="utf-8"?>
+<file path=ppt/slides/slide8.xml><?xml version="1.0" encoding="utf-8"?>
 <p:sld xmlns:a="http://schemas.openxmlformats.org/drawingml/2006/main" xmlns:r="http://schemas.openxmlformats.org/officeDocument/2006/relationships" xmlns:p="http://schemas.openxmlformats.org/presentationml/2006/main">
   <p:cSld>
     <p:spTree>
@@ -10610,6 +11653,1156 @@
     <p:extLst>
       <p:ext uri="{BB962C8B-B14F-4D97-AF65-F5344CB8AC3E}">
         <p14:creationId xmlns:p14="http://schemas.microsoft.com/office/powerpoint/2010/main" val="3015058589"/>
+      </p:ext>
+    </p:extLst>
+  </p:cSld>
+  <p:clrMapOvr>
+    <a:masterClrMapping/>
+  </p:clrMapOvr>
+</p:sld>
+</file>
+
+<file path=ppt/slides/slide9.xml><?xml version="1.0" encoding="utf-8"?>
+<p:sld xmlns:a="http://schemas.openxmlformats.org/drawingml/2006/main" xmlns:r="http://schemas.openxmlformats.org/officeDocument/2006/relationships" xmlns:p="http://schemas.openxmlformats.org/presentationml/2006/main">
+  <p:cSld>
+    <p:spTree>
+      <p:nvGrpSpPr>
+        <p:cNvPr id="1" name="">
+          <a:extLst>
+            <a:ext uri="{FF2B5EF4-FFF2-40B4-BE49-F238E27FC236}">
+              <a16:creationId xmlns:a16="http://schemas.microsoft.com/office/drawing/2014/main" id="{D12EFBBD-DAA5-1A37-ABAB-CFA7CBBB3853}"/>
+            </a:ext>
+          </a:extLst>
+        </p:cNvPr>
+        <p:cNvGrpSpPr/>
+        <p:nvPr/>
+      </p:nvGrpSpPr>
+      <p:grpSpPr>
+        <a:xfrm>
+          <a:off x="0" y="0"/>
+          <a:ext cx="0" cy="0"/>
+          <a:chOff x="0" y="0"/>
+          <a:chExt cx="0" cy="0"/>
+        </a:xfrm>
+      </p:grpSpPr>
+      <p:sp>
+        <p:nvSpPr>
+          <p:cNvPr id="7" name="テキスト ボックス 6">
+            <a:extLst>
+              <a:ext uri="{FF2B5EF4-FFF2-40B4-BE49-F238E27FC236}">
+                <a16:creationId xmlns:a16="http://schemas.microsoft.com/office/drawing/2014/main" id="{96ECD359-1D35-0C58-B230-990BEDA8ED85}"/>
+              </a:ext>
+            </a:extLst>
+          </p:cNvPr>
+          <p:cNvSpPr txBox="1">
+            <a:spLocks/>
+          </p:cNvSpPr>
+          <p:nvPr/>
+        </p:nvSpPr>
+        <p:spPr>
+          <a:xfrm>
+            <a:off x="3163052" y="1331694"/>
+            <a:ext cx="691215" cy="2031325"/>
+          </a:xfrm>
+          <a:prstGeom prst="rect">
+            <a:avLst/>
+          </a:prstGeom>
+          <a:noFill/>
+        </p:spPr>
+        <p:txBody>
+          <a:bodyPr wrap="none" rtlCol="0">
+            <a:spAutoFit/>
+          </a:bodyPr>
+          <a:lstStyle/>
+          <a:p>
+            <a:r>
+              <a:rPr kumimoji="1" lang="en-US" altLang="ja-JP" dirty="0"/>
+              <a:t>/</a:t>
+            </a:r>
+          </a:p>
+          <a:p>
+            <a:endParaRPr kumimoji="1" lang="en-US" altLang="ja-JP" dirty="0"/>
+          </a:p>
+          <a:p>
+            <a:endParaRPr kumimoji="1" lang="en-US" altLang="ja-JP" dirty="0"/>
+          </a:p>
+          <a:p>
+            <a:endParaRPr kumimoji="1" lang="en-US" altLang="ja-JP" dirty="0"/>
+          </a:p>
+          <a:p>
+            <a:endParaRPr kumimoji="1" lang="en-US" altLang="ja-JP" dirty="0"/>
+          </a:p>
+          <a:p>
+            <a:endParaRPr kumimoji="1" lang="en-US" altLang="ja-JP" dirty="0"/>
+          </a:p>
+          <a:p>
+            <a:r>
+              <a:rPr kumimoji="1" lang="en-US" altLang="ja-JP" dirty="0"/>
+              <a:t>taro</a:t>
+            </a:r>
+          </a:p>
+        </p:txBody>
+      </p:sp>
+      <p:pic>
+        <p:nvPicPr>
+          <p:cNvPr id="3" name="図 2">
+            <a:extLst>
+              <a:ext uri="{FF2B5EF4-FFF2-40B4-BE49-F238E27FC236}">
+                <a16:creationId xmlns:a16="http://schemas.microsoft.com/office/drawing/2014/main" id="{4F7BB112-FA93-B265-6BF1-99A4549AE416}"/>
+              </a:ext>
+            </a:extLst>
+          </p:cNvPr>
+          <p:cNvPicPr>
+            <a:picLocks noChangeAspect="1"/>
+          </p:cNvPicPr>
+          <p:nvPr/>
+        </p:nvPicPr>
+        <p:blipFill>
+          <a:blip r:embed="rId2"/>
+          <a:stretch>
+            <a:fillRect/>
+          </a:stretch>
+        </p:blipFill>
+        <p:spPr>
+          <a:xfrm>
+            <a:off x="2743592" y="2133533"/>
+            <a:ext cx="457200" cy="457200"/>
+          </a:xfrm>
+          <a:prstGeom prst="rect">
+            <a:avLst/>
+          </a:prstGeom>
+        </p:spPr>
+      </p:pic>
+      <p:pic>
+        <p:nvPicPr>
+          <p:cNvPr id="5" name="図 4">
+            <a:extLst>
+              <a:ext uri="{FF2B5EF4-FFF2-40B4-BE49-F238E27FC236}">
+                <a16:creationId xmlns:a16="http://schemas.microsoft.com/office/drawing/2014/main" id="{C549BE99-7175-CE5D-608C-C3A51F8E1A5A}"/>
+              </a:ext>
+            </a:extLst>
+          </p:cNvPr>
+          <p:cNvPicPr>
+            <a:picLocks noChangeAspect="1"/>
+          </p:cNvPicPr>
+          <p:nvPr/>
+        </p:nvPicPr>
+        <p:blipFill>
+          <a:blip r:embed="rId2"/>
+          <a:stretch>
+            <a:fillRect/>
+          </a:stretch>
+        </p:blipFill>
+        <p:spPr>
+          <a:xfrm>
+            <a:off x="2743592" y="2957545"/>
+            <a:ext cx="457200" cy="457200"/>
+          </a:xfrm>
+          <a:prstGeom prst="rect">
+            <a:avLst/>
+          </a:prstGeom>
+        </p:spPr>
+      </p:pic>
+      <p:pic>
+        <p:nvPicPr>
+          <p:cNvPr id="12" name="図 11">
+            <a:extLst>
+              <a:ext uri="{FF2B5EF4-FFF2-40B4-BE49-F238E27FC236}">
+                <a16:creationId xmlns:a16="http://schemas.microsoft.com/office/drawing/2014/main" id="{5E1E45CC-4137-1317-984C-AA878C62D5E3}"/>
+              </a:ext>
+            </a:extLst>
+          </p:cNvPr>
+          <p:cNvPicPr>
+            <a:picLocks noChangeAspect="1"/>
+          </p:cNvPicPr>
+          <p:nvPr/>
+        </p:nvPicPr>
+        <p:blipFill>
+          <a:blip r:embed="rId2"/>
+          <a:stretch>
+            <a:fillRect/>
+          </a:stretch>
+        </p:blipFill>
+        <p:spPr>
+          <a:xfrm>
+            <a:off x="2740672" y="1286047"/>
+            <a:ext cx="457200" cy="457200"/>
+          </a:xfrm>
+          <a:prstGeom prst="rect">
+            <a:avLst/>
+          </a:prstGeom>
+        </p:spPr>
+      </p:pic>
+      <p:cxnSp>
+        <p:nvCxnSpPr>
+          <p:cNvPr id="13" name="直線コネクタ 12">
+            <a:extLst>
+              <a:ext uri="{FF2B5EF4-FFF2-40B4-BE49-F238E27FC236}">
+                <a16:creationId xmlns:a16="http://schemas.microsoft.com/office/drawing/2014/main" id="{F90BF944-6D9B-4EE2-6356-D6D3A751450F}"/>
+              </a:ext>
+            </a:extLst>
+          </p:cNvPr>
+          <p:cNvCxnSpPr>
+            <a:cxnSpLocks/>
+          </p:cNvCxnSpPr>
+          <p:nvPr/>
+        </p:nvCxnSpPr>
+        <p:spPr>
+          <a:xfrm>
+            <a:off x="2977961" y="2492561"/>
+            <a:ext cx="3600" cy="576000"/>
+          </a:xfrm>
+          <a:prstGeom prst="line">
+            <a:avLst/>
+          </a:prstGeom>
+          <a:ln w="25400">
+            <a:solidFill>
+              <a:schemeClr val="tx1"/>
+            </a:solidFill>
+          </a:ln>
+        </p:spPr>
+        <p:style>
+          <a:lnRef idx="1">
+            <a:schemeClr val="accent1"/>
+          </a:lnRef>
+          <a:fillRef idx="0">
+            <a:schemeClr val="accent1"/>
+          </a:fillRef>
+          <a:effectRef idx="0">
+            <a:schemeClr val="accent1"/>
+          </a:effectRef>
+          <a:fontRef idx="minor">
+            <a:schemeClr val="tx1"/>
+          </a:fontRef>
+        </p:style>
+      </p:cxnSp>
+      <p:cxnSp>
+        <p:nvCxnSpPr>
+          <p:cNvPr id="14" name="直線コネクタ 13">
+            <a:extLst>
+              <a:ext uri="{FF2B5EF4-FFF2-40B4-BE49-F238E27FC236}">
+                <a16:creationId xmlns:a16="http://schemas.microsoft.com/office/drawing/2014/main" id="{9BC41FE8-2639-90A0-CAEC-85021780FD9A}"/>
+              </a:ext>
+            </a:extLst>
+          </p:cNvPr>
+          <p:cNvCxnSpPr>
+            <a:cxnSpLocks/>
+          </p:cNvCxnSpPr>
+          <p:nvPr/>
+        </p:nvCxnSpPr>
+        <p:spPr>
+          <a:xfrm>
+            <a:off x="2966705" y="3312448"/>
+            <a:ext cx="3600" cy="503999"/>
+          </a:xfrm>
+          <a:prstGeom prst="line">
+            <a:avLst/>
+          </a:prstGeom>
+          <a:ln w="25400">
+            <a:solidFill>
+              <a:schemeClr val="tx1"/>
+            </a:solidFill>
+          </a:ln>
+        </p:spPr>
+        <p:style>
+          <a:lnRef idx="1">
+            <a:schemeClr val="accent1"/>
+          </a:lnRef>
+          <a:fillRef idx="0">
+            <a:schemeClr val="accent1"/>
+          </a:fillRef>
+          <a:effectRef idx="0">
+            <a:schemeClr val="accent1"/>
+          </a:effectRef>
+          <a:fontRef idx="minor">
+            <a:schemeClr val="tx1"/>
+          </a:fontRef>
+        </p:style>
+      </p:cxnSp>
+      <p:cxnSp>
+        <p:nvCxnSpPr>
+          <p:cNvPr id="16" name="直線コネクタ 15">
+            <a:extLst>
+              <a:ext uri="{FF2B5EF4-FFF2-40B4-BE49-F238E27FC236}">
+                <a16:creationId xmlns:a16="http://schemas.microsoft.com/office/drawing/2014/main" id="{516EF212-E331-9EAF-2249-19282EE959D5}"/>
+              </a:ext>
+            </a:extLst>
+          </p:cNvPr>
+          <p:cNvCxnSpPr>
+            <a:cxnSpLocks/>
+          </p:cNvCxnSpPr>
+          <p:nvPr/>
+        </p:nvCxnSpPr>
+        <p:spPr>
+          <a:xfrm>
+            <a:off x="2962412" y="1666469"/>
+            <a:ext cx="3600" cy="576000"/>
+          </a:xfrm>
+          <a:prstGeom prst="line">
+            <a:avLst/>
+          </a:prstGeom>
+          <a:ln w="25400">
+            <a:solidFill>
+              <a:schemeClr val="tx1"/>
+            </a:solidFill>
+          </a:ln>
+        </p:spPr>
+        <p:style>
+          <a:lnRef idx="1">
+            <a:schemeClr val="accent1"/>
+          </a:lnRef>
+          <a:fillRef idx="0">
+            <a:schemeClr val="accent1"/>
+          </a:fillRef>
+          <a:effectRef idx="0">
+            <a:schemeClr val="accent1"/>
+          </a:effectRef>
+          <a:fontRef idx="minor">
+            <a:schemeClr val="tx1"/>
+          </a:fontRef>
+        </p:style>
+      </p:cxnSp>
+      <p:sp>
+        <p:nvSpPr>
+          <p:cNvPr id="4" name="正方形/長方形 3">
+            <a:extLst>
+              <a:ext uri="{FF2B5EF4-FFF2-40B4-BE49-F238E27FC236}">
+                <a16:creationId xmlns:a16="http://schemas.microsoft.com/office/drawing/2014/main" id="{65346850-983F-4DBC-98B7-7C1DF811018F}"/>
+              </a:ext>
+            </a:extLst>
+          </p:cNvPr>
+          <p:cNvSpPr/>
+          <p:nvPr/>
+        </p:nvSpPr>
+        <p:spPr>
+          <a:xfrm>
+            <a:off x="2715505" y="2971945"/>
+            <a:ext cx="503633" cy="420627"/>
+          </a:xfrm>
+          <a:prstGeom prst="rect">
+            <a:avLst/>
+          </a:prstGeom>
+          <a:noFill/>
+          <a:ln w="38100">
+            <a:solidFill>
+              <a:schemeClr val="bg2"/>
+            </a:solidFill>
+          </a:ln>
+        </p:spPr>
+        <p:style>
+          <a:lnRef idx="2">
+            <a:schemeClr val="accent1">
+              <a:shade val="15000"/>
+            </a:schemeClr>
+          </a:lnRef>
+          <a:fillRef idx="1">
+            <a:schemeClr val="accent1"/>
+          </a:fillRef>
+          <a:effectRef idx="0">
+            <a:schemeClr val="accent1"/>
+          </a:effectRef>
+          <a:fontRef idx="minor">
+            <a:schemeClr val="lt1"/>
+          </a:fontRef>
+        </p:style>
+        <p:txBody>
+          <a:bodyPr rtlCol="0" anchor="ctr"/>
+          <a:lstStyle/>
+          <a:p>
+            <a:pPr algn="ctr"/>
+            <a:endParaRPr kumimoji="1" lang="ja-JP" altLang="en-US">
+              <a:solidFill>
+                <a:schemeClr val="tx1"/>
+              </a:solidFill>
+            </a:endParaRPr>
+          </a:p>
+        </p:txBody>
+      </p:sp>
+      <p:sp>
+        <p:nvSpPr>
+          <p:cNvPr id="25" name="テキスト ボックス 24">
+            <a:extLst>
+              <a:ext uri="{FF2B5EF4-FFF2-40B4-BE49-F238E27FC236}">
+                <a16:creationId xmlns:a16="http://schemas.microsoft.com/office/drawing/2014/main" id="{C5E1FD91-46AE-A1C8-97AC-801A191EC392}"/>
+              </a:ext>
+            </a:extLst>
+          </p:cNvPr>
+          <p:cNvSpPr txBox="1"/>
+          <p:nvPr/>
+        </p:nvSpPr>
+        <p:spPr>
+          <a:xfrm>
+            <a:off x="1331625" y="2984998"/>
+            <a:ext cx="1338828" cy="369332"/>
+          </a:xfrm>
+          <a:prstGeom prst="rect">
+            <a:avLst/>
+          </a:prstGeom>
+          <a:noFill/>
+        </p:spPr>
+        <p:txBody>
+          <a:bodyPr wrap="none" rtlCol="0">
+            <a:spAutoFit/>
+          </a:bodyPr>
+          <a:lstStyle/>
+          <a:p>
+            <a:r>
+              <a:rPr kumimoji="1" lang="ja-JP" altLang="en-US">
+                <a:solidFill>
+                  <a:schemeClr val="bg2"/>
+                </a:solidFill>
+              </a:rPr>
+              <a:t>ここにいる</a:t>
+            </a:r>
+          </a:p>
+        </p:txBody>
+      </p:sp>
+      <p:cxnSp>
+        <p:nvCxnSpPr>
+          <p:cNvPr id="2" name="直線コネクタ 1">
+            <a:extLst>
+              <a:ext uri="{FF2B5EF4-FFF2-40B4-BE49-F238E27FC236}">
+                <a16:creationId xmlns:a16="http://schemas.microsoft.com/office/drawing/2014/main" id="{64160243-0C2F-483B-BED1-936585E50EE8}"/>
+              </a:ext>
+            </a:extLst>
+          </p:cNvPr>
+          <p:cNvCxnSpPr>
+            <a:cxnSpLocks/>
+          </p:cNvCxnSpPr>
+          <p:nvPr/>
+        </p:nvCxnSpPr>
+        <p:spPr>
+          <a:xfrm>
+            <a:off x="5082332" y="1958117"/>
+            <a:ext cx="3600" cy="251999"/>
+          </a:xfrm>
+          <a:prstGeom prst="line">
+            <a:avLst/>
+          </a:prstGeom>
+          <a:ln w="25400">
+            <a:solidFill>
+              <a:schemeClr val="tx1"/>
+            </a:solidFill>
+          </a:ln>
+        </p:spPr>
+        <p:style>
+          <a:lnRef idx="1">
+            <a:schemeClr val="accent1"/>
+          </a:lnRef>
+          <a:fillRef idx="0">
+            <a:schemeClr val="accent1"/>
+          </a:fillRef>
+          <a:effectRef idx="0">
+            <a:schemeClr val="accent1"/>
+          </a:effectRef>
+          <a:fontRef idx="minor">
+            <a:schemeClr val="tx1"/>
+          </a:fontRef>
+        </p:style>
+      </p:cxnSp>
+      <p:cxnSp>
+        <p:nvCxnSpPr>
+          <p:cNvPr id="22" name="直線コネクタ 21">
+            <a:extLst>
+              <a:ext uri="{FF2B5EF4-FFF2-40B4-BE49-F238E27FC236}">
+                <a16:creationId xmlns:a16="http://schemas.microsoft.com/office/drawing/2014/main" id="{02D5C7F5-B87C-21D0-D62B-DF9C7BAA713B}"/>
+              </a:ext>
+            </a:extLst>
+          </p:cNvPr>
+          <p:cNvCxnSpPr>
+            <a:cxnSpLocks/>
+          </p:cNvCxnSpPr>
+          <p:nvPr/>
+        </p:nvCxnSpPr>
+        <p:spPr>
+          <a:xfrm flipV="1">
+            <a:off x="2955101" y="1954469"/>
+            <a:ext cx="2124000" cy="0"/>
+          </a:xfrm>
+          <a:prstGeom prst="line">
+            <a:avLst/>
+          </a:prstGeom>
+          <a:ln w="25400">
+            <a:solidFill>
+              <a:schemeClr val="tx1"/>
+            </a:solidFill>
+          </a:ln>
+        </p:spPr>
+        <p:style>
+          <a:lnRef idx="1">
+            <a:schemeClr val="accent1"/>
+          </a:lnRef>
+          <a:fillRef idx="0">
+            <a:schemeClr val="accent1"/>
+          </a:fillRef>
+          <a:effectRef idx="0">
+            <a:schemeClr val="accent1"/>
+          </a:effectRef>
+          <a:fontRef idx="minor">
+            <a:schemeClr val="tx1"/>
+          </a:fontRef>
+        </p:style>
+      </p:cxnSp>
+      <p:pic>
+        <p:nvPicPr>
+          <p:cNvPr id="28" name="図 27">
+            <a:extLst>
+              <a:ext uri="{FF2B5EF4-FFF2-40B4-BE49-F238E27FC236}">
+                <a16:creationId xmlns:a16="http://schemas.microsoft.com/office/drawing/2014/main" id="{02C52F02-6218-DA3E-1D42-17163F897FA5}"/>
+              </a:ext>
+            </a:extLst>
+          </p:cNvPr>
+          <p:cNvPicPr>
+            <a:picLocks noChangeAspect="1"/>
+          </p:cNvPicPr>
+          <p:nvPr/>
+        </p:nvPicPr>
+        <p:blipFill>
+          <a:blip r:embed="rId2"/>
+          <a:stretch>
+            <a:fillRect/>
+          </a:stretch>
+        </p:blipFill>
+        <p:spPr>
+          <a:xfrm>
+            <a:off x="4882478" y="2116403"/>
+            <a:ext cx="457200" cy="457200"/>
+          </a:xfrm>
+          <a:prstGeom prst="rect">
+            <a:avLst/>
+          </a:prstGeom>
+        </p:spPr>
+      </p:pic>
+      <p:sp>
+        <p:nvSpPr>
+          <p:cNvPr id="30" name="テキスト ボックス 29">
+            <a:extLst>
+              <a:ext uri="{FF2B5EF4-FFF2-40B4-BE49-F238E27FC236}">
+                <a16:creationId xmlns:a16="http://schemas.microsoft.com/office/drawing/2014/main" id="{BCA34AD6-6AD4-4DC0-48DF-5C2014A7B374}"/>
+              </a:ext>
+            </a:extLst>
+          </p:cNvPr>
+          <p:cNvSpPr txBox="1"/>
+          <p:nvPr/>
+        </p:nvSpPr>
+        <p:spPr>
+          <a:xfrm>
+            <a:off x="3187752" y="2027230"/>
+            <a:ext cx="1545578" cy="646331"/>
+          </a:xfrm>
+          <a:prstGeom prst="rect">
+            <a:avLst/>
+          </a:prstGeom>
+          <a:noFill/>
+        </p:spPr>
+        <p:txBody>
+          <a:bodyPr wrap="square">
+            <a:spAutoFit/>
+          </a:bodyPr>
+          <a:lstStyle/>
+          <a:p>
+            <a:r>
+              <a:rPr kumimoji="1" lang="en-US" altLang="ja-JP" dirty="0"/>
+              <a:t>home</a:t>
+            </a:r>
+          </a:p>
+          <a:p>
+            <a:r>
+              <a:rPr kumimoji="1" lang="ja-JP" altLang="en-US"/>
+              <a:t>または</a:t>
+            </a:r>
+            <a:r>
+              <a:rPr kumimoji="1" lang="en-US" altLang="ja-JP" dirty="0"/>
+              <a:t>Users</a:t>
+            </a:r>
+          </a:p>
+        </p:txBody>
+      </p:sp>
+      <p:pic>
+        <p:nvPicPr>
+          <p:cNvPr id="32" name="図 31">
+            <a:extLst>
+              <a:ext uri="{FF2B5EF4-FFF2-40B4-BE49-F238E27FC236}">
+                <a16:creationId xmlns:a16="http://schemas.microsoft.com/office/drawing/2014/main" id="{BFC1F0CD-5BD9-BF3E-CB59-C218B7C24986}"/>
+              </a:ext>
+            </a:extLst>
+          </p:cNvPr>
+          <p:cNvPicPr>
+            <a:picLocks noChangeAspect="1"/>
+          </p:cNvPicPr>
+          <p:nvPr/>
+        </p:nvPicPr>
+        <p:blipFill>
+          <a:blip r:embed="rId3"/>
+          <a:stretch>
+            <a:fillRect/>
+          </a:stretch>
+        </p:blipFill>
+        <p:spPr>
+          <a:xfrm>
+            <a:off x="4894607" y="2907306"/>
+            <a:ext cx="457200" cy="457200"/>
+          </a:xfrm>
+          <a:prstGeom prst="rect">
+            <a:avLst/>
+          </a:prstGeom>
+        </p:spPr>
+      </p:pic>
+      <p:cxnSp>
+        <p:nvCxnSpPr>
+          <p:cNvPr id="33" name="直線コネクタ 32">
+            <a:extLst>
+              <a:ext uri="{FF2B5EF4-FFF2-40B4-BE49-F238E27FC236}">
+                <a16:creationId xmlns:a16="http://schemas.microsoft.com/office/drawing/2014/main" id="{7AD906A8-C2D6-0A1D-E8BC-14EFDDBEB8F3}"/>
+              </a:ext>
+            </a:extLst>
+          </p:cNvPr>
+          <p:cNvCxnSpPr>
+            <a:cxnSpLocks/>
+          </p:cNvCxnSpPr>
+          <p:nvPr/>
+        </p:nvCxnSpPr>
+        <p:spPr>
+          <a:xfrm>
+            <a:off x="5108983" y="2472021"/>
+            <a:ext cx="3600" cy="503999"/>
+          </a:xfrm>
+          <a:prstGeom prst="line">
+            <a:avLst/>
+          </a:prstGeom>
+          <a:ln w="25400">
+            <a:solidFill>
+              <a:schemeClr val="tx1"/>
+            </a:solidFill>
+          </a:ln>
+        </p:spPr>
+        <p:style>
+          <a:lnRef idx="1">
+            <a:schemeClr val="accent1"/>
+          </a:lnRef>
+          <a:fillRef idx="0">
+            <a:schemeClr val="accent1"/>
+          </a:fillRef>
+          <a:effectRef idx="0">
+            <a:schemeClr val="accent1"/>
+          </a:effectRef>
+          <a:fontRef idx="minor">
+            <a:schemeClr val="tx1"/>
+          </a:fontRef>
+        </p:style>
+      </p:cxnSp>
+      <p:cxnSp>
+        <p:nvCxnSpPr>
+          <p:cNvPr id="34" name="直線コネクタ 33">
+            <a:extLst>
+              <a:ext uri="{FF2B5EF4-FFF2-40B4-BE49-F238E27FC236}">
+                <a16:creationId xmlns:a16="http://schemas.microsoft.com/office/drawing/2014/main" id="{29CEB435-374C-7662-6BCE-2838FCC0AA26}"/>
+              </a:ext>
+            </a:extLst>
+          </p:cNvPr>
+          <p:cNvCxnSpPr>
+            <a:cxnSpLocks/>
+          </p:cNvCxnSpPr>
+          <p:nvPr/>
+        </p:nvCxnSpPr>
+        <p:spPr>
+          <a:xfrm>
+            <a:off x="5108983" y="2737175"/>
+            <a:ext cx="1478813" cy="0"/>
+          </a:xfrm>
+          <a:prstGeom prst="line">
+            <a:avLst/>
+          </a:prstGeom>
+          <a:ln w="25400">
+            <a:solidFill>
+              <a:schemeClr val="tx1"/>
+            </a:solidFill>
+          </a:ln>
+        </p:spPr>
+        <p:style>
+          <a:lnRef idx="1">
+            <a:schemeClr val="accent1"/>
+          </a:lnRef>
+          <a:fillRef idx="0">
+            <a:schemeClr val="accent1"/>
+          </a:fillRef>
+          <a:effectRef idx="0">
+            <a:schemeClr val="accent1"/>
+          </a:effectRef>
+          <a:fontRef idx="minor">
+            <a:schemeClr val="tx1"/>
+          </a:fontRef>
+        </p:style>
+      </p:cxnSp>
+      <p:pic>
+        <p:nvPicPr>
+          <p:cNvPr id="35" name="図 34">
+            <a:extLst>
+              <a:ext uri="{FF2B5EF4-FFF2-40B4-BE49-F238E27FC236}">
+                <a16:creationId xmlns:a16="http://schemas.microsoft.com/office/drawing/2014/main" id="{98421023-E8A6-0A81-BFDA-178C6A428F41}"/>
+              </a:ext>
+            </a:extLst>
+          </p:cNvPr>
+          <p:cNvPicPr>
+            <a:picLocks noChangeAspect="1"/>
+          </p:cNvPicPr>
+          <p:nvPr/>
+        </p:nvPicPr>
+        <p:blipFill>
+          <a:blip r:embed="rId3"/>
+          <a:stretch>
+            <a:fillRect/>
+          </a:stretch>
+        </p:blipFill>
+        <p:spPr>
+          <a:xfrm>
+            <a:off x="6009652" y="2900748"/>
+            <a:ext cx="457200" cy="457200"/>
+          </a:xfrm>
+          <a:prstGeom prst="rect">
+            <a:avLst/>
+          </a:prstGeom>
+        </p:spPr>
+      </p:pic>
+      <p:sp>
+        <p:nvSpPr>
+          <p:cNvPr id="36" name="テキスト ボックス 35">
+            <a:extLst>
+              <a:ext uri="{FF2B5EF4-FFF2-40B4-BE49-F238E27FC236}">
+                <a16:creationId xmlns:a16="http://schemas.microsoft.com/office/drawing/2014/main" id="{66AFE3DE-75E9-3FA2-0366-16C470EA8F1D}"/>
+              </a:ext>
+            </a:extLst>
+          </p:cNvPr>
+          <p:cNvSpPr txBox="1"/>
+          <p:nvPr/>
+        </p:nvSpPr>
+        <p:spPr>
+          <a:xfrm>
+            <a:off x="5292669" y="2160337"/>
+            <a:ext cx="1577676" cy="1200329"/>
+          </a:xfrm>
+          <a:prstGeom prst="rect">
+            <a:avLst/>
+          </a:prstGeom>
+          <a:noFill/>
+        </p:spPr>
+        <p:txBody>
+          <a:bodyPr wrap="none" rtlCol="0">
+            <a:spAutoFit/>
+          </a:bodyPr>
+          <a:lstStyle/>
+          <a:p>
+            <a:r>
+              <a:rPr kumimoji="1" lang="en-US" altLang="ja-JP" dirty="0"/>
+              <a:t>bin</a:t>
+            </a:r>
+          </a:p>
+          <a:p>
+            <a:endParaRPr kumimoji="1" lang="en-US" altLang="ja-JP" dirty="0"/>
+          </a:p>
+          <a:p>
+            <a:endParaRPr kumimoji="1" lang="en-US" altLang="ja-JP" dirty="0"/>
+          </a:p>
+          <a:p>
+            <a:r>
+              <a:rPr kumimoji="1" lang="en-US" altLang="ja-JP" dirty="0"/>
+              <a:t>cp       ls</a:t>
+            </a:r>
+            <a:endParaRPr kumimoji="1" lang="ja-JP" altLang="en-US"/>
+          </a:p>
+        </p:txBody>
+      </p:sp>
+      <p:cxnSp>
+        <p:nvCxnSpPr>
+          <p:cNvPr id="37" name="直線コネクタ 36">
+            <a:extLst>
+              <a:ext uri="{FF2B5EF4-FFF2-40B4-BE49-F238E27FC236}">
+                <a16:creationId xmlns:a16="http://schemas.microsoft.com/office/drawing/2014/main" id="{E15E962A-10A3-D6B0-CEF0-508D4AF93E39}"/>
+              </a:ext>
+            </a:extLst>
+          </p:cNvPr>
+          <p:cNvCxnSpPr>
+            <a:cxnSpLocks/>
+          </p:cNvCxnSpPr>
+          <p:nvPr/>
+        </p:nvCxnSpPr>
+        <p:spPr>
+          <a:xfrm>
+            <a:off x="6229142" y="2716307"/>
+            <a:ext cx="3600" cy="251999"/>
+          </a:xfrm>
+          <a:prstGeom prst="line">
+            <a:avLst/>
+          </a:prstGeom>
+          <a:ln w="25400">
+            <a:solidFill>
+              <a:schemeClr val="tx1"/>
+            </a:solidFill>
+          </a:ln>
+        </p:spPr>
+        <p:style>
+          <a:lnRef idx="1">
+            <a:schemeClr val="accent1"/>
+          </a:lnRef>
+          <a:fillRef idx="0">
+            <a:schemeClr val="accent1"/>
+          </a:fillRef>
+          <a:effectRef idx="0">
+            <a:schemeClr val="accent1"/>
+          </a:effectRef>
+          <a:fontRef idx="minor">
+            <a:schemeClr val="tx1"/>
+          </a:fontRef>
+        </p:style>
+      </p:cxnSp>
+      <p:cxnSp>
+        <p:nvCxnSpPr>
+          <p:cNvPr id="39" name="直線コネクタ 38">
+            <a:extLst>
+              <a:ext uri="{FF2B5EF4-FFF2-40B4-BE49-F238E27FC236}">
+                <a16:creationId xmlns:a16="http://schemas.microsoft.com/office/drawing/2014/main" id="{19FD6C61-60D9-B6F4-4CDD-72BBE64D03CB}"/>
+              </a:ext>
+            </a:extLst>
+          </p:cNvPr>
+          <p:cNvCxnSpPr>
+            <a:cxnSpLocks/>
+          </p:cNvCxnSpPr>
+          <p:nvPr/>
+        </p:nvCxnSpPr>
+        <p:spPr>
+          <a:xfrm>
+            <a:off x="2855737" y="2500204"/>
+            <a:ext cx="3600" cy="503999"/>
+          </a:xfrm>
+          <a:prstGeom prst="line">
+            <a:avLst/>
+          </a:prstGeom>
+          <a:ln w="25400">
+            <a:solidFill>
+              <a:schemeClr val="bg2"/>
+            </a:solidFill>
+            <a:headEnd type="triangle" w="lg" len="lg"/>
+          </a:ln>
+        </p:spPr>
+        <p:style>
+          <a:lnRef idx="1">
+            <a:schemeClr val="accent1"/>
+          </a:lnRef>
+          <a:fillRef idx="0">
+            <a:schemeClr val="accent1"/>
+          </a:fillRef>
+          <a:effectRef idx="0">
+            <a:schemeClr val="accent1"/>
+          </a:effectRef>
+          <a:fontRef idx="minor">
+            <a:schemeClr val="tx1"/>
+          </a:fontRef>
+        </p:style>
+      </p:cxnSp>
+      <p:sp>
+        <p:nvSpPr>
+          <p:cNvPr id="41" name="正方形/長方形 40">
+            <a:extLst>
+              <a:ext uri="{FF2B5EF4-FFF2-40B4-BE49-F238E27FC236}">
+                <a16:creationId xmlns:a16="http://schemas.microsoft.com/office/drawing/2014/main" id="{9512D8ED-EA21-BBBF-E9A2-2F7DB41500F8}"/>
+              </a:ext>
+            </a:extLst>
+          </p:cNvPr>
+          <p:cNvSpPr/>
+          <p:nvPr/>
+        </p:nvSpPr>
+        <p:spPr>
+          <a:xfrm>
+            <a:off x="4857166" y="2128005"/>
+            <a:ext cx="503633" cy="420627"/>
+          </a:xfrm>
+          <a:prstGeom prst="rect">
+            <a:avLst/>
+          </a:prstGeom>
+          <a:noFill/>
+          <a:ln w="38100">
+            <a:solidFill>
+              <a:schemeClr val="bg2"/>
+            </a:solidFill>
+          </a:ln>
+        </p:spPr>
+        <p:style>
+          <a:lnRef idx="2">
+            <a:schemeClr val="accent1">
+              <a:shade val="15000"/>
+            </a:schemeClr>
+          </a:lnRef>
+          <a:fillRef idx="1">
+            <a:schemeClr val="accent1"/>
+          </a:fillRef>
+          <a:effectRef idx="0">
+            <a:schemeClr val="accent1"/>
+          </a:effectRef>
+          <a:fontRef idx="minor">
+            <a:schemeClr val="lt1"/>
+          </a:fontRef>
+        </p:style>
+        <p:txBody>
+          <a:bodyPr rtlCol="0" anchor="ctr"/>
+          <a:lstStyle/>
+          <a:p>
+            <a:pPr algn="ctr"/>
+            <a:endParaRPr kumimoji="1" lang="ja-JP" altLang="en-US">
+              <a:solidFill>
+                <a:schemeClr val="tx1"/>
+              </a:solidFill>
+            </a:endParaRPr>
+          </a:p>
+        </p:txBody>
+      </p:sp>
+      <p:sp>
+        <p:nvSpPr>
+          <p:cNvPr id="42" name="テキスト ボックス 41">
+            <a:extLst>
+              <a:ext uri="{FF2B5EF4-FFF2-40B4-BE49-F238E27FC236}">
+                <a16:creationId xmlns:a16="http://schemas.microsoft.com/office/drawing/2014/main" id="{2F5621A2-57D2-29FB-627F-40F7F6D02FA3}"/>
+              </a:ext>
+            </a:extLst>
+          </p:cNvPr>
+          <p:cNvSpPr txBox="1"/>
+          <p:nvPr/>
+        </p:nvSpPr>
+        <p:spPr>
+          <a:xfrm>
+            <a:off x="5770990" y="2038967"/>
+            <a:ext cx="2374368" cy="646331"/>
+          </a:xfrm>
+          <a:prstGeom prst="rect">
+            <a:avLst/>
+          </a:prstGeom>
+          <a:noFill/>
+        </p:spPr>
+        <p:txBody>
+          <a:bodyPr wrap="none" rtlCol="0">
+            <a:spAutoFit/>
+          </a:bodyPr>
+          <a:lstStyle/>
+          <a:p>
+            <a:r>
+              <a:rPr kumimoji="1" lang="ja-JP" altLang="en-US">
+                <a:solidFill>
+                  <a:schemeClr val="bg2"/>
+                </a:solidFill>
+              </a:rPr>
+              <a:t>絶対パス </a:t>
+            </a:r>
+            <a:r>
+              <a:rPr kumimoji="1" lang="en-US" altLang="ja-JP" dirty="0">
+                <a:solidFill>
+                  <a:schemeClr val="bg2"/>
+                </a:solidFill>
+              </a:rPr>
+              <a:t>/bin</a:t>
+            </a:r>
+          </a:p>
+          <a:p>
+            <a:r>
+              <a:rPr kumimoji="1" lang="ja-JP" altLang="en-US">
+                <a:solidFill>
+                  <a:schemeClr val="bg2"/>
+                </a:solidFill>
+              </a:rPr>
+              <a:t>相対パス</a:t>
+            </a:r>
+            <a:r>
+              <a:rPr kumimoji="1" lang="en-US" altLang="ja-JP" dirty="0">
+                <a:solidFill>
+                  <a:schemeClr val="bg2"/>
+                </a:solidFill>
+              </a:rPr>
+              <a:t> ../../bin</a:t>
+            </a:r>
+            <a:endParaRPr kumimoji="1" lang="ja-JP" altLang="en-US">
+              <a:solidFill>
+                <a:schemeClr val="bg2"/>
+              </a:solidFill>
+            </a:endParaRPr>
+          </a:p>
+        </p:txBody>
+      </p:sp>
+      <p:cxnSp>
+        <p:nvCxnSpPr>
+          <p:cNvPr id="43" name="直線コネクタ 42">
+            <a:extLst>
+              <a:ext uri="{FF2B5EF4-FFF2-40B4-BE49-F238E27FC236}">
+                <a16:creationId xmlns:a16="http://schemas.microsoft.com/office/drawing/2014/main" id="{3C583352-D914-8838-B060-E0E16DAD7D3B}"/>
+              </a:ext>
+            </a:extLst>
+          </p:cNvPr>
+          <p:cNvCxnSpPr>
+            <a:cxnSpLocks/>
+          </p:cNvCxnSpPr>
+          <p:nvPr/>
+        </p:nvCxnSpPr>
+        <p:spPr>
+          <a:xfrm>
+            <a:off x="2836591" y="1675240"/>
+            <a:ext cx="3600" cy="503999"/>
+          </a:xfrm>
+          <a:prstGeom prst="line">
+            <a:avLst/>
+          </a:prstGeom>
+          <a:ln w="25400">
+            <a:solidFill>
+              <a:schemeClr val="bg2"/>
+            </a:solidFill>
+            <a:headEnd type="triangle" w="lg" len="lg"/>
+          </a:ln>
+        </p:spPr>
+        <p:style>
+          <a:lnRef idx="1">
+            <a:schemeClr val="accent1"/>
+          </a:lnRef>
+          <a:fillRef idx="0">
+            <a:schemeClr val="accent1"/>
+          </a:fillRef>
+          <a:effectRef idx="0">
+            <a:schemeClr val="accent1"/>
+          </a:effectRef>
+          <a:fontRef idx="minor">
+            <a:schemeClr val="tx1"/>
+          </a:fontRef>
+        </p:style>
+      </p:cxnSp>
+      <p:cxnSp>
+        <p:nvCxnSpPr>
+          <p:cNvPr id="44" name="直線コネクタ 43">
+            <a:extLst>
+              <a:ext uri="{FF2B5EF4-FFF2-40B4-BE49-F238E27FC236}">
+                <a16:creationId xmlns:a16="http://schemas.microsoft.com/office/drawing/2014/main" id="{A01FA107-865F-5CA4-5783-0911C3623016}"/>
+              </a:ext>
+            </a:extLst>
+          </p:cNvPr>
+          <p:cNvCxnSpPr>
+            <a:cxnSpLocks/>
+          </p:cNvCxnSpPr>
+          <p:nvPr/>
+        </p:nvCxnSpPr>
+        <p:spPr>
+          <a:xfrm flipH="1" flipV="1">
+            <a:off x="4980881" y="1840771"/>
+            <a:ext cx="3048" cy="247886"/>
+          </a:xfrm>
+          <a:prstGeom prst="line">
+            <a:avLst/>
+          </a:prstGeom>
+          <a:ln w="25400">
+            <a:solidFill>
+              <a:schemeClr val="bg2"/>
+            </a:solidFill>
+            <a:headEnd type="triangle" w="lg" len="lg"/>
+          </a:ln>
+        </p:spPr>
+        <p:style>
+          <a:lnRef idx="1">
+            <a:schemeClr val="accent1"/>
+          </a:lnRef>
+          <a:fillRef idx="0">
+            <a:schemeClr val="accent1"/>
+          </a:fillRef>
+          <a:effectRef idx="0">
+            <a:schemeClr val="accent1"/>
+          </a:effectRef>
+          <a:fontRef idx="minor">
+            <a:schemeClr val="tx1"/>
+          </a:fontRef>
+        </p:style>
+      </p:cxnSp>
+      <p:cxnSp>
+        <p:nvCxnSpPr>
+          <p:cNvPr id="46" name="直線コネクタ 45">
+            <a:extLst>
+              <a:ext uri="{FF2B5EF4-FFF2-40B4-BE49-F238E27FC236}">
+                <a16:creationId xmlns:a16="http://schemas.microsoft.com/office/drawing/2014/main" id="{C9B8C1B4-1C65-90A1-5EF1-FD1AC82CAFCF}"/>
+              </a:ext>
+            </a:extLst>
+          </p:cNvPr>
+          <p:cNvCxnSpPr>
+            <a:cxnSpLocks/>
+          </p:cNvCxnSpPr>
+          <p:nvPr/>
+        </p:nvCxnSpPr>
+        <p:spPr>
+          <a:xfrm>
+            <a:off x="3052842" y="1840771"/>
+            <a:ext cx="1928039" cy="0"/>
+          </a:xfrm>
+          <a:prstGeom prst="line">
+            <a:avLst/>
+          </a:prstGeom>
+          <a:ln w="25400">
+            <a:solidFill>
+              <a:schemeClr val="accent1"/>
+            </a:solidFill>
+          </a:ln>
+        </p:spPr>
+        <p:style>
+          <a:lnRef idx="1">
+            <a:schemeClr val="accent1"/>
+          </a:lnRef>
+          <a:fillRef idx="0">
+            <a:schemeClr val="accent1"/>
+          </a:fillRef>
+          <a:effectRef idx="0">
+            <a:schemeClr val="accent1"/>
+          </a:effectRef>
+          <a:fontRef idx="minor">
+            <a:schemeClr val="tx1"/>
+          </a:fontRef>
+        </p:style>
+      </p:cxnSp>
+      <p:cxnSp>
+        <p:nvCxnSpPr>
+          <p:cNvPr id="48" name="直線コネクタ 47">
+            <a:extLst>
+              <a:ext uri="{FF2B5EF4-FFF2-40B4-BE49-F238E27FC236}">
+                <a16:creationId xmlns:a16="http://schemas.microsoft.com/office/drawing/2014/main" id="{ED6E915A-8696-AE5A-945A-794F8199AE8F}"/>
+              </a:ext>
+            </a:extLst>
+          </p:cNvPr>
+          <p:cNvCxnSpPr>
+            <a:cxnSpLocks/>
+          </p:cNvCxnSpPr>
+          <p:nvPr/>
+        </p:nvCxnSpPr>
+        <p:spPr>
+          <a:xfrm flipV="1">
+            <a:off x="3052842" y="1677199"/>
+            <a:ext cx="0" cy="163572"/>
+          </a:xfrm>
+          <a:prstGeom prst="line">
+            <a:avLst/>
+          </a:prstGeom>
+          <a:ln w="25400">
+            <a:solidFill>
+              <a:schemeClr val="accent1"/>
+            </a:solidFill>
+          </a:ln>
+        </p:spPr>
+        <p:style>
+          <a:lnRef idx="1">
+            <a:schemeClr val="accent1"/>
+          </a:lnRef>
+          <a:fillRef idx="0">
+            <a:schemeClr val="accent1"/>
+          </a:fillRef>
+          <a:effectRef idx="0">
+            <a:schemeClr val="accent1"/>
+          </a:effectRef>
+          <a:fontRef idx="minor">
+            <a:schemeClr val="tx1"/>
+          </a:fontRef>
+        </p:style>
+      </p:cxnSp>
+    </p:spTree>
+    <p:extLst>
+      <p:ext uri="{BB962C8B-B14F-4D97-AF65-F5344CB8AC3E}">
+        <p14:creationId xmlns:p14="http://schemas.microsoft.com/office/powerpoint/2010/main" val="2243243882"/>
       </p:ext>
     </p:extLst>
   </p:cSld>

--- a/materials/file-folder.pptx
+++ b/materials/file-folder.pptx
@@ -5,7 +5,7 @@
     <p:sldMasterId id="2147483660" r:id="rId1"/>
   </p:sldMasterIdLst>
   <p:notesMasterIdLst>
-    <p:notesMasterId r:id="rId11"/>
+    <p:notesMasterId r:id="rId12"/>
   </p:notesMasterIdLst>
   <p:sldIdLst>
     <p:sldId id="355" r:id="rId2"/>
@@ -15,8 +15,9 @@
     <p:sldId id="359" r:id="rId6"/>
     <p:sldId id="364" r:id="rId7"/>
     <p:sldId id="360" r:id="rId8"/>
-    <p:sldId id="361" r:id="rId9"/>
-    <p:sldId id="363" r:id="rId10"/>
+    <p:sldId id="365" r:id="rId9"/>
+    <p:sldId id="361" r:id="rId10"/>
+    <p:sldId id="363" r:id="rId11"/>
   </p:sldIdLst>
   <p:sldSz cx="9144000" cy="6858000" type="screen4x3"/>
   <p:notesSz cx="6858000" cy="9144000"/>
@@ -3712,6 +3713,1156 @@
     <p:extLst>
       <p:ext uri="{BB962C8B-B14F-4D97-AF65-F5344CB8AC3E}">
         <p14:creationId xmlns:p14="http://schemas.microsoft.com/office/powerpoint/2010/main" val="2697752010"/>
+      </p:ext>
+    </p:extLst>
+  </p:cSld>
+  <p:clrMapOvr>
+    <a:masterClrMapping/>
+  </p:clrMapOvr>
+</p:sld>
+</file>
+
+<file path=ppt/slides/slide10.xml><?xml version="1.0" encoding="utf-8"?>
+<p:sld xmlns:a="http://schemas.openxmlformats.org/drawingml/2006/main" xmlns:r="http://schemas.openxmlformats.org/officeDocument/2006/relationships" xmlns:p="http://schemas.openxmlformats.org/presentationml/2006/main">
+  <p:cSld>
+    <p:spTree>
+      <p:nvGrpSpPr>
+        <p:cNvPr id="1" name="">
+          <a:extLst>
+            <a:ext uri="{FF2B5EF4-FFF2-40B4-BE49-F238E27FC236}">
+              <a16:creationId xmlns:a16="http://schemas.microsoft.com/office/drawing/2014/main" id="{D12EFBBD-DAA5-1A37-ABAB-CFA7CBBB3853}"/>
+            </a:ext>
+          </a:extLst>
+        </p:cNvPr>
+        <p:cNvGrpSpPr/>
+        <p:nvPr/>
+      </p:nvGrpSpPr>
+      <p:grpSpPr>
+        <a:xfrm>
+          <a:off x="0" y="0"/>
+          <a:ext cx="0" cy="0"/>
+          <a:chOff x="0" y="0"/>
+          <a:chExt cx="0" cy="0"/>
+        </a:xfrm>
+      </p:grpSpPr>
+      <p:sp>
+        <p:nvSpPr>
+          <p:cNvPr id="7" name="テキスト ボックス 6">
+            <a:extLst>
+              <a:ext uri="{FF2B5EF4-FFF2-40B4-BE49-F238E27FC236}">
+                <a16:creationId xmlns:a16="http://schemas.microsoft.com/office/drawing/2014/main" id="{96ECD359-1D35-0C58-B230-990BEDA8ED85}"/>
+              </a:ext>
+            </a:extLst>
+          </p:cNvPr>
+          <p:cNvSpPr txBox="1">
+            <a:spLocks/>
+          </p:cNvSpPr>
+          <p:nvPr/>
+        </p:nvSpPr>
+        <p:spPr>
+          <a:xfrm>
+            <a:off x="3163052" y="1331694"/>
+            <a:ext cx="691215" cy="2031325"/>
+          </a:xfrm>
+          <a:prstGeom prst="rect">
+            <a:avLst/>
+          </a:prstGeom>
+          <a:noFill/>
+        </p:spPr>
+        <p:txBody>
+          <a:bodyPr wrap="none" rtlCol="0">
+            <a:spAutoFit/>
+          </a:bodyPr>
+          <a:lstStyle/>
+          <a:p>
+            <a:r>
+              <a:rPr kumimoji="1" lang="en-US" altLang="ja-JP" dirty="0"/>
+              <a:t>/</a:t>
+            </a:r>
+          </a:p>
+          <a:p>
+            <a:endParaRPr kumimoji="1" lang="en-US" altLang="ja-JP" dirty="0"/>
+          </a:p>
+          <a:p>
+            <a:endParaRPr kumimoji="1" lang="en-US" altLang="ja-JP" dirty="0"/>
+          </a:p>
+          <a:p>
+            <a:endParaRPr kumimoji="1" lang="en-US" altLang="ja-JP" dirty="0"/>
+          </a:p>
+          <a:p>
+            <a:endParaRPr kumimoji="1" lang="en-US" altLang="ja-JP" dirty="0"/>
+          </a:p>
+          <a:p>
+            <a:endParaRPr kumimoji="1" lang="en-US" altLang="ja-JP" dirty="0"/>
+          </a:p>
+          <a:p>
+            <a:r>
+              <a:rPr kumimoji="1" lang="en-US" altLang="ja-JP" dirty="0"/>
+              <a:t>taro</a:t>
+            </a:r>
+          </a:p>
+        </p:txBody>
+      </p:sp>
+      <p:pic>
+        <p:nvPicPr>
+          <p:cNvPr id="3" name="図 2">
+            <a:extLst>
+              <a:ext uri="{FF2B5EF4-FFF2-40B4-BE49-F238E27FC236}">
+                <a16:creationId xmlns:a16="http://schemas.microsoft.com/office/drawing/2014/main" id="{4F7BB112-FA93-B265-6BF1-99A4549AE416}"/>
+              </a:ext>
+            </a:extLst>
+          </p:cNvPr>
+          <p:cNvPicPr>
+            <a:picLocks noChangeAspect="1"/>
+          </p:cNvPicPr>
+          <p:nvPr/>
+        </p:nvPicPr>
+        <p:blipFill>
+          <a:blip r:embed="rId2"/>
+          <a:stretch>
+            <a:fillRect/>
+          </a:stretch>
+        </p:blipFill>
+        <p:spPr>
+          <a:xfrm>
+            <a:off x="2743592" y="2133533"/>
+            <a:ext cx="457200" cy="457200"/>
+          </a:xfrm>
+          <a:prstGeom prst="rect">
+            <a:avLst/>
+          </a:prstGeom>
+        </p:spPr>
+      </p:pic>
+      <p:pic>
+        <p:nvPicPr>
+          <p:cNvPr id="5" name="図 4">
+            <a:extLst>
+              <a:ext uri="{FF2B5EF4-FFF2-40B4-BE49-F238E27FC236}">
+                <a16:creationId xmlns:a16="http://schemas.microsoft.com/office/drawing/2014/main" id="{C549BE99-7175-CE5D-608C-C3A51F8E1A5A}"/>
+              </a:ext>
+            </a:extLst>
+          </p:cNvPr>
+          <p:cNvPicPr>
+            <a:picLocks noChangeAspect="1"/>
+          </p:cNvPicPr>
+          <p:nvPr/>
+        </p:nvPicPr>
+        <p:blipFill>
+          <a:blip r:embed="rId2"/>
+          <a:stretch>
+            <a:fillRect/>
+          </a:stretch>
+        </p:blipFill>
+        <p:spPr>
+          <a:xfrm>
+            <a:off x="2743592" y="2957545"/>
+            <a:ext cx="457200" cy="457200"/>
+          </a:xfrm>
+          <a:prstGeom prst="rect">
+            <a:avLst/>
+          </a:prstGeom>
+        </p:spPr>
+      </p:pic>
+      <p:pic>
+        <p:nvPicPr>
+          <p:cNvPr id="12" name="図 11">
+            <a:extLst>
+              <a:ext uri="{FF2B5EF4-FFF2-40B4-BE49-F238E27FC236}">
+                <a16:creationId xmlns:a16="http://schemas.microsoft.com/office/drawing/2014/main" id="{5E1E45CC-4137-1317-984C-AA878C62D5E3}"/>
+              </a:ext>
+            </a:extLst>
+          </p:cNvPr>
+          <p:cNvPicPr>
+            <a:picLocks noChangeAspect="1"/>
+          </p:cNvPicPr>
+          <p:nvPr/>
+        </p:nvPicPr>
+        <p:blipFill>
+          <a:blip r:embed="rId2"/>
+          <a:stretch>
+            <a:fillRect/>
+          </a:stretch>
+        </p:blipFill>
+        <p:spPr>
+          <a:xfrm>
+            <a:off x="2740672" y="1286047"/>
+            <a:ext cx="457200" cy="457200"/>
+          </a:xfrm>
+          <a:prstGeom prst="rect">
+            <a:avLst/>
+          </a:prstGeom>
+        </p:spPr>
+      </p:pic>
+      <p:cxnSp>
+        <p:nvCxnSpPr>
+          <p:cNvPr id="13" name="直線コネクタ 12">
+            <a:extLst>
+              <a:ext uri="{FF2B5EF4-FFF2-40B4-BE49-F238E27FC236}">
+                <a16:creationId xmlns:a16="http://schemas.microsoft.com/office/drawing/2014/main" id="{F90BF944-6D9B-4EE2-6356-D6D3A751450F}"/>
+              </a:ext>
+            </a:extLst>
+          </p:cNvPr>
+          <p:cNvCxnSpPr>
+            <a:cxnSpLocks/>
+          </p:cNvCxnSpPr>
+          <p:nvPr/>
+        </p:nvCxnSpPr>
+        <p:spPr>
+          <a:xfrm>
+            <a:off x="2977961" y="2492561"/>
+            <a:ext cx="3600" cy="576000"/>
+          </a:xfrm>
+          <a:prstGeom prst="line">
+            <a:avLst/>
+          </a:prstGeom>
+          <a:ln w="25400">
+            <a:solidFill>
+              <a:schemeClr val="tx1"/>
+            </a:solidFill>
+          </a:ln>
+        </p:spPr>
+        <p:style>
+          <a:lnRef idx="1">
+            <a:schemeClr val="accent1"/>
+          </a:lnRef>
+          <a:fillRef idx="0">
+            <a:schemeClr val="accent1"/>
+          </a:fillRef>
+          <a:effectRef idx="0">
+            <a:schemeClr val="accent1"/>
+          </a:effectRef>
+          <a:fontRef idx="minor">
+            <a:schemeClr val="tx1"/>
+          </a:fontRef>
+        </p:style>
+      </p:cxnSp>
+      <p:cxnSp>
+        <p:nvCxnSpPr>
+          <p:cNvPr id="14" name="直線コネクタ 13">
+            <a:extLst>
+              <a:ext uri="{FF2B5EF4-FFF2-40B4-BE49-F238E27FC236}">
+                <a16:creationId xmlns:a16="http://schemas.microsoft.com/office/drawing/2014/main" id="{9BC41FE8-2639-90A0-CAEC-85021780FD9A}"/>
+              </a:ext>
+            </a:extLst>
+          </p:cNvPr>
+          <p:cNvCxnSpPr>
+            <a:cxnSpLocks/>
+          </p:cNvCxnSpPr>
+          <p:nvPr/>
+        </p:nvCxnSpPr>
+        <p:spPr>
+          <a:xfrm>
+            <a:off x="2966705" y="3312448"/>
+            <a:ext cx="3600" cy="503999"/>
+          </a:xfrm>
+          <a:prstGeom prst="line">
+            <a:avLst/>
+          </a:prstGeom>
+          <a:ln w="25400">
+            <a:solidFill>
+              <a:schemeClr val="tx1"/>
+            </a:solidFill>
+          </a:ln>
+        </p:spPr>
+        <p:style>
+          <a:lnRef idx="1">
+            <a:schemeClr val="accent1"/>
+          </a:lnRef>
+          <a:fillRef idx="0">
+            <a:schemeClr val="accent1"/>
+          </a:fillRef>
+          <a:effectRef idx="0">
+            <a:schemeClr val="accent1"/>
+          </a:effectRef>
+          <a:fontRef idx="minor">
+            <a:schemeClr val="tx1"/>
+          </a:fontRef>
+        </p:style>
+      </p:cxnSp>
+      <p:cxnSp>
+        <p:nvCxnSpPr>
+          <p:cNvPr id="16" name="直線コネクタ 15">
+            <a:extLst>
+              <a:ext uri="{FF2B5EF4-FFF2-40B4-BE49-F238E27FC236}">
+                <a16:creationId xmlns:a16="http://schemas.microsoft.com/office/drawing/2014/main" id="{516EF212-E331-9EAF-2249-19282EE959D5}"/>
+              </a:ext>
+            </a:extLst>
+          </p:cNvPr>
+          <p:cNvCxnSpPr>
+            <a:cxnSpLocks/>
+          </p:cNvCxnSpPr>
+          <p:nvPr/>
+        </p:nvCxnSpPr>
+        <p:spPr>
+          <a:xfrm>
+            <a:off x="2962412" y="1666469"/>
+            <a:ext cx="3600" cy="576000"/>
+          </a:xfrm>
+          <a:prstGeom prst="line">
+            <a:avLst/>
+          </a:prstGeom>
+          <a:ln w="25400">
+            <a:solidFill>
+              <a:schemeClr val="tx1"/>
+            </a:solidFill>
+          </a:ln>
+        </p:spPr>
+        <p:style>
+          <a:lnRef idx="1">
+            <a:schemeClr val="accent1"/>
+          </a:lnRef>
+          <a:fillRef idx="0">
+            <a:schemeClr val="accent1"/>
+          </a:fillRef>
+          <a:effectRef idx="0">
+            <a:schemeClr val="accent1"/>
+          </a:effectRef>
+          <a:fontRef idx="minor">
+            <a:schemeClr val="tx1"/>
+          </a:fontRef>
+        </p:style>
+      </p:cxnSp>
+      <p:sp>
+        <p:nvSpPr>
+          <p:cNvPr id="4" name="正方形/長方形 3">
+            <a:extLst>
+              <a:ext uri="{FF2B5EF4-FFF2-40B4-BE49-F238E27FC236}">
+                <a16:creationId xmlns:a16="http://schemas.microsoft.com/office/drawing/2014/main" id="{65346850-983F-4DBC-98B7-7C1DF811018F}"/>
+              </a:ext>
+            </a:extLst>
+          </p:cNvPr>
+          <p:cNvSpPr/>
+          <p:nvPr/>
+        </p:nvSpPr>
+        <p:spPr>
+          <a:xfrm>
+            <a:off x="2715505" y="2971945"/>
+            <a:ext cx="503633" cy="420627"/>
+          </a:xfrm>
+          <a:prstGeom prst="rect">
+            <a:avLst/>
+          </a:prstGeom>
+          <a:noFill/>
+          <a:ln w="38100">
+            <a:solidFill>
+              <a:schemeClr val="bg2"/>
+            </a:solidFill>
+          </a:ln>
+        </p:spPr>
+        <p:style>
+          <a:lnRef idx="2">
+            <a:schemeClr val="accent1">
+              <a:shade val="15000"/>
+            </a:schemeClr>
+          </a:lnRef>
+          <a:fillRef idx="1">
+            <a:schemeClr val="accent1"/>
+          </a:fillRef>
+          <a:effectRef idx="0">
+            <a:schemeClr val="accent1"/>
+          </a:effectRef>
+          <a:fontRef idx="minor">
+            <a:schemeClr val="lt1"/>
+          </a:fontRef>
+        </p:style>
+        <p:txBody>
+          <a:bodyPr rtlCol="0" anchor="ctr"/>
+          <a:lstStyle/>
+          <a:p>
+            <a:pPr algn="ctr"/>
+            <a:endParaRPr kumimoji="1" lang="ja-JP" altLang="en-US">
+              <a:solidFill>
+                <a:schemeClr val="tx1"/>
+              </a:solidFill>
+            </a:endParaRPr>
+          </a:p>
+        </p:txBody>
+      </p:sp>
+      <p:sp>
+        <p:nvSpPr>
+          <p:cNvPr id="25" name="テキスト ボックス 24">
+            <a:extLst>
+              <a:ext uri="{FF2B5EF4-FFF2-40B4-BE49-F238E27FC236}">
+                <a16:creationId xmlns:a16="http://schemas.microsoft.com/office/drawing/2014/main" id="{C5E1FD91-46AE-A1C8-97AC-801A191EC392}"/>
+              </a:ext>
+            </a:extLst>
+          </p:cNvPr>
+          <p:cNvSpPr txBox="1"/>
+          <p:nvPr/>
+        </p:nvSpPr>
+        <p:spPr>
+          <a:xfrm>
+            <a:off x="1331625" y="2984998"/>
+            <a:ext cx="1338828" cy="369332"/>
+          </a:xfrm>
+          <a:prstGeom prst="rect">
+            <a:avLst/>
+          </a:prstGeom>
+          <a:noFill/>
+        </p:spPr>
+        <p:txBody>
+          <a:bodyPr wrap="none" rtlCol="0">
+            <a:spAutoFit/>
+          </a:bodyPr>
+          <a:lstStyle/>
+          <a:p>
+            <a:r>
+              <a:rPr kumimoji="1" lang="ja-JP" altLang="en-US">
+                <a:solidFill>
+                  <a:schemeClr val="bg2"/>
+                </a:solidFill>
+              </a:rPr>
+              <a:t>ここにいる</a:t>
+            </a:r>
+          </a:p>
+        </p:txBody>
+      </p:sp>
+      <p:cxnSp>
+        <p:nvCxnSpPr>
+          <p:cNvPr id="2" name="直線コネクタ 1">
+            <a:extLst>
+              <a:ext uri="{FF2B5EF4-FFF2-40B4-BE49-F238E27FC236}">
+                <a16:creationId xmlns:a16="http://schemas.microsoft.com/office/drawing/2014/main" id="{64160243-0C2F-483B-BED1-936585E50EE8}"/>
+              </a:ext>
+            </a:extLst>
+          </p:cNvPr>
+          <p:cNvCxnSpPr>
+            <a:cxnSpLocks/>
+          </p:cNvCxnSpPr>
+          <p:nvPr/>
+        </p:nvCxnSpPr>
+        <p:spPr>
+          <a:xfrm>
+            <a:off x="5082332" y="1958117"/>
+            <a:ext cx="3600" cy="251999"/>
+          </a:xfrm>
+          <a:prstGeom prst="line">
+            <a:avLst/>
+          </a:prstGeom>
+          <a:ln w="25400">
+            <a:solidFill>
+              <a:schemeClr val="tx1"/>
+            </a:solidFill>
+          </a:ln>
+        </p:spPr>
+        <p:style>
+          <a:lnRef idx="1">
+            <a:schemeClr val="accent1"/>
+          </a:lnRef>
+          <a:fillRef idx="0">
+            <a:schemeClr val="accent1"/>
+          </a:fillRef>
+          <a:effectRef idx="0">
+            <a:schemeClr val="accent1"/>
+          </a:effectRef>
+          <a:fontRef idx="minor">
+            <a:schemeClr val="tx1"/>
+          </a:fontRef>
+        </p:style>
+      </p:cxnSp>
+      <p:cxnSp>
+        <p:nvCxnSpPr>
+          <p:cNvPr id="22" name="直線コネクタ 21">
+            <a:extLst>
+              <a:ext uri="{FF2B5EF4-FFF2-40B4-BE49-F238E27FC236}">
+                <a16:creationId xmlns:a16="http://schemas.microsoft.com/office/drawing/2014/main" id="{02D5C7F5-B87C-21D0-D62B-DF9C7BAA713B}"/>
+              </a:ext>
+            </a:extLst>
+          </p:cNvPr>
+          <p:cNvCxnSpPr>
+            <a:cxnSpLocks/>
+          </p:cNvCxnSpPr>
+          <p:nvPr/>
+        </p:nvCxnSpPr>
+        <p:spPr>
+          <a:xfrm flipV="1">
+            <a:off x="2955101" y="1954469"/>
+            <a:ext cx="2124000" cy="0"/>
+          </a:xfrm>
+          <a:prstGeom prst="line">
+            <a:avLst/>
+          </a:prstGeom>
+          <a:ln w="25400">
+            <a:solidFill>
+              <a:schemeClr val="tx1"/>
+            </a:solidFill>
+          </a:ln>
+        </p:spPr>
+        <p:style>
+          <a:lnRef idx="1">
+            <a:schemeClr val="accent1"/>
+          </a:lnRef>
+          <a:fillRef idx="0">
+            <a:schemeClr val="accent1"/>
+          </a:fillRef>
+          <a:effectRef idx="0">
+            <a:schemeClr val="accent1"/>
+          </a:effectRef>
+          <a:fontRef idx="minor">
+            <a:schemeClr val="tx1"/>
+          </a:fontRef>
+        </p:style>
+      </p:cxnSp>
+      <p:pic>
+        <p:nvPicPr>
+          <p:cNvPr id="28" name="図 27">
+            <a:extLst>
+              <a:ext uri="{FF2B5EF4-FFF2-40B4-BE49-F238E27FC236}">
+                <a16:creationId xmlns:a16="http://schemas.microsoft.com/office/drawing/2014/main" id="{02C52F02-6218-DA3E-1D42-17163F897FA5}"/>
+              </a:ext>
+            </a:extLst>
+          </p:cNvPr>
+          <p:cNvPicPr>
+            <a:picLocks noChangeAspect="1"/>
+          </p:cNvPicPr>
+          <p:nvPr/>
+        </p:nvPicPr>
+        <p:blipFill>
+          <a:blip r:embed="rId2"/>
+          <a:stretch>
+            <a:fillRect/>
+          </a:stretch>
+        </p:blipFill>
+        <p:spPr>
+          <a:xfrm>
+            <a:off x="4882478" y="2116403"/>
+            <a:ext cx="457200" cy="457200"/>
+          </a:xfrm>
+          <a:prstGeom prst="rect">
+            <a:avLst/>
+          </a:prstGeom>
+        </p:spPr>
+      </p:pic>
+      <p:sp>
+        <p:nvSpPr>
+          <p:cNvPr id="30" name="テキスト ボックス 29">
+            <a:extLst>
+              <a:ext uri="{FF2B5EF4-FFF2-40B4-BE49-F238E27FC236}">
+                <a16:creationId xmlns:a16="http://schemas.microsoft.com/office/drawing/2014/main" id="{BCA34AD6-6AD4-4DC0-48DF-5C2014A7B374}"/>
+              </a:ext>
+            </a:extLst>
+          </p:cNvPr>
+          <p:cNvSpPr txBox="1"/>
+          <p:nvPr/>
+        </p:nvSpPr>
+        <p:spPr>
+          <a:xfrm>
+            <a:off x="3187752" y="2027230"/>
+            <a:ext cx="1545578" cy="646331"/>
+          </a:xfrm>
+          <a:prstGeom prst="rect">
+            <a:avLst/>
+          </a:prstGeom>
+          <a:noFill/>
+        </p:spPr>
+        <p:txBody>
+          <a:bodyPr wrap="square">
+            <a:spAutoFit/>
+          </a:bodyPr>
+          <a:lstStyle/>
+          <a:p>
+            <a:r>
+              <a:rPr kumimoji="1" lang="en-US" altLang="ja-JP" dirty="0"/>
+              <a:t>home</a:t>
+            </a:r>
+          </a:p>
+          <a:p>
+            <a:r>
+              <a:rPr kumimoji="1" lang="ja-JP" altLang="en-US"/>
+              <a:t>または</a:t>
+            </a:r>
+            <a:r>
+              <a:rPr kumimoji="1" lang="en-US" altLang="ja-JP" dirty="0"/>
+              <a:t>Users</a:t>
+            </a:r>
+          </a:p>
+        </p:txBody>
+      </p:sp>
+      <p:pic>
+        <p:nvPicPr>
+          <p:cNvPr id="32" name="図 31">
+            <a:extLst>
+              <a:ext uri="{FF2B5EF4-FFF2-40B4-BE49-F238E27FC236}">
+                <a16:creationId xmlns:a16="http://schemas.microsoft.com/office/drawing/2014/main" id="{BFC1F0CD-5BD9-BF3E-CB59-C218B7C24986}"/>
+              </a:ext>
+            </a:extLst>
+          </p:cNvPr>
+          <p:cNvPicPr>
+            <a:picLocks noChangeAspect="1"/>
+          </p:cNvPicPr>
+          <p:nvPr/>
+        </p:nvPicPr>
+        <p:blipFill>
+          <a:blip r:embed="rId3"/>
+          <a:stretch>
+            <a:fillRect/>
+          </a:stretch>
+        </p:blipFill>
+        <p:spPr>
+          <a:xfrm>
+            <a:off x="4894607" y="2907306"/>
+            <a:ext cx="457200" cy="457200"/>
+          </a:xfrm>
+          <a:prstGeom prst="rect">
+            <a:avLst/>
+          </a:prstGeom>
+        </p:spPr>
+      </p:pic>
+      <p:cxnSp>
+        <p:nvCxnSpPr>
+          <p:cNvPr id="33" name="直線コネクタ 32">
+            <a:extLst>
+              <a:ext uri="{FF2B5EF4-FFF2-40B4-BE49-F238E27FC236}">
+                <a16:creationId xmlns:a16="http://schemas.microsoft.com/office/drawing/2014/main" id="{7AD906A8-C2D6-0A1D-E8BC-14EFDDBEB8F3}"/>
+              </a:ext>
+            </a:extLst>
+          </p:cNvPr>
+          <p:cNvCxnSpPr>
+            <a:cxnSpLocks/>
+          </p:cNvCxnSpPr>
+          <p:nvPr/>
+        </p:nvCxnSpPr>
+        <p:spPr>
+          <a:xfrm>
+            <a:off x="5108983" y="2472021"/>
+            <a:ext cx="3600" cy="503999"/>
+          </a:xfrm>
+          <a:prstGeom prst="line">
+            <a:avLst/>
+          </a:prstGeom>
+          <a:ln w="25400">
+            <a:solidFill>
+              <a:schemeClr val="tx1"/>
+            </a:solidFill>
+          </a:ln>
+        </p:spPr>
+        <p:style>
+          <a:lnRef idx="1">
+            <a:schemeClr val="accent1"/>
+          </a:lnRef>
+          <a:fillRef idx="0">
+            <a:schemeClr val="accent1"/>
+          </a:fillRef>
+          <a:effectRef idx="0">
+            <a:schemeClr val="accent1"/>
+          </a:effectRef>
+          <a:fontRef idx="minor">
+            <a:schemeClr val="tx1"/>
+          </a:fontRef>
+        </p:style>
+      </p:cxnSp>
+      <p:cxnSp>
+        <p:nvCxnSpPr>
+          <p:cNvPr id="34" name="直線コネクタ 33">
+            <a:extLst>
+              <a:ext uri="{FF2B5EF4-FFF2-40B4-BE49-F238E27FC236}">
+                <a16:creationId xmlns:a16="http://schemas.microsoft.com/office/drawing/2014/main" id="{29CEB435-374C-7662-6BCE-2838FCC0AA26}"/>
+              </a:ext>
+            </a:extLst>
+          </p:cNvPr>
+          <p:cNvCxnSpPr>
+            <a:cxnSpLocks/>
+          </p:cNvCxnSpPr>
+          <p:nvPr/>
+        </p:nvCxnSpPr>
+        <p:spPr>
+          <a:xfrm>
+            <a:off x="5108983" y="2737175"/>
+            <a:ext cx="1478813" cy="0"/>
+          </a:xfrm>
+          <a:prstGeom prst="line">
+            <a:avLst/>
+          </a:prstGeom>
+          <a:ln w="25400">
+            <a:solidFill>
+              <a:schemeClr val="tx1"/>
+            </a:solidFill>
+          </a:ln>
+        </p:spPr>
+        <p:style>
+          <a:lnRef idx="1">
+            <a:schemeClr val="accent1"/>
+          </a:lnRef>
+          <a:fillRef idx="0">
+            <a:schemeClr val="accent1"/>
+          </a:fillRef>
+          <a:effectRef idx="0">
+            <a:schemeClr val="accent1"/>
+          </a:effectRef>
+          <a:fontRef idx="minor">
+            <a:schemeClr val="tx1"/>
+          </a:fontRef>
+        </p:style>
+      </p:cxnSp>
+      <p:pic>
+        <p:nvPicPr>
+          <p:cNvPr id="35" name="図 34">
+            <a:extLst>
+              <a:ext uri="{FF2B5EF4-FFF2-40B4-BE49-F238E27FC236}">
+                <a16:creationId xmlns:a16="http://schemas.microsoft.com/office/drawing/2014/main" id="{98421023-E8A6-0A81-BFDA-178C6A428F41}"/>
+              </a:ext>
+            </a:extLst>
+          </p:cNvPr>
+          <p:cNvPicPr>
+            <a:picLocks noChangeAspect="1"/>
+          </p:cNvPicPr>
+          <p:nvPr/>
+        </p:nvPicPr>
+        <p:blipFill>
+          <a:blip r:embed="rId3"/>
+          <a:stretch>
+            <a:fillRect/>
+          </a:stretch>
+        </p:blipFill>
+        <p:spPr>
+          <a:xfrm>
+            <a:off x="6009652" y="2900748"/>
+            <a:ext cx="457200" cy="457200"/>
+          </a:xfrm>
+          <a:prstGeom prst="rect">
+            <a:avLst/>
+          </a:prstGeom>
+        </p:spPr>
+      </p:pic>
+      <p:sp>
+        <p:nvSpPr>
+          <p:cNvPr id="36" name="テキスト ボックス 35">
+            <a:extLst>
+              <a:ext uri="{FF2B5EF4-FFF2-40B4-BE49-F238E27FC236}">
+                <a16:creationId xmlns:a16="http://schemas.microsoft.com/office/drawing/2014/main" id="{66AFE3DE-75E9-3FA2-0366-16C470EA8F1D}"/>
+              </a:ext>
+            </a:extLst>
+          </p:cNvPr>
+          <p:cNvSpPr txBox="1"/>
+          <p:nvPr/>
+        </p:nvSpPr>
+        <p:spPr>
+          <a:xfrm>
+            <a:off x="5292669" y="2160337"/>
+            <a:ext cx="1577676" cy="1200329"/>
+          </a:xfrm>
+          <a:prstGeom prst="rect">
+            <a:avLst/>
+          </a:prstGeom>
+          <a:noFill/>
+        </p:spPr>
+        <p:txBody>
+          <a:bodyPr wrap="none" rtlCol="0">
+            <a:spAutoFit/>
+          </a:bodyPr>
+          <a:lstStyle/>
+          <a:p>
+            <a:r>
+              <a:rPr kumimoji="1" lang="en-US" altLang="ja-JP" dirty="0"/>
+              <a:t>bin</a:t>
+            </a:r>
+          </a:p>
+          <a:p>
+            <a:endParaRPr kumimoji="1" lang="en-US" altLang="ja-JP" dirty="0"/>
+          </a:p>
+          <a:p>
+            <a:endParaRPr kumimoji="1" lang="en-US" altLang="ja-JP" dirty="0"/>
+          </a:p>
+          <a:p>
+            <a:r>
+              <a:rPr kumimoji="1" lang="en-US" altLang="ja-JP" dirty="0"/>
+              <a:t>cp       ls</a:t>
+            </a:r>
+            <a:endParaRPr kumimoji="1" lang="ja-JP" altLang="en-US"/>
+          </a:p>
+        </p:txBody>
+      </p:sp>
+      <p:cxnSp>
+        <p:nvCxnSpPr>
+          <p:cNvPr id="37" name="直線コネクタ 36">
+            <a:extLst>
+              <a:ext uri="{FF2B5EF4-FFF2-40B4-BE49-F238E27FC236}">
+                <a16:creationId xmlns:a16="http://schemas.microsoft.com/office/drawing/2014/main" id="{E15E962A-10A3-D6B0-CEF0-508D4AF93E39}"/>
+              </a:ext>
+            </a:extLst>
+          </p:cNvPr>
+          <p:cNvCxnSpPr>
+            <a:cxnSpLocks/>
+          </p:cNvCxnSpPr>
+          <p:nvPr/>
+        </p:nvCxnSpPr>
+        <p:spPr>
+          <a:xfrm>
+            <a:off x="6229142" y="2716307"/>
+            <a:ext cx="3600" cy="251999"/>
+          </a:xfrm>
+          <a:prstGeom prst="line">
+            <a:avLst/>
+          </a:prstGeom>
+          <a:ln w="25400">
+            <a:solidFill>
+              <a:schemeClr val="tx1"/>
+            </a:solidFill>
+          </a:ln>
+        </p:spPr>
+        <p:style>
+          <a:lnRef idx="1">
+            <a:schemeClr val="accent1"/>
+          </a:lnRef>
+          <a:fillRef idx="0">
+            <a:schemeClr val="accent1"/>
+          </a:fillRef>
+          <a:effectRef idx="0">
+            <a:schemeClr val="accent1"/>
+          </a:effectRef>
+          <a:fontRef idx="minor">
+            <a:schemeClr val="tx1"/>
+          </a:fontRef>
+        </p:style>
+      </p:cxnSp>
+      <p:cxnSp>
+        <p:nvCxnSpPr>
+          <p:cNvPr id="39" name="直線コネクタ 38">
+            <a:extLst>
+              <a:ext uri="{FF2B5EF4-FFF2-40B4-BE49-F238E27FC236}">
+                <a16:creationId xmlns:a16="http://schemas.microsoft.com/office/drawing/2014/main" id="{19FD6C61-60D9-B6F4-4CDD-72BBE64D03CB}"/>
+              </a:ext>
+            </a:extLst>
+          </p:cNvPr>
+          <p:cNvCxnSpPr>
+            <a:cxnSpLocks/>
+          </p:cNvCxnSpPr>
+          <p:nvPr/>
+        </p:nvCxnSpPr>
+        <p:spPr>
+          <a:xfrm>
+            <a:off x="2855737" y="2500204"/>
+            <a:ext cx="3600" cy="503999"/>
+          </a:xfrm>
+          <a:prstGeom prst="line">
+            <a:avLst/>
+          </a:prstGeom>
+          <a:ln w="25400">
+            <a:solidFill>
+              <a:schemeClr val="bg2"/>
+            </a:solidFill>
+            <a:headEnd type="triangle" w="lg" len="lg"/>
+          </a:ln>
+        </p:spPr>
+        <p:style>
+          <a:lnRef idx="1">
+            <a:schemeClr val="accent1"/>
+          </a:lnRef>
+          <a:fillRef idx="0">
+            <a:schemeClr val="accent1"/>
+          </a:fillRef>
+          <a:effectRef idx="0">
+            <a:schemeClr val="accent1"/>
+          </a:effectRef>
+          <a:fontRef idx="minor">
+            <a:schemeClr val="tx1"/>
+          </a:fontRef>
+        </p:style>
+      </p:cxnSp>
+      <p:sp>
+        <p:nvSpPr>
+          <p:cNvPr id="41" name="正方形/長方形 40">
+            <a:extLst>
+              <a:ext uri="{FF2B5EF4-FFF2-40B4-BE49-F238E27FC236}">
+                <a16:creationId xmlns:a16="http://schemas.microsoft.com/office/drawing/2014/main" id="{9512D8ED-EA21-BBBF-E9A2-2F7DB41500F8}"/>
+              </a:ext>
+            </a:extLst>
+          </p:cNvPr>
+          <p:cNvSpPr/>
+          <p:nvPr/>
+        </p:nvSpPr>
+        <p:spPr>
+          <a:xfrm>
+            <a:off x="4857166" y="2128005"/>
+            <a:ext cx="503633" cy="420627"/>
+          </a:xfrm>
+          <a:prstGeom prst="rect">
+            <a:avLst/>
+          </a:prstGeom>
+          <a:noFill/>
+          <a:ln w="38100">
+            <a:solidFill>
+              <a:schemeClr val="bg2"/>
+            </a:solidFill>
+          </a:ln>
+        </p:spPr>
+        <p:style>
+          <a:lnRef idx="2">
+            <a:schemeClr val="accent1">
+              <a:shade val="15000"/>
+            </a:schemeClr>
+          </a:lnRef>
+          <a:fillRef idx="1">
+            <a:schemeClr val="accent1"/>
+          </a:fillRef>
+          <a:effectRef idx="0">
+            <a:schemeClr val="accent1"/>
+          </a:effectRef>
+          <a:fontRef idx="minor">
+            <a:schemeClr val="lt1"/>
+          </a:fontRef>
+        </p:style>
+        <p:txBody>
+          <a:bodyPr rtlCol="0" anchor="ctr"/>
+          <a:lstStyle/>
+          <a:p>
+            <a:pPr algn="ctr"/>
+            <a:endParaRPr kumimoji="1" lang="ja-JP" altLang="en-US">
+              <a:solidFill>
+                <a:schemeClr val="tx1"/>
+              </a:solidFill>
+            </a:endParaRPr>
+          </a:p>
+        </p:txBody>
+      </p:sp>
+      <p:sp>
+        <p:nvSpPr>
+          <p:cNvPr id="42" name="テキスト ボックス 41">
+            <a:extLst>
+              <a:ext uri="{FF2B5EF4-FFF2-40B4-BE49-F238E27FC236}">
+                <a16:creationId xmlns:a16="http://schemas.microsoft.com/office/drawing/2014/main" id="{2F5621A2-57D2-29FB-627F-40F7F6D02FA3}"/>
+              </a:ext>
+            </a:extLst>
+          </p:cNvPr>
+          <p:cNvSpPr txBox="1"/>
+          <p:nvPr/>
+        </p:nvSpPr>
+        <p:spPr>
+          <a:xfrm>
+            <a:off x="5770990" y="2038967"/>
+            <a:ext cx="2374368" cy="646331"/>
+          </a:xfrm>
+          <a:prstGeom prst="rect">
+            <a:avLst/>
+          </a:prstGeom>
+          <a:noFill/>
+        </p:spPr>
+        <p:txBody>
+          <a:bodyPr wrap="none" rtlCol="0">
+            <a:spAutoFit/>
+          </a:bodyPr>
+          <a:lstStyle/>
+          <a:p>
+            <a:r>
+              <a:rPr kumimoji="1" lang="ja-JP" altLang="en-US">
+                <a:solidFill>
+                  <a:schemeClr val="bg2"/>
+                </a:solidFill>
+              </a:rPr>
+              <a:t>絶対パス </a:t>
+            </a:r>
+            <a:r>
+              <a:rPr kumimoji="1" lang="en-US" altLang="ja-JP" dirty="0">
+                <a:solidFill>
+                  <a:schemeClr val="bg2"/>
+                </a:solidFill>
+              </a:rPr>
+              <a:t>/bin</a:t>
+            </a:r>
+          </a:p>
+          <a:p>
+            <a:r>
+              <a:rPr kumimoji="1" lang="ja-JP" altLang="en-US">
+                <a:solidFill>
+                  <a:schemeClr val="bg2"/>
+                </a:solidFill>
+              </a:rPr>
+              <a:t>相対パス</a:t>
+            </a:r>
+            <a:r>
+              <a:rPr kumimoji="1" lang="en-US" altLang="ja-JP" dirty="0">
+                <a:solidFill>
+                  <a:schemeClr val="bg2"/>
+                </a:solidFill>
+              </a:rPr>
+              <a:t> ../../bin</a:t>
+            </a:r>
+            <a:endParaRPr kumimoji="1" lang="ja-JP" altLang="en-US">
+              <a:solidFill>
+                <a:schemeClr val="bg2"/>
+              </a:solidFill>
+            </a:endParaRPr>
+          </a:p>
+        </p:txBody>
+      </p:sp>
+      <p:cxnSp>
+        <p:nvCxnSpPr>
+          <p:cNvPr id="43" name="直線コネクタ 42">
+            <a:extLst>
+              <a:ext uri="{FF2B5EF4-FFF2-40B4-BE49-F238E27FC236}">
+                <a16:creationId xmlns:a16="http://schemas.microsoft.com/office/drawing/2014/main" id="{3C583352-D914-8838-B060-E0E16DAD7D3B}"/>
+              </a:ext>
+            </a:extLst>
+          </p:cNvPr>
+          <p:cNvCxnSpPr>
+            <a:cxnSpLocks/>
+          </p:cNvCxnSpPr>
+          <p:nvPr/>
+        </p:nvCxnSpPr>
+        <p:spPr>
+          <a:xfrm>
+            <a:off x="2836591" y="1675240"/>
+            <a:ext cx="3600" cy="503999"/>
+          </a:xfrm>
+          <a:prstGeom prst="line">
+            <a:avLst/>
+          </a:prstGeom>
+          <a:ln w="25400">
+            <a:solidFill>
+              <a:schemeClr val="bg2"/>
+            </a:solidFill>
+            <a:headEnd type="triangle" w="lg" len="lg"/>
+          </a:ln>
+        </p:spPr>
+        <p:style>
+          <a:lnRef idx="1">
+            <a:schemeClr val="accent1"/>
+          </a:lnRef>
+          <a:fillRef idx="0">
+            <a:schemeClr val="accent1"/>
+          </a:fillRef>
+          <a:effectRef idx="0">
+            <a:schemeClr val="accent1"/>
+          </a:effectRef>
+          <a:fontRef idx="minor">
+            <a:schemeClr val="tx1"/>
+          </a:fontRef>
+        </p:style>
+      </p:cxnSp>
+      <p:cxnSp>
+        <p:nvCxnSpPr>
+          <p:cNvPr id="44" name="直線コネクタ 43">
+            <a:extLst>
+              <a:ext uri="{FF2B5EF4-FFF2-40B4-BE49-F238E27FC236}">
+                <a16:creationId xmlns:a16="http://schemas.microsoft.com/office/drawing/2014/main" id="{A01FA107-865F-5CA4-5783-0911C3623016}"/>
+              </a:ext>
+            </a:extLst>
+          </p:cNvPr>
+          <p:cNvCxnSpPr>
+            <a:cxnSpLocks/>
+          </p:cNvCxnSpPr>
+          <p:nvPr/>
+        </p:nvCxnSpPr>
+        <p:spPr>
+          <a:xfrm flipH="1" flipV="1">
+            <a:off x="4980881" y="1840771"/>
+            <a:ext cx="3048" cy="247886"/>
+          </a:xfrm>
+          <a:prstGeom prst="line">
+            <a:avLst/>
+          </a:prstGeom>
+          <a:ln w="25400">
+            <a:solidFill>
+              <a:schemeClr val="bg2"/>
+            </a:solidFill>
+            <a:headEnd type="triangle" w="lg" len="lg"/>
+          </a:ln>
+        </p:spPr>
+        <p:style>
+          <a:lnRef idx="1">
+            <a:schemeClr val="accent1"/>
+          </a:lnRef>
+          <a:fillRef idx="0">
+            <a:schemeClr val="accent1"/>
+          </a:fillRef>
+          <a:effectRef idx="0">
+            <a:schemeClr val="accent1"/>
+          </a:effectRef>
+          <a:fontRef idx="minor">
+            <a:schemeClr val="tx1"/>
+          </a:fontRef>
+        </p:style>
+      </p:cxnSp>
+      <p:cxnSp>
+        <p:nvCxnSpPr>
+          <p:cNvPr id="46" name="直線コネクタ 45">
+            <a:extLst>
+              <a:ext uri="{FF2B5EF4-FFF2-40B4-BE49-F238E27FC236}">
+                <a16:creationId xmlns:a16="http://schemas.microsoft.com/office/drawing/2014/main" id="{C9B8C1B4-1C65-90A1-5EF1-FD1AC82CAFCF}"/>
+              </a:ext>
+            </a:extLst>
+          </p:cNvPr>
+          <p:cNvCxnSpPr>
+            <a:cxnSpLocks/>
+          </p:cNvCxnSpPr>
+          <p:nvPr/>
+        </p:nvCxnSpPr>
+        <p:spPr>
+          <a:xfrm>
+            <a:off x="3052842" y="1840771"/>
+            <a:ext cx="1928039" cy="0"/>
+          </a:xfrm>
+          <a:prstGeom prst="line">
+            <a:avLst/>
+          </a:prstGeom>
+          <a:ln w="25400">
+            <a:solidFill>
+              <a:schemeClr val="accent1"/>
+            </a:solidFill>
+          </a:ln>
+        </p:spPr>
+        <p:style>
+          <a:lnRef idx="1">
+            <a:schemeClr val="accent1"/>
+          </a:lnRef>
+          <a:fillRef idx="0">
+            <a:schemeClr val="accent1"/>
+          </a:fillRef>
+          <a:effectRef idx="0">
+            <a:schemeClr val="accent1"/>
+          </a:effectRef>
+          <a:fontRef idx="minor">
+            <a:schemeClr val="tx1"/>
+          </a:fontRef>
+        </p:style>
+      </p:cxnSp>
+      <p:cxnSp>
+        <p:nvCxnSpPr>
+          <p:cNvPr id="48" name="直線コネクタ 47">
+            <a:extLst>
+              <a:ext uri="{FF2B5EF4-FFF2-40B4-BE49-F238E27FC236}">
+                <a16:creationId xmlns:a16="http://schemas.microsoft.com/office/drawing/2014/main" id="{ED6E915A-8696-AE5A-945A-794F8199AE8F}"/>
+              </a:ext>
+            </a:extLst>
+          </p:cNvPr>
+          <p:cNvCxnSpPr>
+            <a:cxnSpLocks/>
+          </p:cNvCxnSpPr>
+          <p:nvPr/>
+        </p:nvCxnSpPr>
+        <p:spPr>
+          <a:xfrm flipV="1">
+            <a:off x="3052842" y="1677199"/>
+            <a:ext cx="0" cy="163572"/>
+          </a:xfrm>
+          <a:prstGeom prst="line">
+            <a:avLst/>
+          </a:prstGeom>
+          <a:ln w="25400">
+            <a:solidFill>
+              <a:schemeClr val="accent1"/>
+            </a:solidFill>
+          </a:ln>
+        </p:spPr>
+        <p:style>
+          <a:lnRef idx="1">
+            <a:schemeClr val="accent1"/>
+          </a:lnRef>
+          <a:fillRef idx="0">
+            <a:schemeClr val="accent1"/>
+          </a:fillRef>
+          <a:effectRef idx="0">
+            <a:schemeClr val="accent1"/>
+          </a:effectRef>
+          <a:fontRef idx="minor">
+            <a:schemeClr val="tx1"/>
+          </a:fontRef>
+        </p:style>
+      </p:cxnSp>
+    </p:spTree>
+    <p:extLst>
+      <p:ext uri="{BB962C8B-B14F-4D97-AF65-F5344CB8AC3E}">
+        <p14:creationId xmlns:p14="http://schemas.microsoft.com/office/powerpoint/2010/main" val="2243243882"/>
       </p:ext>
     </p:extLst>
   </p:cSld>
@@ -7339,7 +8490,7 @@
         </p:nvGrpSpPr>
         <p:grpSpPr>
           <a:xfrm>
-            <a:off x="2740672" y="1286047"/>
+            <a:off x="2740672" y="1997247"/>
             <a:ext cx="3139791" cy="3738966"/>
             <a:chOff x="316448" y="512014"/>
             <a:chExt cx="3139791" cy="3738966"/>
@@ -7898,7 +9049,7 @@
         </p:nvSpPr>
         <p:spPr>
           <a:xfrm>
-            <a:off x="6094839" y="1307586"/>
+            <a:off x="6094839" y="2018786"/>
             <a:ext cx="2337499" cy="3693319"/>
           </a:xfrm>
           <a:prstGeom prst="rect">
@@ -7986,7 +9137,7 @@
         </p:nvSpPr>
         <p:spPr>
           <a:xfrm>
-            <a:off x="1652489" y="3804332"/>
+            <a:off x="1652489" y="4515532"/>
             <a:ext cx="1071127" cy="369332"/>
           </a:xfrm>
           <a:prstGeom prst="rect">
@@ -8023,7 +9174,7 @@
         </p:nvSpPr>
         <p:spPr>
           <a:xfrm>
-            <a:off x="2715505" y="2971945"/>
+            <a:off x="2715505" y="3683145"/>
             <a:ext cx="503633" cy="420627"/>
           </a:xfrm>
           <a:prstGeom prst="rect">
@@ -8079,7 +9230,7 @@
         </p:nvSpPr>
         <p:spPr>
           <a:xfrm>
-            <a:off x="6094838" y="4587277"/>
+            <a:off x="6094838" y="5298477"/>
             <a:ext cx="2337499" cy="380422"/>
           </a:xfrm>
           <a:prstGeom prst="rect">
@@ -8135,7 +9286,7 @@
         </p:nvSpPr>
         <p:spPr>
           <a:xfrm>
-            <a:off x="6073210" y="3770122"/>
+            <a:off x="6073210" y="4481322"/>
             <a:ext cx="2337499" cy="380422"/>
           </a:xfrm>
           <a:prstGeom prst="rect">
@@ -8191,7 +9342,7 @@
         </p:nvSpPr>
         <p:spPr>
           <a:xfrm>
-            <a:off x="6093324" y="2952967"/>
+            <a:off x="6093324" y="3664167"/>
             <a:ext cx="2337499" cy="380422"/>
           </a:xfrm>
           <a:prstGeom prst="rect">
@@ -8247,7 +9398,7 @@
         </p:nvSpPr>
         <p:spPr>
           <a:xfrm>
-            <a:off x="6061954" y="2135812"/>
+            <a:off x="6061954" y="2847012"/>
             <a:ext cx="2337499" cy="380422"/>
           </a:xfrm>
           <a:prstGeom prst="rect">
@@ -8303,7 +9454,7 @@
         </p:nvSpPr>
         <p:spPr>
           <a:xfrm>
-            <a:off x="6061953" y="1318657"/>
+            <a:off x="6061953" y="2029857"/>
             <a:ext cx="2337499" cy="380422"/>
           </a:xfrm>
           <a:prstGeom prst="rect">
@@ -8359,7 +9510,7 @@
         </p:nvSpPr>
         <p:spPr>
           <a:xfrm>
-            <a:off x="1609546" y="3798787"/>
+            <a:off x="1609546" y="4509987"/>
             <a:ext cx="1105959" cy="380422"/>
           </a:xfrm>
           <a:prstGeom prst="rect">
@@ -8415,7 +9566,7 @@
         </p:nvSpPr>
         <p:spPr>
           <a:xfrm>
-            <a:off x="1331625" y="2984998"/>
+            <a:off x="1331625" y="3696198"/>
             <a:ext cx="1338828" cy="369332"/>
           </a:xfrm>
           <a:prstGeom prst="rect">
@@ -8494,6 +9645,57 @@
             <a:r>
               <a:rPr kumimoji="1" lang="ja-JP" altLang="en-US"/>
               <a:t>」ではない。現在いる場所によって変わる</a:t>
+            </a:r>
+          </a:p>
+        </p:txBody>
+      </p:sp>
+      <p:sp>
+        <p:nvSpPr>
+          <p:cNvPr id="27" name="テキスト ボックス 26">
+            <a:extLst>
+              <a:ext uri="{FF2B5EF4-FFF2-40B4-BE49-F238E27FC236}">
+                <a16:creationId xmlns:a16="http://schemas.microsoft.com/office/drawing/2014/main" id="{D7234F56-B5C5-D76B-7231-894F8AAD6DC2}"/>
+              </a:ext>
+            </a:extLst>
+          </p:cNvPr>
+          <p:cNvSpPr txBox="1"/>
+          <p:nvPr/>
+        </p:nvSpPr>
+        <p:spPr>
+          <a:xfrm>
+            <a:off x="2977961" y="1387553"/>
+            <a:ext cx="4488729" cy="369332"/>
+          </a:xfrm>
+          <a:prstGeom prst="rect">
+            <a:avLst/>
+          </a:prstGeom>
+          <a:noFill/>
+        </p:spPr>
+        <p:txBody>
+          <a:bodyPr wrap="none" rtlCol="0">
+            <a:spAutoFit/>
+          </a:bodyPr>
+          <a:lstStyle/>
+          <a:p>
+            <a:r>
+              <a:rPr kumimoji="1" lang="ja-JP" altLang="en-US"/>
+              <a:t>「</a:t>
+            </a:r>
+            <a:r>
+              <a:rPr kumimoji="1" lang="en-US" altLang="ja-JP" dirty="0"/>
+              <a:t>.</a:t>
+            </a:r>
+            <a:r>
+              <a:rPr kumimoji="1" lang="ja-JP" altLang="en-US"/>
+              <a:t>」現在いる場所、「</a:t>
+            </a:r>
+            <a:r>
+              <a:rPr kumimoji="1" lang="en-US" altLang="ja-JP" dirty="0"/>
+              <a:t>..</a:t>
+            </a:r>
+            <a:r>
+              <a:rPr kumimoji="1" lang="ja-JP" altLang="en-US"/>
+              <a:t>」一つ上を表す</a:t>
             </a:r>
           </a:p>
         </p:txBody>
@@ -9478,7 +10680,7 @@
         </p:nvGrpSpPr>
         <p:grpSpPr>
           <a:xfrm>
-            <a:off x="2123983" y="786316"/>
+            <a:off x="2314483" y="1853116"/>
             <a:ext cx="3139791" cy="3738966"/>
             <a:chOff x="316448" y="512014"/>
             <a:chExt cx="3139791" cy="3738966"/>
@@ -10031,7 +11233,7 @@
         </p:nvSpPr>
         <p:spPr>
           <a:xfrm>
-            <a:off x="5478150" y="807855"/>
+            <a:off x="5668650" y="1874655"/>
             <a:ext cx="2970685" cy="3693319"/>
           </a:xfrm>
           <a:prstGeom prst="rect">
@@ -10120,7 +11322,7 @@
         </p:nvSpPr>
         <p:spPr>
           <a:xfrm>
-            <a:off x="402614" y="3304601"/>
+            <a:off x="593114" y="4371401"/>
             <a:ext cx="1704313" cy="369332"/>
           </a:xfrm>
           <a:prstGeom prst="rect">
@@ -10161,7 +11363,7 @@
         </p:nvSpPr>
         <p:spPr>
           <a:xfrm>
-            <a:off x="2077550" y="1643468"/>
+            <a:off x="2293450" y="2710268"/>
             <a:ext cx="503633" cy="420627"/>
           </a:xfrm>
           <a:prstGeom prst="rect">
@@ -10217,7 +11419,7 @@
         </p:nvSpPr>
         <p:spPr>
           <a:xfrm>
-            <a:off x="5478149" y="4087546"/>
+            <a:off x="5668649" y="5154346"/>
             <a:ext cx="3059795" cy="380422"/>
           </a:xfrm>
           <a:prstGeom prst="rect">
@@ -10273,7 +11475,7 @@
         </p:nvSpPr>
         <p:spPr>
           <a:xfrm>
-            <a:off x="5478149" y="3270391"/>
+            <a:off x="5668649" y="4337191"/>
             <a:ext cx="3059795" cy="380422"/>
           </a:xfrm>
           <a:prstGeom prst="rect">
@@ -10329,7 +11531,7 @@
         </p:nvSpPr>
         <p:spPr>
           <a:xfrm>
-            <a:off x="5478149" y="2453236"/>
+            <a:off x="5668649" y="3520036"/>
             <a:ext cx="3059795" cy="380422"/>
           </a:xfrm>
           <a:prstGeom prst="rect">
@@ -10385,7 +11587,7 @@
         </p:nvSpPr>
         <p:spPr>
           <a:xfrm>
-            <a:off x="5445265" y="1612408"/>
+            <a:off x="5635765" y="2679208"/>
             <a:ext cx="3059795" cy="380422"/>
           </a:xfrm>
           <a:prstGeom prst="rect">
@@ -10441,7 +11643,7 @@
         </p:nvSpPr>
         <p:spPr>
           <a:xfrm>
-            <a:off x="5445265" y="807855"/>
+            <a:off x="5635765" y="1874655"/>
             <a:ext cx="3059795" cy="380422"/>
           </a:xfrm>
           <a:prstGeom prst="rect">
@@ -10497,7 +11699,7 @@
         </p:nvSpPr>
         <p:spPr>
           <a:xfrm>
-            <a:off x="301764" y="3315859"/>
+            <a:off x="492264" y="4382659"/>
             <a:ext cx="1822220" cy="380422"/>
           </a:xfrm>
           <a:prstGeom prst="rect">
@@ -10553,7 +11755,7 @@
         </p:nvSpPr>
         <p:spPr>
           <a:xfrm>
-            <a:off x="661673" y="1721670"/>
+            <a:off x="852173" y="2788470"/>
             <a:ext cx="1338828" cy="369332"/>
           </a:xfrm>
           <a:prstGeom prst="rect">
@@ -10580,10 +11782,10 @@
       </p:sp>
       <p:sp>
         <p:nvSpPr>
-          <p:cNvPr id="24" name="テキスト ボックス 23">
+          <p:cNvPr id="25" name="テキスト ボックス 24">
             <a:extLst>
               <a:ext uri="{FF2B5EF4-FFF2-40B4-BE49-F238E27FC236}">
-                <a16:creationId xmlns:a16="http://schemas.microsoft.com/office/drawing/2014/main" id="{04162147-B800-F602-5A64-44C98D5730B6}"/>
+                <a16:creationId xmlns:a16="http://schemas.microsoft.com/office/drawing/2014/main" id="{7DDA2303-383C-672B-B9C7-E17FD6138285}"/>
               </a:ext>
             </a:extLst>
           </p:cNvPr>
@@ -10592,8 +11794,8 @@
         </p:nvSpPr>
         <p:spPr>
           <a:xfrm>
-            <a:off x="301764" y="241559"/>
-            <a:ext cx="7252306" cy="584775"/>
+            <a:off x="937925" y="377496"/>
+            <a:ext cx="7467109" cy="861774"/>
           </a:xfrm>
           <a:prstGeom prst="rect">
             <a:avLst/>
@@ -10612,11 +11814,18 @@
             </a:r>
             <a:r>
               <a:rPr kumimoji="1" lang="en-US" altLang="ja-JP" sz="3200" b="1" dirty="0"/>
-              <a:t>: </a:t>
+              <a:t>:</a:t>
             </a:r>
             <a:r>
               <a:rPr kumimoji="1" lang="ja-JP" altLang="en-US"/>
-              <a:t>最初が「</a:t>
+              <a:t>現在いる場所から辿る。</a:t>
+            </a:r>
+            <a:endParaRPr kumimoji="1" lang="en-US" altLang="ja-JP" dirty="0"/>
+          </a:p>
+          <a:p>
+            <a:r>
+              <a:rPr kumimoji="1" lang="ja-JP" altLang="en-US"/>
+              <a:t>　　　　　　　　最初が「</a:t>
             </a:r>
             <a:r>
               <a:rPr kumimoji="1" lang="en-US" altLang="ja-JP" dirty="0"/>
@@ -10624,7 +11833,58 @@
             </a:r>
             <a:r>
               <a:rPr kumimoji="1" lang="ja-JP" altLang="en-US"/>
-              <a:t>」ではない。いる場所によって変わる</a:t>
+              <a:t>」ではない。現在いる場所によって変わる</a:t>
+            </a:r>
+          </a:p>
+        </p:txBody>
+      </p:sp>
+      <p:sp>
+        <p:nvSpPr>
+          <p:cNvPr id="26" name="テキスト ボックス 25">
+            <a:extLst>
+              <a:ext uri="{FF2B5EF4-FFF2-40B4-BE49-F238E27FC236}">
+                <a16:creationId xmlns:a16="http://schemas.microsoft.com/office/drawing/2014/main" id="{A104B24F-7666-AE43-EABE-018D7EB39CCE}"/>
+              </a:ext>
+            </a:extLst>
+          </p:cNvPr>
+          <p:cNvSpPr txBox="1"/>
+          <p:nvPr/>
+        </p:nvSpPr>
+        <p:spPr>
+          <a:xfrm>
+            <a:off x="2650523" y="1316205"/>
+            <a:ext cx="4488729" cy="369332"/>
+          </a:xfrm>
+          <a:prstGeom prst="rect">
+            <a:avLst/>
+          </a:prstGeom>
+          <a:noFill/>
+        </p:spPr>
+        <p:txBody>
+          <a:bodyPr wrap="none" rtlCol="0">
+            <a:spAutoFit/>
+          </a:bodyPr>
+          <a:lstStyle/>
+          <a:p>
+            <a:r>
+              <a:rPr kumimoji="1" lang="ja-JP" altLang="en-US"/>
+              <a:t>「</a:t>
+            </a:r>
+            <a:r>
+              <a:rPr kumimoji="1" lang="en-US" altLang="ja-JP" dirty="0"/>
+              <a:t>.</a:t>
+            </a:r>
+            <a:r>
+              <a:rPr kumimoji="1" lang="ja-JP" altLang="en-US"/>
+              <a:t>」現在いる場所、「</a:t>
+            </a:r>
+            <a:r>
+              <a:rPr kumimoji="1" lang="en-US" altLang="ja-JP" dirty="0"/>
+              <a:t>..</a:t>
+            </a:r>
+            <a:r>
+              <a:rPr kumimoji="1" lang="ja-JP" altLang="en-US"/>
+              <a:t>」一つ上を表す</a:t>
             </a:r>
           </a:p>
         </p:txBody>
@@ -10643,6 +11903,1062 @@
 </file>
 
 <file path=ppt/slides/slide8.xml><?xml version="1.0" encoding="utf-8"?>
+<p:sld xmlns:a="http://schemas.openxmlformats.org/drawingml/2006/main" xmlns:r="http://schemas.openxmlformats.org/officeDocument/2006/relationships" xmlns:p="http://schemas.openxmlformats.org/presentationml/2006/main">
+  <p:cSld>
+    <p:spTree>
+      <p:nvGrpSpPr>
+        <p:cNvPr id="1" name="">
+          <a:extLst>
+            <a:ext uri="{FF2B5EF4-FFF2-40B4-BE49-F238E27FC236}">
+              <a16:creationId xmlns:a16="http://schemas.microsoft.com/office/drawing/2014/main" id="{62880FBA-224D-D902-05E4-E2799405E615}"/>
+            </a:ext>
+          </a:extLst>
+        </p:cNvPr>
+        <p:cNvGrpSpPr/>
+        <p:nvPr/>
+      </p:nvGrpSpPr>
+      <p:grpSpPr>
+        <a:xfrm>
+          <a:off x="0" y="0"/>
+          <a:ext cx="0" cy="0"/>
+          <a:chOff x="0" y="0"/>
+          <a:chExt cx="0" cy="0"/>
+        </a:xfrm>
+      </p:grpSpPr>
+      <p:grpSp>
+        <p:nvGrpSpPr>
+          <p:cNvPr id="20" name="グループ化 19">
+            <a:extLst>
+              <a:ext uri="{FF2B5EF4-FFF2-40B4-BE49-F238E27FC236}">
+                <a16:creationId xmlns:a16="http://schemas.microsoft.com/office/drawing/2014/main" id="{03792C74-CD9D-B3D2-175F-19120FD17F3E}"/>
+              </a:ext>
+            </a:extLst>
+          </p:cNvPr>
+          <p:cNvGrpSpPr/>
+          <p:nvPr/>
+        </p:nvGrpSpPr>
+        <p:grpSpPr>
+          <a:xfrm>
+            <a:off x="2314483" y="1853116"/>
+            <a:ext cx="3139791" cy="3738966"/>
+            <a:chOff x="316448" y="512014"/>
+            <a:chExt cx="3139791" cy="3738966"/>
+          </a:xfrm>
+        </p:grpSpPr>
+        <p:sp>
+          <p:nvSpPr>
+            <p:cNvPr id="7" name="テキスト ボックス 6">
+              <a:extLst>
+                <a:ext uri="{FF2B5EF4-FFF2-40B4-BE49-F238E27FC236}">
+                  <a16:creationId xmlns:a16="http://schemas.microsoft.com/office/drawing/2014/main" id="{E94FBCB7-4A61-5847-A211-421FD4267897}"/>
+                </a:ext>
+              </a:extLst>
+            </p:cNvPr>
+            <p:cNvSpPr txBox="1">
+              <a:spLocks/>
+            </p:cNvSpPr>
+            <p:nvPr/>
+          </p:nvSpPr>
+          <p:spPr>
+            <a:xfrm>
+              <a:off x="738828" y="557661"/>
+              <a:ext cx="2717411" cy="3693319"/>
+            </a:xfrm>
+            <a:prstGeom prst="rect">
+              <a:avLst/>
+            </a:prstGeom>
+            <a:noFill/>
+          </p:spPr>
+          <p:txBody>
+            <a:bodyPr wrap="none" rtlCol="0">
+              <a:spAutoFit/>
+            </a:bodyPr>
+            <a:lstStyle/>
+            <a:p>
+              <a:r>
+                <a:rPr kumimoji="1" lang="en-US" altLang="ja-JP" dirty="0"/>
+                <a:t>/</a:t>
+              </a:r>
+            </a:p>
+            <a:p>
+              <a:endParaRPr kumimoji="1" lang="en-US" altLang="ja-JP" dirty="0"/>
+            </a:p>
+            <a:p>
+              <a:endParaRPr kumimoji="1" lang="en-US" altLang="ja-JP" dirty="0"/>
+            </a:p>
+            <a:p>
+              <a:r>
+                <a:rPr kumimoji="1" lang="en-US" altLang="ja-JP" dirty="0"/>
+                <a:t>home, Users</a:t>
+              </a:r>
+            </a:p>
+            <a:p>
+              <a:endParaRPr kumimoji="1" lang="en-US" altLang="ja-JP" dirty="0"/>
+            </a:p>
+            <a:p>
+              <a:endParaRPr kumimoji="1" lang="en-US" altLang="ja-JP" dirty="0"/>
+            </a:p>
+            <a:p>
+              <a:r>
+                <a:rPr kumimoji="1" lang="en-US" altLang="ja-JP" dirty="0"/>
+                <a:t>taro</a:t>
+              </a:r>
+            </a:p>
+            <a:p>
+              <a:endParaRPr kumimoji="1" lang="en-US" altLang="ja-JP" dirty="0"/>
+            </a:p>
+            <a:p>
+              <a:endParaRPr kumimoji="1" lang="en-US" altLang="ja-JP" dirty="0"/>
+            </a:p>
+            <a:p>
+              <a:r>
+                <a:rPr kumimoji="1" lang="en-US" altLang="ja-JP" dirty="0" err="1"/>
+                <a:t>ima.txt</a:t>
+              </a:r>
+              <a:r>
+                <a:rPr kumimoji="1" lang="en-US" altLang="ja-JP" dirty="0"/>
+                <a:t>     practice</a:t>
+              </a:r>
+            </a:p>
+            <a:p>
+              <a:endParaRPr kumimoji="1" lang="en-US" altLang="ja-JP" dirty="0"/>
+            </a:p>
+            <a:p>
+              <a:endParaRPr kumimoji="1" lang="en-US" altLang="ja-JP" dirty="0"/>
+            </a:p>
+            <a:p>
+              <a:r>
+                <a:rPr kumimoji="1" lang="en-US" altLang="ja-JP" dirty="0"/>
+                <a:t>            </a:t>
+              </a:r>
+              <a:r>
+                <a:rPr kumimoji="1" lang="en-US" altLang="ja-JP" dirty="0" err="1"/>
+                <a:t>info.txt</a:t>
+              </a:r>
+              <a:endParaRPr kumimoji="1" lang="en-US" altLang="ja-JP" dirty="0"/>
+            </a:p>
+          </p:txBody>
+        </p:sp>
+        <p:cxnSp>
+          <p:nvCxnSpPr>
+            <p:cNvPr id="83" name="直線コネクタ 82">
+              <a:extLst>
+                <a:ext uri="{FF2B5EF4-FFF2-40B4-BE49-F238E27FC236}">
+                  <a16:creationId xmlns:a16="http://schemas.microsoft.com/office/drawing/2014/main" id="{18C0A749-7D08-F84E-8573-74BE2CC1DAF8}"/>
+                </a:ext>
+              </a:extLst>
+            </p:cNvPr>
+            <p:cNvCxnSpPr>
+              <a:cxnSpLocks/>
+            </p:cNvCxnSpPr>
+            <p:nvPr/>
+          </p:nvCxnSpPr>
+          <p:spPr>
+            <a:xfrm>
+              <a:off x="2021294" y="2852959"/>
+              <a:ext cx="3600" cy="251999"/>
+            </a:xfrm>
+            <a:prstGeom prst="line">
+              <a:avLst/>
+            </a:prstGeom>
+            <a:ln w="25400">
+              <a:solidFill>
+                <a:schemeClr val="tx1"/>
+              </a:solidFill>
+            </a:ln>
+          </p:spPr>
+          <p:style>
+            <a:lnRef idx="1">
+              <a:schemeClr val="accent1"/>
+            </a:lnRef>
+            <a:fillRef idx="0">
+              <a:schemeClr val="accent1"/>
+            </a:fillRef>
+            <a:effectRef idx="0">
+              <a:schemeClr val="accent1"/>
+            </a:effectRef>
+            <a:fontRef idx="minor">
+              <a:schemeClr val="tx1"/>
+            </a:fontRef>
+          </p:style>
+        </p:cxnSp>
+        <p:cxnSp>
+          <p:nvCxnSpPr>
+            <p:cNvPr id="84" name="直線コネクタ 83">
+              <a:extLst>
+                <a:ext uri="{FF2B5EF4-FFF2-40B4-BE49-F238E27FC236}">
+                  <a16:creationId xmlns:a16="http://schemas.microsoft.com/office/drawing/2014/main" id="{835CE633-0479-71CF-7611-74BF214AD836}"/>
+                </a:ext>
+              </a:extLst>
+            </p:cNvPr>
+            <p:cNvCxnSpPr>
+              <a:cxnSpLocks/>
+            </p:cNvCxnSpPr>
+            <p:nvPr/>
+          </p:nvCxnSpPr>
+          <p:spPr>
+            <a:xfrm>
+              <a:off x="542481" y="2847805"/>
+              <a:ext cx="1478813" cy="0"/>
+            </a:xfrm>
+            <a:prstGeom prst="line">
+              <a:avLst/>
+            </a:prstGeom>
+            <a:ln w="25400">
+              <a:solidFill>
+                <a:schemeClr val="tx1"/>
+              </a:solidFill>
+            </a:ln>
+          </p:spPr>
+          <p:style>
+            <a:lnRef idx="1">
+              <a:schemeClr val="accent1"/>
+            </a:lnRef>
+            <a:fillRef idx="0">
+              <a:schemeClr val="accent1"/>
+            </a:fillRef>
+            <a:effectRef idx="0">
+              <a:schemeClr val="accent1"/>
+            </a:effectRef>
+            <a:fontRef idx="minor">
+              <a:schemeClr val="tx1"/>
+            </a:fontRef>
+          </p:style>
+        </p:cxnSp>
+        <p:pic>
+          <p:nvPicPr>
+            <p:cNvPr id="3" name="図 2">
+              <a:extLst>
+                <a:ext uri="{FF2B5EF4-FFF2-40B4-BE49-F238E27FC236}">
+                  <a16:creationId xmlns:a16="http://schemas.microsoft.com/office/drawing/2014/main" id="{DA44CB25-C3AC-CEED-51E3-497E8FD20561}"/>
+                </a:ext>
+              </a:extLst>
+            </p:cNvPr>
+            <p:cNvPicPr>
+              <a:picLocks noChangeAspect="1"/>
+            </p:cNvPicPr>
+            <p:nvPr/>
+          </p:nvPicPr>
+          <p:blipFill>
+            <a:blip r:embed="rId2"/>
+            <a:stretch>
+              <a:fillRect/>
+            </a:stretch>
+          </p:blipFill>
+          <p:spPr>
+            <a:xfrm>
+              <a:off x="319368" y="1359500"/>
+              <a:ext cx="457200" cy="457200"/>
+            </a:xfrm>
+            <a:prstGeom prst="rect">
+              <a:avLst/>
+            </a:prstGeom>
+          </p:spPr>
+        </p:pic>
+        <p:pic>
+          <p:nvPicPr>
+            <p:cNvPr id="5" name="図 4">
+              <a:extLst>
+                <a:ext uri="{FF2B5EF4-FFF2-40B4-BE49-F238E27FC236}">
+                  <a16:creationId xmlns:a16="http://schemas.microsoft.com/office/drawing/2014/main" id="{0526878B-3E99-EA08-CFFA-632DFC8D2C08}"/>
+                </a:ext>
+              </a:extLst>
+            </p:cNvPr>
+            <p:cNvPicPr>
+              <a:picLocks noChangeAspect="1"/>
+            </p:cNvPicPr>
+            <p:nvPr/>
+          </p:nvPicPr>
+          <p:blipFill>
+            <a:blip r:embed="rId2"/>
+            <a:stretch>
+              <a:fillRect/>
+            </a:stretch>
+          </p:blipFill>
+          <p:spPr>
+            <a:xfrm>
+              <a:off x="319368" y="2183512"/>
+              <a:ext cx="457200" cy="457200"/>
+            </a:xfrm>
+            <a:prstGeom prst="rect">
+              <a:avLst/>
+            </a:prstGeom>
+          </p:spPr>
+        </p:pic>
+        <p:pic>
+          <p:nvPicPr>
+            <p:cNvPr id="8" name="図 7">
+              <a:extLst>
+                <a:ext uri="{FF2B5EF4-FFF2-40B4-BE49-F238E27FC236}">
+                  <a16:creationId xmlns:a16="http://schemas.microsoft.com/office/drawing/2014/main" id="{7982E698-87C2-0314-CEA6-492995563BEF}"/>
+                </a:ext>
+              </a:extLst>
+            </p:cNvPr>
+            <p:cNvPicPr>
+              <a:picLocks noChangeAspect="1"/>
+            </p:cNvPicPr>
+            <p:nvPr/>
+          </p:nvPicPr>
+          <p:blipFill>
+            <a:blip r:embed="rId3"/>
+            <a:stretch>
+              <a:fillRect/>
+            </a:stretch>
+          </p:blipFill>
+          <p:spPr>
+            <a:xfrm>
+              <a:off x="319368" y="2996089"/>
+              <a:ext cx="457200" cy="457200"/>
+            </a:xfrm>
+            <a:prstGeom prst="rect">
+              <a:avLst/>
+            </a:prstGeom>
+          </p:spPr>
+        </p:pic>
+        <p:pic>
+          <p:nvPicPr>
+            <p:cNvPr id="10" name="図 9">
+              <a:extLst>
+                <a:ext uri="{FF2B5EF4-FFF2-40B4-BE49-F238E27FC236}">
+                  <a16:creationId xmlns:a16="http://schemas.microsoft.com/office/drawing/2014/main" id="{DD354CF3-4E7B-ED5F-46AE-CECDD098E42B}"/>
+                </a:ext>
+              </a:extLst>
+            </p:cNvPr>
+            <p:cNvPicPr>
+              <a:picLocks noChangeAspect="1"/>
+            </p:cNvPicPr>
+            <p:nvPr/>
+          </p:nvPicPr>
+          <p:blipFill>
+            <a:blip r:embed="rId2"/>
+            <a:stretch>
+              <a:fillRect/>
+            </a:stretch>
+          </p:blipFill>
+          <p:spPr>
+            <a:xfrm>
+              <a:off x="1806918" y="2978959"/>
+              <a:ext cx="457200" cy="457200"/>
+            </a:xfrm>
+            <a:prstGeom prst="rect">
+              <a:avLst/>
+            </a:prstGeom>
+          </p:spPr>
+        </p:pic>
+        <p:pic>
+          <p:nvPicPr>
+            <p:cNvPr id="11" name="図 10">
+              <a:extLst>
+                <a:ext uri="{FF2B5EF4-FFF2-40B4-BE49-F238E27FC236}">
+                  <a16:creationId xmlns:a16="http://schemas.microsoft.com/office/drawing/2014/main" id="{B7841F91-CDCC-81D0-7C99-A74AF7DAB461}"/>
+                </a:ext>
+              </a:extLst>
+            </p:cNvPr>
+            <p:cNvPicPr>
+              <a:picLocks noChangeAspect="1"/>
+            </p:cNvPicPr>
+            <p:nvPr/>
+          </p:nvPicPr>
+          <p:blipFill>
+            <a:blip r:embed="rId3"/>
+            <a:stretch>
+              <a:fillRect/>
+            </a:stretch>
+          </p:blipFill>
+          <p:spPr>
+            <a:xfrm>
+              <a:off x="1806918" y="3774855"/>
+              <a:ext cx="457200" cy="457200"/>
+            </a:xfrm>
+            <a:prstGeom prst="rect">
+              <a:avLst/>
+            </a:prstGeom>
+          </p:spPr>
+        </p:pic>
+        <p:pic>
+          <p:nvPicPr>
+            <p:cNvPr id="12" name="図 11">
+              <a:extLst>
+                <a:ext uri="{FF2B5EF4-FFF2-40B4-BE49-F238E27FC236}">
+                  <a16:creationId xmlns:a16="http://schemas.microsoft.com/office/drawing/2014/main" id="{0E865D01-4DF8-C53B-4BF7-3BDE5487F551}"/>
+                </a:ext>
+              </a:extLst>
+            </p:cNvPr>
+            <p:cNvPicPr>
+              <a:picLocks noChangeAspect="1"/>
+            </p:cNvPicPr>
+            <p:nvPr/>
+          </p:nvPicPr>
+          <p:blipFill>
+            <a:blip r:embed="rId2"/>
+            <a:stretch>
+              <a:fillRect/>
+            </a:stretch>
+          </p:blipFill>
+          <p:spPr>
+            <a:xfrm>
+              <a:off x="316448" y="512014"/>
+              <a:ext cx="457200" cy="457200"/>
+            </a:xfrm>
+            <a:prstGeom prst="rect">
+              <a:avLst/>
+            </a:prstGeom>
+          </p:spPr>
+        </p:pic>
+        <p:cxnSp>
+          <p:nvCxnSpPr>
+            <p:cNvPr id="13" name="直線コネクタ 12">
+              <a:extLst>
+                <a:ext uri="{FF2B5EF4-FFF2-40B4-BE49-F238E27FC236}">
+                  <a16:creationId xmlns:a16="http://schemas.microsoft.com/office/drawing/2014/main" id="{000AEAED-C3DA-CD50-AD73-D36F70C3F35C}"/>
+                </a:ext>
+              </a:extLst>
+            </p:cNvPr>
+            <p:cNvCxnSpPr>
+              <a:cxnSpLocks/>
+            </p:cNvCxnSpPr>
+            <p:nvPr/>
+          </p:nvCxnSpPr>
+          <p:spPr>
+            <a:xfrm>
+              <a:off x="553737" y="1718528"/>
+              <a:ext cx="3600" cy="576000"/>
+            </a:xfrm>
+            <a:prstGeom prst="line">
+              <a:avLst/>
+            </a:prstGeom>
+            <a:ln w="25400">
+              <a:solidFill>
+                <a:schemeClr val="tx1"/>
+              </a:solidFill>
+            </a:ln>
+          </p:spPr>
+          <p:style>
+            <a:lnRef idx="1">
+              <a:schemeClr val="accent1"/>
+            </a:lnRef>
+            <a:fillRef idx="0">
+              <a:schemeClr val="accent1"/>
+            </a:fillRef>
+            <a:effectRef idx="0">
+              <a:schemeClr val="accent1"/>
+            </a:effectRef>
+            <a:fontRef idx="minor">
+              <a:schemeClr val="tx1"/>
+            </a:fontRef>
+          </p:style>
+        </p:cxnSp>
+        <p:cxnSp>
+          <p:nvCxnSpPr>
+            <p:cNvPr id="14" name="直線コネクタ 13">
+              <a:extLst>
+                <a:ext uri="{FF2B5EF4-FFF2-40B4-BE49-F238E27FC236}">
+                  <a16:creationId xmlns:a16="http://schemas.microsoft.com/office/drawing/2014/main" id="{240B5997-3AD0-1619-8074-3D6A0F2B39D0}"/>
+                </a:ext>
+              </a:extLst>
+            </p:cNvPr>
+            <p:cNvCxnSpPr>
+              <a:cxnSpLocks/>
+            </p:cNvCxnSpPr>
+            <p:nvPr/>
+          </p:nvCxnSpPr>
+          <p:spPr>
+            <a:xfrm>
+              <a:off x="542481" y="2538415"/>
+              <a:ext cx="3600" cy="503999"/>
+            </a:xfrm>
+            <a:prstGeom prst="line">
+              <a:avLst/>
+            </a:prstGeom>
+            <a:ln w="25400">
+              <a:solidFill>
+                <a:schemeClr val="tx1"/>
+              </a:solidFill>
+            </a:ln>
+          </p:spPr>
+          <p:style>
+            <a:lnRef idx="1">
+              <a:schemeClr val="accent1"/>
+            </a:lnRef>
+            <a:fillRef idx="0">
+              <a:schemeClr val="accent1"/>
+            </a:fillRef>
+            <a:effectRef idx="0">
+              <a:schemeClr val="accent1"/>
+            </a:effectRef>
+            <a:fontRef idx="minor">
+              <a:schemeClr val="tx1"/>
+            </a:fontRef>
+          </p:style>
+        </p:cxnSp>
+        <p:cxnSp>
+          <p:nvCxnSpPr>
+            <p:cNvPr id="16" name="直線コネクタ 15">
+              <a:extLst>
+                <a:ext uri="{FF2B5EF4-FFF2-40B4-BE49-F238E27FC236}">
+                  <a16:creationId xmlns:a16="http://schemas.microsoft.com/office/drawing/2014/main" id="{95344CC4-A8D4-7B23-304F-5F13BDAD12DA}"/>
+                </a:ext>
+              </a:extLst>
+            </p:cNvPr>
+            <p:cNvCxnSpPr>
+              <a:cxnSpLocks/>
+            </p:cNvCxnSpPr>
+            <p:nvPr/>
+          </p:nvCxnSpPr>
+          <p:spPr>
+            <a:xfrm>
+              <a:off x="538188" y="892436"/>
+              <a:ext cx="3600" cy="576000"/>
+            </a:xfrm>
+            <a:prstGeom prst="line">
+              <a:avLst/>
+            </a:prstGeom>
+            <a:ln w="25400">
+              <a:solidFill>
+                <a:schemeClr val="tx1"/>
+              </a:solidFill>
+            </a:ln>
+          </p:spPr>
+          <p:style>
+            <a:lnRef idx="1">
+              <a:schemeClr val="accent1"/>
+            </a:lnRef>
+            <a:fillRef idx="0">
+              <a:schemeClr val="accent1"/>
+            </a:fillRef>
+            <a:effectRef idx="0">
+              <a:schemeClr val="accent1"/>
+            </a:effectRef>
+            <a:fontRef idx="minor">
+              <a:schemeClr val="tx1"/>
+            </a:fontRef>
+          </p:style>
+        </p:cxnSp>
+        <p:cxnSp>
+          <p:nvCxnSpPr>
+            <p:cNvPr id="17" name="直線コネクタ 16">
+              <a:extLst>
+                <a:ext uri="{FF2B5EF4-FFF2-40B4-BE49-F238E27FC236}">
+                  <a16:creationId xmlns:a16="http://schemas.microsoft.com/office/drawing/2014/main" id="{EFFD29E9-26D7-C305-B286-C4F399B3EDA2}"/>
+                </a:ext>
+              </a:extLst>
+            </p:cNvPr>
+            <p:cNvCxnSpPr>
+              <a:cxnSpLocks/>
+            </p:cNvCxnSpPr>
+            <p:nvPr/>
+          </p:nvCxnSpPr>
+          <p:spPr>
+            <a:xfrm>
+              <a:off x="2021294" y="3339570"/>
+              <a:ext cx="3600" cy="503999"/>
+            </a:xfrm>
+            <a:prstGeom prst="line">
+              <a:avLst/>
+            </a:prstGeom>
+            <a:ln w="25400">
+              <a:solidFill>
+                <a:schemeClr val="tx1"/>
+              </a:solidFill>
+            </a:ln>
+          </p:spPr>
+          <p:style>
+            <a:lnRef idx="1">
+              <a:schemeClr val="accent1"/>
+            </a:lnRef>
+            <a:fillRef idx="0">
+              <a:schemeClr val="accent1"/>
+            </a:fillRef>
+            <a:effectRef idx="0">
+              <a:schemeClr val="accent1"/>
+            </a:effectRef>
+            <a:fontRef idx="minor">
+              <a:schemeClr val="tx1"/>
+            </a:fontRef>
+          </p:style>
+        </p:cxnSp>
+      </p:grpSp>
+      <p:sp>
+        <p:nvSpPr>
+          <p:cNvPr id="4" name="正方形/長方形 3">
+            <a:extLst>
+              <a:ext uri="{FF2B5EF4-FFF2-40B4-BE49-F238E27FC236}">
+                <a16:creationId xmlns:a16="http://schemas.microsoft.com/office/drawing/2014/main" id="{62ACE53E-266E-ECAA-A286-65C21CD12960}"/>
+              </a:ext>
+            </a:extLst>
+          </p:cNvPr>
+          <p:cNvSpPr/>
+          <p:nvPr/>
+        </p:nvSpPr>
+        <p:spPr>
+          <a:xfrm>
+            <a:off x="3792050" y="4335868"/>
+            <a:ext cx="503633" cy="420627"/>
+          </a:xfrm>
+          <a:prstGeom prst="rect">
+            <a:avLst/>
+          </a:prstGeom>
+          <a:noFill/>
+          <a:ln w="38100">
+            <a:solidFill>
+              <a:schemeClr val="bg2"/>
+            </a:solidFill>
+          </a:ln>
+        </p:spPr>
+        <p:style>
+          <a:lnRef idx="2">
+            <a:schemeClr val="accent1">
+              <a:shade val="15000"/>
+            </a:schemeClr>
+          </a:lnRef>
+          <a:fillRef idx="1">
+            <a:schemeClr val="accent1"/>
+          </a:fillRef>
+          <a:effectRef idx="0">
+            <a:schemeClr val="accent1"/>
+          </a:effectRef>
+          <a:fontRef idx="minor">
+            <a:schemeClr val="lt1"/>
+          </a:fontRef>
+        </p:style>
+        <p:txBody>
+          <a:bodyPr rtlCol="0" anchor="ctr"/>
+          <a:lstStyle/>
+          <a:p>
+            <a:pPr algn="ctr"/>
+            <a:endParaRPr kumimoji="1" lang="ja-JP" altLang="en-US">
+              <a:solidFill>
+                <a:schemeClr val="tx1"/>
+              </a:solidFill>
+            </a:endParaRPr>
+          </a:p>
+        </p:txBody>
+      </p:sp>
+      <p:sp>
+        <p:nvSpPr>
+          <p:cNvPr id="2" name="正方形/長方形 1">
+            <a:extLst>
+              <a:ext uri="{FF2B5EF4-FFF2-40B4-BE49-F238E27FC236}">
+                <a16:creationId xmlns:a16="http://schemas.microsoft.com/office/drawing/2014/main" id="{18ABC078-E8AA-CF05-C395-F621693E9CD2}"/>
+              </a:ext>
+            </a:extLst>
+          </p:cNvPr>
+          <p:cNvSpPr/>
+          <p:nvPr/>
+        </p:nvSpPr>
+        <p:spPr>
+          <a:xfrm>
+            <a:off x="5668649" y="5154346"/>
+            <a:ext cx="3059795" cy="380422"/>
+          </a:xfrm>
+          <a:prstGeom prst="rect">
+            <a:avLst/>
+          </a:prstGeom>
+          <a:noFill/>
+          <a:ln>
+            <a:solidFill>
+              <a:schemeClr val="tx1"/>
+            </a:solidFill>
+          </a:ln>
+        </p:spPr>
+        <p:style>
+          <a:lnRef idx="2">
+            <a:schemeClr val="accent1">
+              <a:shade val="15000"/>
+            </a:schemeClr>
+          </a:lnRef>
+          <a:fillRef idx="1">
+            <a:schemeClr val="accent1"/>
+          </a:fillRef>
+          <a:effectRef idx="0">
+            <a:schemeClr val="accent1"/>
+          </a:effectRef>
+          <a:fontRef idx="minor">
+            <a:schemeClr val="lt1"/>
+          </a:fontRef>
+        </p:style>
+        <p:txBody>
+          <a:bodyPr rtlCol="0" anchor="ctr"/>
+          <a:lstStyle/>
+          <a:p>
+            <a:pPr algn="ctr"/>
+            <a:endParaRPr kumimoji="1" lang="ja-JP" altLang="en-US">
+              <a:solidFill>
+                <a:schemeClr val="tx1"/>
+              </a:solidFill>
+            </a:endParaRPr>
+          </a:p>
+        </p:txBody>
+      </p:sp>
+      <p:sp>
+        <p:nvSpPr>
+          <p:cNvPr id="6" name="正方形/長方形 5">
+            <a:extLst>
+              <a:ext uri="{FF2B5EF4-FFF2-40B4-BE49-F238E27FC236}">
+                <a16:creationId xmlns:a16="http://schemas.microsoft.com/office/drawing/2014/main" id="{16C6C379-FB06-3014-73F9-074D58478DD2}"/>
+              </a:ext>
+            </a:extLst>
+          </p:cNvPr>
+          <p:cNvSpPr/>
+          <p:nvPr/>
+        </p:nvSpPr>
+        <p:spPr>
+          <a:xfrm>
+            <a:off x="5668649" y="4337191"/>
+            <a:ext cx="3059795" cy="380422"/>
+          </a:xfrm>
+          <a:prstGeom prst="rect">
+            <a:avLst/>
+          </a:prstGeom>
+          <a:noFill/>
+          <a:ln>
+            <a:solidFill>
+              <a:schemeClr val="tx1"/>
+            </a:solidFill>
+          </a:ln>
+        </p:spPr>
+        <p:style>
+          <a:lnRef idx="2">
+            <a:schemeClr val="accent1">
+              <a:shade val="15000"/>
+            </a:schemeClr>
+          </a:lnRef>
+          <a:fillRef idx="1">
+            <a:schemeClr val="accent1"/>
+          </a:fillRef>
+          <a:effectRef idx="0">
+            <a:schemeClr val="accent1"/>
+          </a:effectRef>
+          <a:fontRef idx="minor">
+            <a:schemeClr val="lt1"/>
+          </a:fontRef>
+        </p:style>
+        <p:txBody>
+          <a:bodyPr rtlCol="0" anchor="ctr"/>
+          <a:lstStyle/>
+          <a:p>
+            <a:pPr algn="ctr"/>
+            <a:endParaRPr kumimoji="1" lang="ja-JP" altLang="en-US">
+              <a:solidFill>
+                <a:schemeClr val="tx1"/>
+              </a:solidFill>
+            </a:endParaRPr>
+          </a:p>
+        </p:txBody>
+      </p:sp>
+      <p:sp>
+        <p:nvSpPr>
+          <p:cNvPr id="9" name="正方形/長方形 8">
+            <a:extLst>
+              <a:ext uri="{FF2B5EF4-FFF2-40B4-BE49-F238E27FC236}">
+                <a16:creationId xmlns:a16="http://schemas.microsoft.com/office/drawing/2014/main" id="{F40EC063-45F8-08FF-6A02-2AAE9BC79CF3}"/>
+              </a:ext>
+            </a:extLst>
+          </p:cNvPr>
+          <p:cNvSpPr/>
+          <p:nvPr/>
+        </p:nvSpPr>
+        <p:spPr>
+          <a:xfrm>
+            <a:off x="5668649" y="3520036"/>
+            <a:ext cx="3059795" cy="380422"/>
+          </a:xfrm>
+          <a:prstGeom prst="rect">
+            <a:avLst/>
+          </a:prstGeom>
+          <a:noFill/>
+          <a:ln>
+            <a:solidFill>
+              <a:schemeClr val="tx1"/>
+            </a:solidFill>
+          </a:ln>
+        </p:spPr>
+        <p:style>
+          <a:lnRef idx="2">
+            <a:schemeClr val="accent1">
+              <a:shade val="15000"/>
+            </a:schemeClr>
+          </a:lnRef>
+          <a:fillRef idx="1">
+            <a:schemeClr val="accent1"/>
+          </a:fillRef>
+          <a:effectRef idx="0">
+            <a:schemeClr val="accent1"/>
+          </a:effectRef>
+          <a:fontRef idx="minor">
+            <a:schemeClr val="lt1"/>
+          </a:fontRef>
+        </p:style>
+        <p:txBody>
+          <a:bodyPr rtlCol="0" anchor="ctr"/>
+          <a:lstStyle/>
+          <a:p>
+            <a:pPr algn="ctr"/>
+            <a:endParaRPr kumimoji="1" lang="ja-JP" altLang="en-US">
+              <a:solidFill>
+                <a:schemeClr val="tx1"/>
+              </a:solidFill>
+            </a:endParaRPr>
+          </a:p>
+        </p:txBody>
+      </p:sp>
+      <p:sp>
+        <p:nvSpPr>
+          <p:cNvPr id="15" name="正方形/長方形 14">
+            <a:extLst>
+              <a:ext uri="{FF2B5EF4-FFF2-40B4-BE49-F238E27FC236}">
+                <a16:creationId xmlns:a16="http://schemas.microsoft.com/office/drawing/2014/main" id="{43E2190F-C1BE-0261-9D5C-844A34728019}"/>
+              </a:ext>
+            </a:extLst>
+          </p:cNvPr>
+          <p:cNvSpPr/>
+          <p:nvPr/>
+        </p:nvSpPr>
+        <p:spPr>
+          <a:xfrm>
+            <a:off x="5635765" y="2679208"/>
+            <a:ext cx="3059795" cy="380422"/>
+          </a:xfrm>
+          <a:prstGeom prst="rect">
+            <a:avLst/>
+          </a:prstGeom>
+          <a:noFill/>
+          <a:ln>
+            <a:solidFill>
+              <a:schemeClr val="tx1"/>
+            </a:solidFill>
+          </a:ln>
+        </p:spPr>
+        <p:style>
+          <a:lnRef idx="2">
+            <a:schemeClr val="accent1">
+              <a:shade val="15000"/>
+            </a:schemeClr>
+          </a:lnRef>
+          <a:fillRef idx="1">
+            <a:schemeClr val="accent1"/>
+          </a:fillRef>
+          <a:effectRef idx="0">
+            <a:schemeClr val="accent1"/>
+          </a:effectRef>
+          <a:fontRef idx="minor">
+            <a:schemeClr val="lt1"/>
+          </a:fontRef>
+        </p:style>
+        <p:txBody>
+          <a:bodyPr rtlCol="0" anchor="ctr"/>
+          <a:lstStyle/>
+          <a:p>
+            <a:pPr algn="ctr"/>
+            <a:endParaRPr kumimoji="1" lang="ja-JP" altLang="en-US">
+              <a:solidFill>
+                <a:schemeClr val="tx1"/>
+              </a:solidFill>
+            </a:endParaRPr>
+          </a:p>
+        </p:txBody>
+      </p:sp>
+      <p:sp>
+        <p:nvSpPr>
+          <p:cNvPr id="18" name="正方形/長方形 17">
+            <a:extLst>
+              <a:ext uri="{FF2B5EF4-FFF2-40B4-BE49-F238E27FC236}">
+                <a16:creationId xmlns:a16="http://schemas.microsoft.com/office/drawing/2014/main" id="{D5C80A69-77B2-C43C-965B-55ABC34A868E}"/>
+              </a:ext>
+            </a:extLst>
+          </p:cNvPr>
+          <p:cNvSpPr/>
+          <p:nvPr/>
+        </p:nvSpPr>
+        <p:spPr>
+          <a:xfrm>
+            <a:off x="5635765" y="1874655"/>
+            <a:ext cx="3059795" cy="380422"/>
+          </a:xfrm>
+          <a:prstGeom prst="rect">
+            <a:avLst/>
+          </a:prstGeom>
+          <a:noFill/>
+          <a:ln>
+            <a:solidFill>
+              <a:schemeClr val="tx1"/>
+            </a:solidFill>
+          </a:ln>
+        </p:spPr>
+        <p:style>
+          <a:lnRef idx="2">
+            <a:schemeClr val="accent1">
+              <a:shade val="15000"/>
+            </a:schemeClr>
+          </a:lnRef>
+          <a:fillRef idx="1">
+            <a:schemeClr val="accent1"/>
+          </a:fillRef>
+          <a:effectRef idx="0">
+            <a:schemeClr val="accent1"/>
+          </a:effectRef>
+          <a:fontRef idx="minor">
+            <a:schemeClr val="lt1"/>
+          </a:fontRef>
+        </p:style>
+        <p:txBody>
+          <a:bodyPr rtlCol="0" anchor="ctr"/>
+          <a:lstStyle/>
+          <a:p>
+            <a:pPr algn="ctr"/>
+            <a:endParaRPr kumimoji="1" lang="ja-JP" altLang="en-US">
+              <a:solidFill>
+                <a:schemeClr val="tx1"/>
+              </a:solidFill>
+            </a:endParaRPr>
+          </a:p>
+        </p:txBody>
+      </p:sp>
+      <p:sp>
+        <p:nvSpPr>
+          <p:cNvPr id="22" name="テキスト ボックス 21">
+            <a:extLst>
+              <a:ext uri="{FF2B5EF4-FFF2-40B4-BE49-F238E27FC236}">
+                <a16:creationId xmlns:a16="http://schemas.microsoft.com/office/drawing/2014/main" id="{2B39DE9F-DBD9-37EC-EF44-54D66CA14CC2}"/>
+              </a:ext>
+            </a:extLst>
+          </p:cNvPr>
+          <p:cNvSpPr txBox="1"/>
+          <p:nvPr/>
+        </p:nvSpPr>
+        <p:spPr>
+          <a:xfrm>
+            <a:off x="4095568" y="3958201"/>
+            <a:ext cx="1338828" cy="369332"/>
+          </a:xfrm>
+          <a:prstGeom prst="rect">
+            <a:avLst/>
+          </a:prstGeom>
+          <a:noFill/>
+        </p:spPr>
+        <p:txBody>
+          <a:bodyPr wrap="none" rtlCol="0">
+            <a:spAutoFit/>
+          </a:bodyPr>
+          <a:lstStyle/>
+          <a:p>
+            <a:r>
+              <a:rPr kumimoji="1" lang="ja-JP" altLang="en-US">
+                <a:solidFill>
+                  <a:schemeClr val="bg2"/>
+                </a:solidFill>
+              </a:rPr>
+              <a:t>ここにいる</a:t>
+            </a:r>
+          </a:p>
+        </p:txBody>
+      </p:sp>
+      <p:sp>
+        <p:nvSpPr>
+          <p:cNvPr id="25" name="テキスト ボックス 24">
+            <a:extLst>
+              <a:ext uri="{FF2B5EF4-FFF2-40B4-BE49-F238E27FC236}">
+                <a16:creationId xmlns:a16="http://schemas.microsoft.com/office/drawing/2014/main" id="{E78DAA66-0C19-2DF7-E39D-B8D084379CC7}"/>
+              </a:ext>
+            </a:extLst>
+          </p:cNvPr>
+          <p:cNvSpPr txBox="1"/>
+          <p:nvPr/>
+        </p:nvSpPr>
+        <p:spPr>
+          <a:xfrm>
+            <a:off x="-815031" y="1268341"/>
+            <a:ext cx="1826141" cy="584775"/>
+          </a:xfrm>
+          <a:prstGeom prst="rect">
+            <a:avLst/>
+          </a:prstGeom>
+          <a:noFill/>
+        </p:spPr>
+        <p:txBody>
+          <a:bodyPr wrap="none" rtlCol="0">
+            <a:spAutoFit/>
+          </a:bodyPr>
+          <a:lstStyle/>
+          <a:p>
+            <a:r>
+              <a:rPr kumimoji="1" lang="ja-JP" altLang="en-US" sz="3200" b="1"/>
+              <a:t>相対パス</a:t>
+            </a:r>
+            <a:endParaRPr kumimoji="1" lang="ja-JP" altLang="en-US"/>
+          </a:p>
+        </p:txBody>
+      </p:sp>
+      <p:sp>
+        <p:nvSpPr>
+          <p:cNvPr id="24" name="正方形/長方形 23">
+            <a:extLst>
+              <a:ext uri="{FF2B5EF4-FFF2-40B4-BE49-F238E27FC236}">
+                <a16:creationId xmlns:a16="http://schemas.microsoft.com/office/drawing/2014/main" id="{0A6210E7-DB8B-A514-263A-1BBB7CAE48B4}"/>
+              </a:ext>
+            </a:extLst>
+          </p:cNvPr>
+          <p:cNvSpPr/>
+          <p:nvPr/>
+        </p:nvSpPr>
+        <p:spPr>
+          <a:xfrm>
+            <a:off x="-815031" y="4337191"/>
+            <a:ext cx="3059795" cy="380422"/>
+          </a:xfrm>
+          <a:prstGeom prst="rect">
+            <a:avLst/>
+          </a:prstGeom>
+          <a:noFill/>
+          <a:ln>
+            <a:solidFill>
+              <a:schemeClr val="tx1"/>
+            </a:solidFill>
+          </a:ln>
+        </p:spPr>
+        <p:style>
+          <a:lnRef idx="2">
+            <a:schemeClr val="accent1">
+              <a:shade val="15000"/>
+            </a:schemeClr>
+          </a:lnRef>
+          <a:fillRef idx="1">
+            <a:schemeClr val="accent1"/>
+          </a:fillRef>
+          <a:effectRef idx="0">
+            <a:schemeClr val="accent1"/>
+          </a:effectRef>
+          <a:fontRef idx="minor">
+            <a:schemeClr val="lt1"/>
+          </a:fontRef>
+        </p:style>
+        <p:txBody>
+          <a:bodyPr rtlCol="0" anchor="ctr"/>
+          <a:lstStyle/>
+          <a:p>
+            <a:pPr algn="ctr"/>
+            <a:endParaRPr kumimoji="1" lang="ja-JP" altLang="en-US">
+              <a:solidFill>
+                <a:schemeClr val="tx1"/>
+              </a:solidFill>
+            </a:endParaRPr>
+          </a:p>
+        </p:txBody>
+      </p:sp>
+    </p:spTree>
+    <p:extLst>
+      <p:ext uri="{BB962C8B-B14F-4D97-AF65-F5344CB8AC3E}">
+        <p14:creationId xmlns:p14="http://schemas.microsoft.com/office/powerpoint/2010/main" val="91295635"/>
+      </p:ext>
+    </p:extLst>
+  </p:cSld>
+  <p:clrMapOvr>
+    <a:masterClrMapping/>
+  </p:clrMapOvr>
+</p:sld>
+</file>
+
+<file path=ppt/slides/slide9.xml><?xml version="1.0" encoding="utf-8"?>
 <p:sld xmlns:a="http://schemas.openxmlformats.org/drawingml/2006/main" xmlns:r="http://schemas.openxmlformats.org/officeDocument/2006/relationships" xmlns:p="http://schemas.openxmlformats.org/presentationml/2006/main">
   <p:cSld>
     <p:spTree>
@@ -11653,1156 +13969,6 @@
     <p:extLst>
       <p:ext uri="{BB962C8B-B14F-4D97-AF65-F5344CB8AC3E}">
         <p14:creationId xmlns:p14="http://schemas.microsoft.com/office/powerpoint/2010/main" val="3015058589"/>
-      </p:ext>
-    </p:extLst>
-  </p:cSld>
-  <p:clrMapOvr>
-    <a:masterClrMapping/>
-  </p:clrMapOvr>
-</p:sld>
-</file>
-
-<file path=ppt/slides/slide9.xml><?xml version="1.0" encoding="utf-8"?>
-<p:sld xmlns:a="http://schemas.openxmlformats.org/drawingml/2006/main" xmlns:r="http://schemas.openxmlformats.org/officeDocument/2006/relationships" xmlns:p="http://schemas.openxmlformats.org/presentationml/2006/main">
-  <p:cSld>
-    <p:spTree>
-      <p:nvGrpSpPr>
-        <p:cNvPr id="1" name="">
-          <a:extLst>
-            <a:ext uri="{FF2B5EF4-FFF2-40B4-BE49-F238E27FC236}">
-              <a16:creationId xmlns:a16="http://schemas.microsoft.com/office/drawing/2014/main" id="{D12EFBBD-DAA5-1A37-ABAB-CFA7CBBB3853}"/>
-            </a:ext>
-          </a:extLst>
-        </p:cNvPr>
-        <p:cNvGrpSpPr/>
-        <p:nvPr/>
-      </p:nvGrpSpPr>
-      <p:grpSpPr>
-        <a:xfrm>
-          <a:off x="0" y="0"/>
-          <a:ext cx="0" cy="0"/>
-          <a:chOff x="0" y="0"/>
-          <a:chExt cx="0" cy="0"/>
-        </a:xfrm>
-      </p:grpSpPr>
-      <p:sp>
-        <p:nvSpPr>
-          <p:cNvPr id="7" name="テキスト ボックス 6">
-            <a:extLst>
-              <a:ext uri="{FF2B5EF4-FFF2-40B4-BE49-F238E27FC236}">
-                <a16:creationId xmlns:a16="http://schemas.microsoft.com/office/drawing/2014/main" id="{96ECD359-1D35-0C58-B230-990BEDA8ED85}"/>
-              </a:ext>
-            </a:extLst>
-          </p:cNvPr>
-          <p:cNvSpPr txBox="1">
-            <a:spLocks/>
-          </p:cNvSpPr>
-          <p:nvPr/>
-        </p:nvSpPr>
-        <p:spPr>
-          <a:xfrm>
-            <a:off x="3163052" y="1331694"/>
-            <a:ext cx="691215" cy="2031325"/>
-          </a:xfrm>
-          <a:prstGeom prst="rect">
-            <a:avLst/>
-          </a:prstGeom>
-          <a:noFill/>
-        </p:spPr>
-        <p:txBody>
-          <a:bodyPr wrap="none" rtlCol="0">
-            <a:spAutoFit/>
-          </a:bodyPr>
-          <a:lstStyle/>
-          <a:p>
-            <a:r>
-              <a:rPr kumimoji="1" lang="en-US" altLang="ja-JP" dirty="0"/>
-              <a:t>/</a:t>
-            </a:r>
-          </a:p>
-          <a:p>
-            <a:endParaRPr kumimoji="1" lang="en-US" altLang="ja-JP" dirty="0"/>
-          </a:p>
-          <a:p>
-            <a:endParaRPr kumimoji="1" lang="en-US" altLang="ja-JP" dirty="0"/>
-          </a:p>
-          <a:p>
-            <a:endParaRPr kumimoji="1" lang="en-US" altLang="ja-JP" dirty="0"/>
-          </a:p>
-          <a:p>
-            <a:endParaRPr kumimoji="1" lang="en-US" altLang="ja-JP" dirty="0"/>
-          </a:p>
-          <a:p>
-            <a:endParaRPr kumimoji="1" lang="en-US" altLang="ja-JP" dirty="0"/>
-          </a:p>
-          <a:p>
-            <a:r>
-              <a:rPr kumimoji="1" lang="en-US" altLang="ja-JP" dirty="0"/>
-              <a:t>taro</a:t>
-            </a:r>
-          </a:p>
-        </p:txBody>
-      </p:sp>
-      <p:pic>
-        <p:nvPicPr>
-          <p:cNvPr id="3" name="図 2">
-            <a:extLst>
-              <a:ext uri="{FF2B5EF4-FFF2-40B4-BE49-F238E27FC236}">
-                <a16:creationId xmlns:a16="http://schemas.microsoft.com/office/drawing/2014/main" id="{4F7BB112-FA93-B265-6BF1-99A4549AE416}"/>
-              </a:ext>
-            </a:extLst>
-          </p:cNvPr>
-          <p:cNvPicPr>
-            <a:picLocks noChangeAspect="1"/>
-          </p:cNvPicPr>
-          <p:nvPr/>
-        </p:nvPicPr>
-        <p:blipFill>
-          <a:blip r:embed="rId2"/>
-          <a:stretch>
-            <a:fillRect/>
-          </a:stretch>
-        </p:blipFill>
-        <p:spPr>
-          <a:xfrm>
-            <a:off x="2743592" y="2133533"/>
-            <a:ext cx="457200" cy="457200"/>
-          </a:xfrm>
-          <a:prstGeom prst="rect">
-            <a:avLst/>
-          </a:prstGeom>
-        </p:spPr>
-      </p:pic>
-      <p:pic>
-        <p:nvPicPr>
-          <p:cNvPr id="5" name="図 4">
-            <a:extLst>
-              <a:ext uri="{FF2B5EF4-FFF2-40B4-BE49-F238E27FC236}">
-                <a16:creationId xmlns:a16="http://schemas.microsoft.com/office/drawing/2014/main" id="{C549BE99-7175-CE5D-608C-C3A51F8E1A5A}"/>
-              </a:ext>
-            </a:extLst>
-          </p:cNvPr>
-          <p:cNvPicPr>
-            <a:picLocks noChangeAspect="1"/>
-          </p:cNvPicPr>
-          <p:nvPr/>
-        </p:nvPicPr>
-        <p:blipFill>
-          <a:blip r:embed="rId2"/>
-          <a:stretch>
-            <a:fillRect/>
-          </a:stretch>
-        </p:blipFill>
-        <p:spPr>
-          <a:xfrm>
-            <a:off x="2743592" y="2957545"/>
-            <a:ext cx="457200" cy="457200"/>
-          </a:xfrm>
-          <a:prstGeom prst="rect">
-            <a:avLst/>
-          </a:prstGeom>
-        </p:spPr>
-      </p:pic>
-      <p:pic>
-        <p:nvPicPr>
-          <p:cNvPr id="12" name="図 11">
-            <a:extLst>
-              <a:ext uri="{FF2B5EF4-FFF2-40B4-BE49-F238E27FC236}">
-                <a16:creationId xmlns:a16="http://schemas.microsoft.com/office/drawing/2014/main" id="{5E1E45CC-4137-1317-984C-AA878C62D5E3}"/>
-              </a:ext>
-            </a:extLst>
-          </p:cNvPr>
-          <p:cNvPicPr>
-            <a:picLocks noChangeAspect="1"/>
-          </p:cNvPicPr>
-          <p:nvPr/>
-        </p:nvPicPr>
-        <p:blipFill>
-          <a:blip r:embed="rId2"/>
-          <a:stretch>
-            <a:fillRect/>
-          </a:stretch>
-        </p:blipFill>
-        <p:spPr>
-          <a:xfrm>
-            <a:off x="2740672" y="1286047"/>
-            <a:ext cx="457200" cy="457200"/>
-          </a:xfrm>
-          <a:prstGeom prst="rect">
-            <a:avLst/>
-          </a:prstGeom>
-        </p:spPr>
-      </p:pic>
-      <p:cxnSp>
-        <p:nvCxnSpPr>
-          <p:cNvPr id="13" name="直線コネクタ 12">
-            <a:extLst>
-              <a:ext uri="{FF2B5EF4-FFF2-40B4-BE49-F238E27FC236}">
-                <a16:creationId xmlns:a16="http://schemas.microsoft.com/office/drawing/2014/main" id="{F90BF944-6D9B-4EE2-6356-D6D3A751450F}"/>
-              </a:ext>
-            </a:extLst>
-          </p:cNvPr>
-          <p:cNvCxnSpPr>
-            <a:cxnSpLocks/>
-          </p:cNvCxnSpPr>
-          <p:nvPr/>
-        </p:nvCxnSpPr>
-        <p:spPr>
-          <a:xfrm>
-            <a:off x="2977961" y="2492561"/>
-            <a:ext cx="3600" cy="576000"/>
-          </a:xfrm>
-          <a:prstGeom prst="line">
-            <a:avLst/>
-          </a:prstGeom>
-          <a:ln w="25400">
-            <a:solidFill>
-              <a:schemeClr val="tx1"/>
-            </a:solidFill>
-          </a:ln>
-        </p:spPr>
-        <p:style>
-          <a:lnRef idx="1">
-            <a:schemeClr val="accent1"/>
-          </a:lnRef>
-          <a:fillRef idx="0">
-            <a:schemeClr val="accent1"/>
-          </a:fillRef>
-          <a:effectRef idx="0">
-            <a:schemeClr val="accent1"/>
-          </a:effectRef>
-          <a:fontRef idx="minor">
-            <a:schemeClr val="tx1"/>
-          </a:fontRef>
-        </p:style>
-      </p:cxnSp>
-      <p:cxnSp>
-        <p:nvCxnSpPr>
-          <p:cNvPr id="14" name="直線コネクタ 13">
-            <a:extLst>
-              <a:ext uri="{FF2B5EF4-FFF2-40B4-BE49-F238E27FC236}">
-                <a16:creationId xmlns:a16="http://schemas.microsoft.com/office/drawing/2014/main" id="{9BC41FE8-2639-90A0-CAEC-85021780FD9A}"/>
-              </a:ext>
-            </a:extLst>
-          </p:cNvPr>
-          <p:cNvCxnSpPr>
-            <a:cxnSpLocks/>
-          </p:cNvCxnSpPr>
-          <p:nvPr/>
-        </p:nvCxnSpPr>
-        <p:spPr>
-          <a:xfrm>
-            <a:off x="2966705" y="3312448"/>
-            <a:ext cx="3600" cy="503999"/>
-          </a:xfrm>
-          <a:prstGeom prst="line">
-            <a:avLst/>
-          </a:prstGeom>
-          <a:ln w="25400">
-            <a:solidFill>
-              <a:schemeClr val="tx1"/>
-            </a:solidFill>
-          </a:ln>
-        </p:spPr>
-        <p:style>
-          <a:lnRef idx="1">
-            <a:schemeClr val="accent1"/>
-          </a:lnRef>
-          <a:fillRef idx="0">
-            <a:schemeClr val="accent1"/>
-          </a:fillRef>
-          <a:effectRef idx="0">
-            <a:schemeClr val="accent1"/>
-          </a:effectRef>
-          <a:fontRef idx="minor">
-            <a:schemeClr val="tx1"/>
-          </a:fontRef>
-        </p:style>
-      </p:cxnSp>
-      <p:cxnSp>
-        <p:nvCxnSpPr>
-          <p:cNvPr id="16" name="直線コネクタ 15">
-            <a:extLst>
-              <a:ext uri="{FF2B5EF4-FFF2-40B4-BE49-F238E27FC236}">
-                <a16:creationId xmlns:a16="http://schemas.microsoft.com/office/drawing/2014/main" id="{516EF212-E331-9EAF-2249-19282EE959D5}"/>
-              </a:ext>
-            </a:extLst>
-          </p:cNvPr>
-          <p:cNvCxnSpPr>
-            <a:cxnSpLocks/>
-          </p:cNvCxnSpPr>
-          <p:nvPr/>
-        </p:nvCxnSpPr>
-        <p:spPr>
-          <a:xfrm>
-            <a:off x="2962412" y="1666469"/>
-            <a:ext cx="3600" cy="576000"/>
-          </a:xfrm>
-          <a:prstGeom prst="line">
-            <a:avLst/>
-          </a:prstGeom>
-          <a:ln w="25400">
-            <a:solidFill>
-              <a:schemeClr val="tx1"/>
-            </a:solidFill>
-          </a:ln>
-        </p:spPr>
-        <p:style>
-          <a:lnRef idx="1">
-            <a:schemeClr val="accent1"/>
-          </a:lnRef>
-          <a:fillRef idx="0">
-            <a:schemeClr val="accent1"/>
-          </a:fillRef>
-          <a:effectRef idx="0">
-            <a:schemeClr val="accent1"/>
-          </a:effectRef>
-          <a:fontRef idx="minor">
-            <a:schemeClr val="tx1"/>
-          </a:fontRef>
-        </p:style>
-      </p:cxnSp>
-      <p:sp>
-        <p:nvSpPr>
-          <p:cNvPr id="4" name="正方形/長方形 3">
-            <a:extLst>
-              <a:ext uri="{FF2B5EF4-FFF2-40B4-BE49-F238E27FC236}">
-                <a16:creationId xmlns:a16="http://schemas.microsoft.com/office/drawing/2014/main" id="{65346850-983F-4DBC-98B7-7C1DF811018F}"/>
-              </a:ext>
-            </a:extLst>
-          </p:cNvPr>
-          <p:cNvSpPr/>
-          <p:nvPr/>
-        </p:nvSpPr>
-        <p:spPr>
-          <a:xfrm>
-            <a:off x="2715505" y="2971945"/>
-            <a:ext cx="503633" cy="420627"/>
-          </a:xfrm>
-          <a:prstGeom prst="rect">
-            <a:avLst/>
-          </a:prstGeom>
-          <a:noFill/>
-          <a:ln w="38100">
-            <a:solidFill>
-              <a:schemeClr val="bg2"/>
-            </a:solidFill>
-          </a:ln>
-        </p:spPr>
-        <p:style>
-          <a:lnRef idx="2">
-            <a:schemeClr val="accent1">
-              <a:shade val="15000"/>
-            </a:schemeClr>
-          </a:lnRef>
-          <a:fillRef idx="1">
-            <a:schemeClr val="accent1"/>
-          </a:fillRef>
-          <a:effectRef idx="0">
-            <a:schemeClr val="accent1"/>
-          </a:effectRef>
-          <a:fontRef idx="minor">
-            <a:schemeClr val="lt1"/>
-          </a:fontRef>
-        </p:style>
-        <p:txBody>
-          <a:bodyPr rtlCol="0" anchor="ctr"/>
-          <a:lstStyle/>
-          <a:p>
-            <a:pPr algn="ctr"/>
-            <a:endParaRPr kumimoji="1" lang="ja-JP" altLang="en-US">
-              <a:solidFill>
-                <a:schemeClr val="tx1"/>
-              </a:solidFill>
-            </a:endParaRPr>
-          </a:p>
-        </p:txBody>
-      </p:sp>
-      <p:sp>
-        <p:nvSpPr>
-          <p:cNvPr id="25" name="テキスト ボックス 24">
-            <a:extLst>
-              <a:ext uri="{FF2B5EF4-FFF2-40B4-BE49-F238E27FC236}">
-                <a16:creationId xmlns:a16="http://schemas.microsoft.com/office/drawing/2014/main" id="{C5E1FD91-46AE-A1C8-97AC-801A191EC392}"/>
-              </a:ext>
-            </a:extLst>
-          </p:cNvPr>
-          <p:cNvSpPr txBox="1"/>
-          <p:nvPr/>
-        </p:nvSpPr>
-        <p:spPr>
-          <a:xfrm>
-            <a:off x="1331625" y="2984998"/>
-            <a:ext cx="1338828" cy="369332"/>
-          </a:xfrm>
-          <a:prstGeom prst="rect">
-            <a:avLst/>
-          </a:prstGeom>
-          <a:noFill/>
-        </p:spPr>
-        <p:txBody>
-          <a:bodyPr wrap="none" rtlCol="0">
-            <a:spAutoFit/>
-          </a:bodyPr>
-          <a:lstStyle/>
-          <a:p>
-            <a:r>
-              <a:rPr kumimoji="1" lang="ja-JP" altLang="en-US">
-                <a:solidFill>
-                  <a:schemeClr val="bg2"/>
-                </a:solidFill>
-              </a:rPr>
-              <a:t>ここにいる</a:t>
-            </a:r>
-          </a:p>
-        </p:txBody>
-      </p:sp>
-      <p:cxnSp>
-        <p:nvCxnSpPr>
-          <p:cNvPr id="2" name="直線コネクタ 1">
-            <a:extLst>
-              <a:ext uri="{FF2B5EF4-FFF2-40B4-BE49-F238E27FC236}">
-                <a16:creationId xmlns:a16="http://schemas.microsoft.com/office/drawing/2014/main" id="{64160243-0C2F-483B-BED1-936585E50EE8}"/>
-              </a:ext>
-            </a:extLst>
-          </p:cNvPr>
-          <p:cNvCxnSpPr>
-            <a:cxnSpLocks/>
-          </p:cNvCxnSpPr>
-          <p:nvPr/>
-        </p:nvCxnSpPr>
-        <p:spPr>
-          <a:xfrm>
-            <a:off x="5082332" y="1958117"/>
-            <a:ext cx="3600" cy="251999"/>
-          </a:xfrm>
-          <a:prstGeom prst="line">
-            <a:avLst/>
-          </a:prstGeom>
-          <a:ln w="25400">
-            <a:solidFill>
-              <a:schemeClr val="tx1"/>
-            </a:solidFill>
-          </a:ln>
-        </p:spPr>
-        <p:style>
-          <a:lnRef idx="1">
-            <a:schemeClr val="accent1"/>
-          </a:lnRef>
-          <a:fillRef idx="0">
-            <a:schemeClr val="accent1"/>
-          </a:fillRef>
-          <a:effectRef idx="0">
-            <a:schemeClr val="accent1"/>
-          </a:effectRef>
-          <a:fontRef idx="minor">
-            <a:schemeClr val="tx1"/>
-          </a:fontRef>
-        </p:style>
-      </p:cxnSp>
-      <p:cxnSp>
-        <p:nvCxnSpPr>
-          <p:cNvPr id="22" name="直線コネクタ 21">
-            <a:extLst>
-              <a:ext uri="{FF2B5EF4-FFF2-40B4-BE49-F238E27FC236}">
-                <a16:creationId xmlns:a16="http://schemas.microsoft.com/office/drawing/2014/main" id="{02D5C7F5-B87C-21D0-D62B-DF9C7BAA713B}"/>
-              </a:ext>
-            </a:extLst>
-          </p:cNvPr>
-          <p:cNvCxnSpPr>
-            <a:cxnSpLocks/>
-          </p:cNvCxnSpPr>
-          <p:nvPr/>
-        </p:nvCxnSpPr>
-        <p:spPr>
-          <a:xfrm flipV="1">
-            <a:off x="2955101" y="1954469"/>
-            <a:ext cx="2124000" cy="0"/>
-          </a:xfrm>
-          <a:prstGeom prst="line">
-            <a:avLst/>
-          </a:prstGeom>
-          <a:ln w="25400">
-            <a:solidFill>
-              <a:schemeClr val="tx1"/>
-            </a:solidFill>
-          </a:ln>
-        </p:spPr>
-        <p:style>
-          <a:lnRef idx="1">
-            <a:schemeClr val="accent1"/>
-          </a:lnRef>
-          <a:fillRef idx="0">
-            <a:schemeClr val="accent1"/>
-          </a:fillRef>
-          <a:effectRef idx="0">
-            <a:schemeClr val="accent1"/>
-          </a:effectRef>
-          <a:fontRef idx="minor">
-            <a:schemeClr val="tx1"/>
-          </a:fontRef>
-        </p:style>
-      </p:cxnSp>
-      <p:pic>
-        <p:nvPicPr>
-          <p:cNvPr id="28" name="図 27">
-            <a:extLst>
-              <a:ext uri="{FF2B5EF4-FFF2-40B4-BE49-F238E27FC236}">
-                <a16:creationId xmlns:a16="http://schemas.microsoft.com/office/drawing/2014/main" id="{02C52F02-6218-DA3E-1D42-17163F897FA5}"/>
-              </a:ext>
-            </a:extLst>
-          </p:cNvPr>
-          <p:cNvPicPr>
-            <a:picLocks noChangeAspect="1"/>
-          </p:cNvPicPr>
-          <p:nvPr/>
-        </p:nvPicPr>
-        <p:blipFill>
-          <a:blip r:embed="rId2"/>
-          <a:stretch>
-            <a:fillRect/>
-          </a:stretch>
-        </p:blipFill>
-        <p:spPr>
-          <a:xfrm>
-            <a:off x="4882478" y="2116403"/>
-            <a:ext cx="457200" cy="457200"/>
-          </a:xfrm>
-          <a:prstGeom prst="rect">
-            <a:avLst/>
-          </a:prstGeom>
-        </p:spPr>
-      </p:pic>
-      <p:sp>
-        <p:nvSpPr>
-          <p:cNvPr id="30" name="テキスト ボックス 29">
-            <a:extLst>
-              <a:ext uri="{FF2B5EF4-FFF2-40B4-BE49-F238E27FC236}">
-                <a16:creationId xmlns:a16="http://schemas.microsoft.com/office/drawing/2014/main" id="{BCA34AD6-6AD4-4DC0-48DF-5C2014A7B374}"/>
-              </a:ext>
-            </a:extLst>
-          </p:cNvPr>
-          <p:cNvSpPr txBox="1"/>
-          <p:nvPr/>
-        </p:nvSpPr>
-        <p:spPr>
-          <a:xfrm>
-            <a:off x="3187752" y="2027230"/>
-            <a:ext cx="1545578" cy="646331"/>
-          </a:xfrm>
-          <a:prstGeom prst="rect">
-            <a:avLst/>
-          </a:prstGeom>
-          <a:noFill/>
-        </p:spPr>
-        <p:txBody>
-          <a:bodyPr wrap="square">
-            <a:spAutoFit/>
-          </a:bodyPr>
-          <a:lstStyle/>
-          <a:p>
-            <a:r>
-              <a:rPr kumimoji="1" lang="en-US" altLang="ja-JP" dirty="0"/>
-              <a:t>home</a:t>
-            </a:r>
-          </a:p>
-          <a:p>
-            <a:r>
-              <a:rPr kumimoji="1" lang="ja-JP" altLang="en-US"/>
-              <a:t>または</a:t>
-            </a:r>
-            <a:r>
-              <a:rPr kumimoji="1" lang="en-US" altLang="ja-JP" dirty="0"/>
-              <a:t>Users</a:t>
-            </a:r>
-          </a:p>
-        </p:txBody>
-      </p:sp>
-      <p:pic>
-        <p:nvPicPr>
-          <p:cNvPr id="32" name="図 31">
-            <a:extLst>
-              <a:ext uri="{FF2B5EF4-FFF2-40B4-BE49-F238E27FC236}">
-                <a16:creationId xmlns:a16="http://schemas.microsoft.com/office/drawing/2014/main" id="{BFC1F0CD-5BD9-BF3E-CB59-C218B7C24986}"/>
-              </a:ext>
-            </a:extLst>
-          </p:cNvPr>
-          <p:cNvPicPr>
-            <a:picLocks noChangeAspect="1"/>
-          </p:cNvPicPr>
-          <p:nvPr/>
-        </p:nvPicPr>
-        <p:blipFill>
-          <a:blip r:embed="rId3"/>
-          <a:stretch>
-            <a:fillRect/>
-          </a:stretch>
-        </p:blipFill>
-        <p:spPr>
-          <a:xfrm>
-            <a:off x="4894607" y="2907306"/>
-            <a:ext cx="457200" cy="457200"/>
-          </a:xfrm>
-          <a:prstGeom prst="rect">
-            <a:avLst/>
-          </a:prstGeom>
-        </p:spPr>
-      </p:pic>
-      <p:cxnSp>
-        <p:nvCxnSpPr>
-          <p:cNvPr id="33" name="直線コネクタ 32">
-            <a:extLst>
-              <a:ext uri="{FF2B5EF4-FFF2-40B4-BE49-F238E27FC236}">
-                <a16:creationId xmlns:a16="http://schemas.microsoft.com/office/drawing/2014/main" id="{7AD906A8-C2D6-0A1D-E8BC-14EFDDBEB8F3}"/>
-              </a:ext>
-            </a:extLst>
-          </p:cNvPr>
-          <p:cNvCxnSpPr>
-            <a:cxnSpLocks/>
-          </p:cNvCxnSpPr>
-          <p:nvPr/>
-        </p:nvCxnSpPr>
-        <p:spPr>
-          <a:xfrm>
-            <a:off x="5108983" y="2472021"/>
-            <a:ext cx="3600" cy="503999"/>
-          </a:xfrm>
-          <a:prstGeom prst="line">
-            <a:avLst/>
-          </a:prstGeom>
-          <a:ln w="25400">
-            <a:solidFill>
-              <a:schemeClr val="tx1"/>
-            </a:solidFill>
-          </a:ln>
-        </p:spPr>
-        <p:style>
-          <a:lnRef idx="1">
-            <a:schemeClr val="accent1"/>
-          </a:lnRef>
-          <a:fillRef idx="0">
-            <a:schemeClr val="accent1"/>
-          </a:fillRef>
-          <a:effectRef idx="0">
-            <a:schemeClr val="accent1"/>
-          </a:effectRef>
-          <a:fontRef idx="minor">
-            <a:schemeClr val="tx1"/>
-          </a:fontRef>
-        </p:style>
-      </p:cxnSp>
-      <p:cxnSp>
-        <p:nvCxnSpPr>
-          <p:cNvPr id="34" name="直線コネクタ 33">
-            <a:extLst>
-              <a:ext uri="{FF2B5EF4-FFF2-40B4-BE49-F238E27FC236}">
-                <a16:creationId xmlns:a16="http://schemas.microsoft.com/office/drawing/2014/main" id="{29CEB435-374C-7662-6BCE-2838FCC0AA26}"/>
-              </a:ext>
-            </a:extLst>
-          </p:cNvPr>
-          <p:cNvCxnSpPr>
-            <a:cxnSpLocks/>
-          </p:cNvCxnSpPr>
-          <p:nvPr/>
-        </p:nvCxnSpPr>
-        <p:spPr>
-          <a:xfrm>
-            <a:off x="5108983" y="2737175"/>
-            <a:ext cx="1478813" cy="0"/>
-          </a:xfrm>
-          <a:prstGeom prst="line">
-            <a:avLst/>
-          </a:prstGeom>
-          <a:ln w="25400">
-            <a:solidFill>
-              <a:schemeClr val="tx1"/>
-            </a:solidFill>
-          </a:ln>
-        </p:spPr>
-        <p:style>
-          <a:lnRef idx="1">
-            <a:schemeClr val="accent1"/>
-          </a:lnRef>
-          <a:fillRef idx="0">
-            <a:schemeClr val="accent1"/>
-          </a:fillRef>
-          <a:effectRef idx="0">
-            <a:schemeClr val="accent1"/>
-          </a:effectRef>
-          <a:fontRef idx="minor">
-            <a:schemeClr val="tx1"/>
-          </a:fontRef>
-        </p:style>
-      </p:cxnSp>
-      <p:pic>
-        <p:nvPicPr>
-          <p:cNvPr id="35" name="図 34">
-            <a:extLst>
-              <a:ext uri="{FF2B5EF4-FFF2-40B4-BE49-F238E27FC236}">
-                <a16:creationId xmlns:a16="http://schemas.microsoft.com/office/drawing/2014/main" id="{98421023-E8A6-0A81-BFDA-178C6A428F41}"/>
-              </a:ext>
-            </a:extLst>
-          </p:cNvPr>
-          <p:cNvPicPr>
-            <a:picLocks noChangeAspect="1"/>
-          </p:cNvPicPr>
-          <p:nvPr/>
-        </p:nvPicPr>
-        <p:blipFill>
-          <a:blip r:embed="rId3"/>
-          <a:stretch>
-            <a:fillRect/>
-          </a:stretch>
-        </p:blipFill>
-        <p:spPr>
-          <a:xfrm>
-            <a:off x="6009652" y="2900748"/>
-            <a:ext cx="457200" cy="457200"/>
-          </a:xfrm>
-          <a:prstGeom prst="rect">
-            <a:avLst/>
-          </a:prstGeom>
-        </p:spPr>
-      </p:pic>
-      <p:sp>
-        <p:nvSpPr>
-          <p:cNvPr id="36" name="テキスト ボックス 35">
-            <a:extLst>
-              <a:ext uri="{FF2B5EF4-FFF2-40B4-BE49-F238E27FC236}">
-                <a16:creationId xmlns:a16="http://schemas.microsoft.com/office/drawing/2014/main" id="{66AFE3DE-75E9-3FA2-0366-16C470EA8F1D}"/>
-              </a:ext>
-            </a:extLst>
-          </p:cNvPr>
-          <p:cNvSpPr txBox="1"/>
-          <p:nvPr/>
-        </p:nvSpPr>
-        <p:spPr>
-          <a:xfrm>
-            <a:off x="5292669" y="2160337"/>
-            <a:ext cx="1577676" cy="1200329"/>
-          </a:xfrm>
-          <a:prstGeom prst="rect">
-            <a:avLst/>
-          </a:prstGeom>
-          <a:noFill/>
-        </p:spPr>
-        <p:txBody>
-          <a:bodyPr wrap="none" rtlCol="0">
-            <a:spAutoFit/>
-          </a:bodyPr>
-          <a:lstStyle/>
-          <a:p>
-            <a:r>
-              <a:rPr kumimoji="1" lang="en-US" altLang="ja-JP" dirty="0"/>
-              <a:t>bin</a:t>
-            </a:r>
-          </a:p>
-          <a:p>
-            <a:endParaRPr kumimoji="1" lang="en-US" altLang="ja-JP" dirty="0"/>
-          </a:p>
-          <a:p>
-            <a:endParaRPr kumimoji="1" lang="en-US" altLang="ja-JP" dirty="0"/>
-          </a:p>
-          <a:p>
-            <a:r>
-              <a:rPr kumimoji="1" lang="en-US" altLang="ja-JP" dirty="0"/>
-              <a:t>cp       ls</a:t>
-            </a:r>
-            <a:endParaRPr kumimoji="1" lang="ja-JP" altLang="en-US"/>
-          </a:p>
-        </p:txBody>
-      </p:sp>
-      <p:cxnSp>
-        <p:nvCxnSpPr>
-          <p:cNvPr id="37" name="直線コネクタ 36">
-            <a:extLst>
-              <a:ext uri="{FF2B5EF4-FFF2-40B4-BE49-F238E27FC236}">
-                <a16:creationId xmlns:a16="http://schemas.microsoft.com/office/drawing/2014/main" id="{E15E962A-10A3-D6B0-CEF0-508D4AF93E39}"/>
-              </a:ext>
-            </a:extLst>
-          </p:cNvPr>
-          <p:cNvCxnSpPr>
-            <a:cxnSpLocks/>
-          </p:cNvCxnSpPr>
-          <p:nvPr/>
-        </p:nvCxnSpPr>
-        <p:spPr>
-          <a:xfrm>
-            <a:off x="6229142" y="2716307"/>
-            <a:ext cx="3600" cy="251999"/>
-          </a:xfrm>
-          <a:prstGeom prst="line">
-            <a:avLst/>
-          </a:prstGeom>
-          <a:ln w="25400">
-            <a:solidFill>
-              <a:schemeClr val="tx1"/>
-            </a:solidFill>
-          </a:ln>
-        </p:spPr>
-        <p:style>
-          <a:lnRef idx="1">
-            <a:schemeClr val="accent1"/>
-          </a:lnRef>
-          <a:fillRef idx="0">
-            <a:schemeClr val="accent1"/>
-          </a:fillRef>
-          <a:effectRef idx="0">
-            <a:schemeClr val="accent1"/>
-          </a:effectRef>
-          <a:fontRef idx="minor">
-            <a:schemeClr val="tx1"/>
-          </a:fontRef>
-        </p:style>
-      </p:cxnSp>
-      <p:cxnSp>
-        <p:nvCxnSpPr>
-          <p:cNvPr id="39" name="直線コネクタ 38">
-            <a:extLst>
-              <a:ext uri="{FF2B5EF4-FFF2-40B4-BE49-F238E27FC236}">
-                <a16:creationId xmlns:a16="http://schemas.microsoft.com/office/drawing/2014/main" id="{19FD6C61-60D9-B6F4-4CDD-72BBE64D03CB}"/>
-              </a:ext>
-            </a:extLst>
-          </p:cNvPr>
-          <p:cNvCxnSpPr>
-            <a:cxnSpLocks/>
-          </p:cNvCxnSpPr>
-          <p:nvPr/>
-        </p:nvCxnSpPr>
-        <p:spPr>
-          <a:xfrm>
-            <a:off x="2855737" y="2500204"/>
-            <a:ext cx="3600" cy="503999"/>
-          </a:xfrm>
-          <a:prstGeom prst="line">
-            <a:avLst/>
-          </a:prstGeom>
-          <a:ln w="25400">
-            <a:solidFill>
-              <a:schemeClr val="bg2"/>
-            </a:solidFill>
-            <a:headEnd type="triangle" w="lg" len="lg"/>
-          </a:ln>
-        </p:spPr>
-        <p:style>
-          <a:lnRef idx="1">
-            <a:schemeClr val="accent1"/>
-          </a:lnRef>
-          <a:fillRef idx="0">
-            <a:schemeClr val="accent1"/>
-          </a:fillRef>
-          <a:effectRef idx="0">
-            <a:schemeClr val="accent1"/>
-          </a:effectRef>
-          <a:fontRef idx="minor">
-            <a:schemeClr val="tx1"/>
-          </a:fontRef>
-        </p:style>
-      </p:cxnSp>
-      <p:sp>
-        <p:nvSpPr>
-          <p:cNvPr id="41" name="正方形/長方形 40">
-            <a:extLst>
-              <a:ext uri="{FF2B5EF4-FFF2-40B4-BE49-F238E27FC236}">
-                <a16:creationId xmlns:a16="http://schemas.microsoft.com/office/drawing/2014/main" id="{9512D8ED-EA21-BBBF-E9A2-2F7DB41500F8}"/>
-              </a:ext>
-            </a:extLst>
-          </p:cNvPr>
-          <p:cNvSpPr/>
-          <p:nvPr/>
-        </p:nvSpPr>
-        <p:spPr>
-          <a:xfrm>
-            <a:off x="4857166" y="2128005"/>
-            <a:ext cx="503633" cy="420627"/>
-          </a:xfrm>
-          <a:prstGeom prst="rect">
-            <a:avLst/>
-          </a:prstGeom>
-          <a:noFill/>
-          <a:ln w="38100">
-            <a:solidFill>
-              <a:schemeClr val="bg2"/>
-            </a:solidFill>
-          </a:ln>
-        </p:spPr>
-        <p:style>
-          <a:lnRef idx="2">
-            <a:schemeClr val="accent1">
-              <a:shade val="15000"/>
-            </a:schemeClr>
-          </a:lnRef>
-          <a:fillRef idx="1">
-            <a:schemeClr val="accent1"/>
-          </a:fillRef>
-          <a:effectRef idx="0">
-            <a:schemeClr val="accent1"/>
-          </a:effectRef>
-          <a:fontRef idx="minor">
-            <a:schemeClr val="lt1"/>
-          </a:fontRef>
-        </p:style>
-        <p:txBody>
-          <a:bodyPr rtlCol="0" anchor="ctr"/>
-          <a:lstStyle/>
-          <a:p>
-            <a:pPr algn="ctr"/>
-            <a:endParaRPr kumimoji="1" lang="ja-JP" altLang="en-US">
-              <a:solidFill>
-                <a:schemeClr val="tx1"/>
-              </a:solidFill>
-            </a:endParaRPr>
-          </a:p>
-        </p:txBody>
-      </p:sp>
-      <p:sp>
-        <p:nvSpPr>
-          <p:cNvPr id="42" name="テキスト ボックス 41">
-            <a:extLst>
-              <a:ext uri="{FF2B5EF4-FFF2-40B4-BE49-F238E27FC236}">
-                <a16:creationId xmlns:a16="http://schemas.microsoft.com/office/drawing/2014/main" id="{2F5621A2-57D2-29FB-627F-40F7F6D02FA3}"/>
-              </a:ext>
-            </a:extLst>
-          </p:cNvPr>
-          <p:cNvSpPr txBox="1"/>
-          <p:nvPr/>
-        </p:nvSpPr>
-        <p:spPr>
-          <a:xfrm>
-            <a:off x="5770990" y="2038967"/>
-            <a:ext cx="2374368" cy="646331"/>
-          </a:xfrm>
-          <a:prstGeom prst="rect">
-            <a:avLst/>
-          </a:prstGeom>
-          <a:noFill/>
-        </p:spPr>
-        <p:txBody>
-          <a:bodyPr wrap="none" rtlCol="0">
-            <a:spAutoFit/>
-          </a:bodyPr>
-          <a:lstStyle/>
-          <a:p>
-            <a:r>
-              <a:rPr kumimoji="1" lang="ja-JP" altLang="en-US">
-                <a:solidFill>
-                  <a:schemeClr val="bg2"/>
-                </a:solidFill>
-              </a:rPr>
-              <a:t>絶対パス </a:t>
-            </a:r>
-            <a:r>
-              <a:rPr kumimoji="1" lang="en-US" altLang="ja-JP" dirty="0">
-                <a:solidFill>
-                  <a:schemeClr val="bg2"/>
-                </a:solidFill>
-              </a:rPr>
-              <a:t>/bin</a:t>
-            </a:r>
-          </a:p>
-          <a:p>
-            <a:r>
-              <a:rPr kumimoji="1" lang="ja-JP" altLang="en-US">
-                <a:solidFill>
-                  <a:schemeClr val="bg2"/>
-                </a:solidFill>
-              </a:rPr>
-              <a:t>相対パス</a:t>
-            </a:r>
-            <a:r>
-              <a:rPr kumimoji="1" lang="en-US" altLang="ja-JP" dirty="0">
-                <a:solidFill>
-                  <a:schemeClr val="bg2"/>
-                </a:solidFill>
-              </a:rPr>
-              <a:t> ../../bin</a:t>
-            </a:r>
-            <a:endParaRPr kumimoji="1" lang="ja-JP" altLang="en-US">
-              <a:solidFill>
-                <a:schemeClr val="bg2"/>
-              </a:solidFill>
-            </a:endParaRPr>
-          </a:p>
-        </p:txBody>
-      </p:sp>
-      <p:cxnSp>
-        <p:nvCxnSpPr>
-          <p:cNvPr id="43" name="直線コネクタ 42">
-            <a:extLst>
-              <a:ext uri="{FF2B5EF4-FFF2-40B4-BE49-F238E27FC236}">
-                <a16:creationId xmlns:a16="http://schemas.microsoft.com/office/drawing/2014/main" id="{3C583352-D914-8838-B060-E0E16DAD7D3B}"/>
-              </a:ext>
-            </a:extLst>
-          </p:cNvPr>
-          <p:cNvCxnSpPr>
-            <a:cxnSpLocks/>
-          </p:cNvCxnSpPr>
-          <p:nvPr/>
-        </p:nvCxnSpPr>
-        <p:spPr>
-          <a:xfrm>
-            <a:off x="2836591" y="1675240"/>
-            <a:ext cx="3600" cy="503999"/>
-          </a:xfrm>
-          <a:prstGeom prst="line">
-            <a:avLst/>
-          </a:prstGeom>
-          <a:ln w="25400">
-            <a:solidFill>
-              <a:schemeClr val="bg2"/>
-            </a:solidFill>
-            <a:headEnd type="triangle" w="lg" len="lg"/>
-          </a:ln>
-        </p:spPr>
-        <p:style>
-          <a:lnRef idx="1">
-            <a:schemeClr val="accent1"/>
-          </a:lnRef>
-          <a:fillRef idx="0">
-            <a:schemeClr val="accent1"/>
-          </a:fillRef>
-          <a:effectRef idx="0">
-            <a:schemeClr val="accent1"/>
-          </a:effectRef>
-          <a:fontRef idx="minor">
-            <a:schemeClr val="tx1"/>
-          </a:fontRef>
-        </p:style>
-      </p:cxnSp>
-      <p:cxnSp>
-        <p:nvCxnSpPr>
-          <p:cNvPr id="44" name="直線コネクタ 43">
-            <a:extLst>
-              <a:ext uri="{FF2B5EF4-FFF2-40B4-BE49-F238E27FC236}">
-                <a16:creationId xmlns:a16="http://schemas.microsoft.com/office/drawing/2014/main" id="{A01FA107-865F-5CA4-5783-0911C3623016}"/>
-              </a:ext>
-            </a:extLst>
-          </p:cNvPr>
-          <p:cNvCxnSpPr>
-            <a:cxnSpLocks/>
-          </p:cNvCxnSpPr>
-          <p:nvPr/>
-        </p:nvCxnSpPr>
-        <p:spPr>
-          <a:xfrm flipH="1" flipV="1">
-            <a:off x="4980881" y="1840771"/>
-            <a:ext cx="3048" cy="247886"/>
-          </a:xfrm>
-          <a:prstGeom prst="line">
-            <a:avLst/>
-          </a:prstGeom>
-          <a:ln w="25400">
-            <a:solidFill>
-              <a:schemeClr val="bg2"/>
-            </a:solidFill>
-            <a:headEnd type="triangle" w="lg" len="lg"/>
-          </a:ln>
-        </p:spPr>
-        <p:style>
-          <a:lnRef idx="1">
-            <a:schemeClr val="accent1"/>
-          </a:lnRef>
-          <a:fillRef idx="0">
-            <a:schemeClr val="accent1"/>
-          </a:fillRef>
-          <a:effectRef idx="0">
-            <a:schemeClr val="accent1"/>
-          </a:effectRef>
-          <a:fontRef idx="minor">
-            <a:schemeClr val="tx1"/>
-          </a:fontRef>
-        </p:style>
-      </p:cxnSp>
-      <p:cxnSp>
-        <p:nvCxnSpPr>
-          <p:cNvPr id="46" name="直線コネクタ 45">
-            <a:extLst>
-              <a:ext uri="{FF2B5EF4-FFF2-40B4-BE49-F238E27FC236}">
-                <a16:creationId xmlns:a16="http://schemas.microsoft.com/office/drawing/2014/main" id="{C9B8C1B4-1C65-90A1-5EF1-FD1AC82CAFCF}"/>
-              </a:ext>
-            </a:extLst>
-          </p:cNvPr>
-          <p:cNvCxnSpPr>
-            <a:cxnSpLocks/>
-          </p:cNvCxnSpPr>
-          <p:nvPr/>
-        </p:nvCxnSpPr>
-        <p:spPr>
-          <a:xfrm>
-            <a:off x="3052842" y="1840771"/>
-            <a:ext cx="1928039" cy="0"/>
-          </a:xfrm>
-          <a:prstGeom prst="line">
-            <a:avLst/>
-          </a:prstGeom>
-          <a:ln w="25400">
-            <a:solidFill>
-              <a:schemeClr val="accent1"/>
-            </a:solidFill>
-          </a:ln>
-        </p:spPr>
-        <p:style>
-          <a:lnRef idx="1">
-            <a:schemeClr val="accent1"/>
-          </a:lnRef>
-          <a:fillRef idx="0">
-            <a:schemeClr val="accent1"/>
-          </a:fillRef>
-          <a:effectRef idx="0">
-            <a:schemeClr val="accent1"/>
-          </a:effectRef>
-          <a:fontRef idx="minor">
-            <a:schemeClr val="tx1"/>
-          </a:fontRef>
-        </p:style>
-      </p:cxnSp>
-      <p:cxnSp>
-        <p:nvCxnSpPr>
-          <p:cNvPr id="48" name="直線コネクタ 47">
-            <a:extLst>
-              <a:ext uri="{FF2B5EF4-FFF2-40B4-BE49-F238E27FC236}">
-                <a16:creationId xmlns:a16="http://schemas.microsoft.com/office/drawing/2014/main" id="{ED6E915A-8696-AE5A-945A-794F8199AE8F}"/>
-              </a:ext>
-            </a:extLst>
-          </p:cNvPr>
-          <p:cNvCxnSpPr>
-            <a:cxnSpLocks/>
-          </p:cNvCxnSpPr>
-          <p:nvPr/>
-        </p:nvCxnSpPr>
-        <p:spPr>
-          <a:xfrm flipV="1">
-            <a:off x="3052842" y="1677199"/>
-            <a:ext cx="0" cy="163572"/>
-          </a:xfrm>
-          <a:prstGeom prst="line">
-            <a:avLst/>
-          </a:prstGeom>
-          <a:ln w="25400">
-            <a:solidFill>
-              <a:schemeClr val="accent1"/>
-            </a:solidFill>
-          </a:ln>
-        </p:spPr>
-        <p:style>
-          <a:lnRef idx="1">
-            <a:schemeClr val="accent1"/>
-          </a:lnRef>
-          <a:fillRef idx="0">
-            <a:schemeClr val="accent1"/>
-          </a:fillRef>
-          <a:effectRef idx="0">
-            <a:schemeClr val="accent1"/>
-          </a:effectRef>
-          <a:fontRef idx="minor">
-            <a:schemeClr val="tx1"/>
-          </a:fontRef>
-        </p:style>
-      </p:cxnSp>
-    </p:spTree>
-    <p:extLst>
-      <p:ext uri="{BB962C8B-B14F-4D97-AF65-F5344CB8AC3E}">
-        <p14:creationId xmlns:p14="http://schemas.microsoft.com/office/powerpoint/2010/main" val="2243243882"/>
       </p:ext>
     </p:extLst>
   </p:cSld>
